--- a/docs/4_화면정의서/화면정의서.pptx
+++ b/docs/4_화면정의서/화면정의서.pptx
@@ -6,7 +6,14 @@
   </p:sldMasterIdLst>
   <p:sldIdLst>
     <p:sldId id="256" r:id="rId2"/>
-    <p:sldId id="257" r:id="rId3"/>
+    <p:sldId id="261" r:id="rId3"/>
+    <p:sldId id="257" r:id="rId4"/>
+    <p:sldId id="262" r:id="rId5"/>
+    <p:sldId id="263" r:id="rId6"/>
+    <p:sldId id="264" r:id="rId7"/>
+    <p:sldId id="265" r:id="rId8"/>
+    <p:sldId id="266" r:id="rId9"/>
+    <p:sldId id="268" r:id="rId10"/>
   </p:sldIdLst>
   <p:sldSz cx="12192000" cy="6858000"/>
   <p:notesSz cx="6858000" cy="9144000"/>
@@ -3276,7 +3283,7 @@
             </a:pPr>
             <a:r>
               <a:rPr lang="ko-KR" altLang="en-US" sz="4000"/>
-              <a:t>프로젝트명</a:t>
+              <a:t>위드유</a:t>
             </a:r>
             <a:endParaRPr lang="ko-KR" altLang="en-US" sz="4000"/>
           </a:p>
@@ -3337,10 +3344,18 @@
               <a:defRPr/>
             </a:pPr>
             <a:r>
-              <a:rPr lang="ko-KR" altLang="en-US"/>
-              <a:t>프로젝트 내용 요약</a:t>
-            </a:r>
-            <a:endParaRPr lang="ko-KR" altLang="en-US"/>
+              <a:rPr xmlns:mc="http://schemas.openxmlformats.org/markup-compatibility/2006" xmlns:hp="http://schemas.haansoft.com/office/presentation/8.0" lang="en-US" b="0" i="0" u="none" strike="noStrike" baseline="0" mc:Ignorable="hp" hp:hslEmbossed="0">
+                <a:solidFill>
+                  <a:srgbClr val="404040"/>
+                </a:solidFill>
+                <a:latin typeface="맑은 고딕"/>
+                <a:cs typeface="AppleSDGothicNeoL00"/>
+              </a:rPr>
+              <a:t>수학 학원의 온라인 학습·시험·성적 관리 통합 웹사이트 구축</a:t>
+            </a:r>
+            <a:endParaRPr lang="ko-KR" altLang="en-US">
+              <a:latin typeface="맑은 고딕"/>
+            </a:endParaRPr>
           </a:p>
         </p:txBody>
       </p:sp>
@@ -3373,7 +3388,7 @@
             </a:r>
             <a:r>
               <a:rPr lang="en-US" altLang="ko-KR"/>
-              <a:t>: 2000</a:t>
+              <a:t>: 2026</a:t>
             </a:r>
             <a:r>
               <a:rPr lang="ko-KR" altLang="en-US"/>
@@ -3381,7 +3396,7 @@
             </a:r>
             <a:r>
               <a:rPr lang="en-US" altLang="ko-KR"/>
-              <a:t>00</a:t>
+              <a:t>01</a:t>
             </a:r>
             <a:r>
               <a:rPr lang="ko-KR" altLang="en-US"/>
@@ -3389,7 +3404,7 @@
             </a:r>
             <a:r>
               <a:rPr lang="en-US" altLang="ko-KR"/>
-              <a:t>00</a:t>
+              <a:t>06</a:t>
             </a:r>
             <a:r>
               <a:rPr lang="ko-KR" altLang="en-US"/>
@@ -3722,739 +3737,3921 @@
             </a:pPr>
             <a:r>
               <a:rPr lang="ko-KR" altLang="en-US" sz="2700"/>
-              <a:t>로그인 페이지 화면</a:t>
-            </a:r>
-            <a:endParaRPr lang="en-US" altLang="ko-KR" sz="2700"/>
-          </a:p>
-        </p:txBody>
-      </p:sp>
-      <p:pic>
-        <p:nvPicPr>
-          <p:cNvPr id="6" name="그림 5"/>
-          <p:cNvPicPr>
-            <a:picLocks noChangeAspect="1"/>
-          </p:cNvPicPr>
+              <a:t>로그인  화면</a:t>
+            </a:r>
+            <a:endParaRPr lang="ko-KR" altLang="en-US" sz="2700"/>
+          </a:p>
+        </p:txBody>
+      </p:sp>
+      <p:sp>
+        <p:nvSpPr>
+          <p:cNvPr id="8" name="직사각형 7"/>
+          <p:cNvSpPr/>
           <p:nvPr/>
-        </p:nvPicPr>
-        <p:blipFill rotWithShape="1">
-          <a:blip r:embed="rId2"/>
-          <a:stretch>
-            <a:fillRect/>
-          </a:stretch>
-        </p:blipFill>
-        <p:spPr>
-          <a:xfrm>
-            <a:off x="372018" y="1336690"/>
-            <a:ext cx="5287112" cy="5096586"/>
-          </a:xfrm>
-          <a:prstGeom prst="rect">
-            <a:avLst/>
-          </a:prstGeom>
+        </p:nvSpPr>
+        <p:spPr>
+          <a:xfrm>
+            <a:off x="372017" y="1584798"/>
+            <a:ext cx="5936774" cy="5015824"/>
+          </a:xfrm>
+          <a:prstGeom prst="rect">
+            <a:avLst/>
+          </a:prstGeom>
+          <a:solidFill>
+            <a:schemeClr val="lt1"/>
+          </a:solidFill>
+          <a:ln>
+            <a:solidFill>
+              <a:srgbClr val="000000"/>
+            </a:solidFill>
+          </a:ln>
+        </p:spPr>
+        <p:style>
+          <a:lnRef idx="2">
+            <a:schemeClr val="accent1">
+              <a:shade val="20000"/>
+            </a:schemeClr>
+          </a:lnRef>
+          <a:fillRef idx="1">
+            <a:schemeClr val="accent1"/>
+          </a:fillRef>
+          <a:effectRef idx="0">
+            <a:schemeClr val="accent1"/>
+          </a:effectRef>
+          <a:fontRef idx="minor">
+            <a:schemeClr val="lt1"/>
+          </a:fontRef>
+        </p:style>
+        <p:txBody>
+          <a:bodyPr anchor="ctr"/>
+          <a:p>
+            <a:pPr lvl="0" algn="ctr">
+              <a:defRPr/>
+            </a:pPr>
+            <a:endParaRPr lang="ko-KR" altLang="en-US"/>
+          </a:p>
+        </p:txBody>
+      </p:sp>
+      <p:sp>
+        <p:nvSpPr>
+          <p:cNvPr id="15" name="가로 글상자 14"/>
+          <p:cNvSpPr txBox="1"/>
+          <p:nvPr/>
+        </p:nvSpPr>
+        <p:spPr>
+          <a:xfrm>
+            <a:off x="372018" y="1898918"/>
+            <a:ext cx="5936774" cy="451851"/>
+          </a:xfrm>
+          <a:prstGeom prst="rect">
+            <a:avLst/>
+          </a:prstGeom>
+        </p:spPr>
+        <p:txBody>
+          <a:bodyPr wrap="square">
+            <a:spAutoFit/>
+          </a:bodyPr>
+          <a:p>
+            <a:pPr lvl="0" algn="ctr">
+              <a:defRPr/>
+            </a:pPr>
+            <a:r>
+              <a:rPr lang="ko-KR" altLang="en-US" sz="2400"/>
+              <a:t>위드유</a:t>
+            </a:r>
+            <a:endParaRPr lang="ko-KR" altLang="en-US" sz="2400"/>
+          </a:p>
+        </p:txBody>
+      </p:sp>
+      <p:sp>
+        <p:nvSpPr>
+          <p:cNvPr id="17" name="가로 글상자 16"/>
+          <p:cNvSpPr txBox="1"/>
+          <p:nvPr/>
+        </p:nvSpPr>
+        <p:spPr>
+          <a:xfrm>
+            <a:off x="6957304" y="1584798"/>
+            <a:ext cx="4681436" cy="4204497"/>
+          </a:xfrm>
+          <a:prstGeom prst="rect">
+            <a:avLst/>
+          </a:prstGeom>
+        </p:spPr>
+        <p:txBody>
+          <a:bodyPr wrap="square">
+            <a:spAutoFit/>
+          </a:bodyPr>
+          <a:p>
+            <a:pPr lvl="0">
+              <a:defRPr/>
+            </a:pPr>
+            <a:r>
+              <a:rPr lang="ko-KR" altLang="en-US"/>
+              <a:t>화면</a:t>
+            </a:r>
+            <a:r>
+              <a:rPr lang="en-US" altLang="ko-KR"/>
+              <a:t>ID :</a:t>
+            </a:r>
+            <a:r>
+              <a:rPr lang="ko-KR" altLang="en-US"/>
+              <a:t> </a:t>
+            </a:r>
+            <a:r>
+              <a:rPr lang="en-US" altLang="ko-KR"/>
+              <a:t>SCR-001</a:t>
+            </a:r>
+            <a:endParaRPr lang="en-US" altLang="ko-KR"/>
+          </a:p>
+          <a:p>
+            <a:pPr lvl="0">
+              <a:defRPr/>
+            </a:pPr>
+            <a:endParaRPr lang="ko-KR" altLang="en-US"/>
+          </a:p>
+          <a:p>
+            <a:pPr lvl="0">
+              <a:defRPr/>
+            </a:pPr>
+            <a:endParaRPr lang="ko-KR" altLang="en-US"/>
+          </a:p>
+          <a:p>
+            <a:pPr lvl="0">
+              <a:defRPr/>
+            </a:pPr>
+            <a:r>
+              <a:rPr lang="ko-KR" altLang="en-US"/>
+              <a:t>기능</a:t>
+            </a:r>
+            <a:endParaRPr lang="ko-KR" altLang="en-US"/>
+          </a:p>
+          <a:p>
+            <a:pPr lvl="0">
+              <a:defRPr/>
+            </a:pPr>
+            <a:r>
+              <a:rPr lang="en-US" altLang="ko-KR"/>
+              <a:t>- </a:t>
+            </a:r>
+            <a:r>
+              <a:rPr lang="ko-KR" altLang="en-US"/>
+              <a:t>위드유</a:t>
+            </a:r>
+            <a:r>
+              <a:rPr lang="en-US" altLang="ko-KR"/>
+              <a:t> </a:t>
+            </a:r>
+            <a:r>
+              <a:rPr lang="ko-KR" altLang="en-US"/>
+              <a:t>메인 화면 이동</a:t>
+            </a:r>
+            <a:endParaRPr lang="ko-KR" altLang="en-US"/>
+          </a:p>
+          <a:p>
+            <a:pPr lvl="0">
+              <a:defRPr/>
+            </a:pPr>
+            <a:r>
+              <a:rPr lang="en-US" altLang="ko-KR"/>
+              <a:t>-</a:t>
+            </a:r>
+            <a:r>
+              <a:rPr lang="ko-KR" altLang="en-US"/>
+              <a:t> 로그인 버튼</a:t>
+            </a:r>
+            <a:endParaRPr lang="ko-KR" altLang="en-US"/>
+          </a:p>
+          <a:p>
+            <a:pPr lvl="0">
+              <a:defRPr/>
+            </a:pPr>
+            <a:r>
+              <a:rPr lang="en-US" altLang="ko-KR"/>
+              <a:t>-</a:t>
+            </a:r>
+            <a:r>
+              <a:rPr lang="ko-KR" altLang="en-US"/>
+              <a:t> 계정 찾기 이동</a:t>
+            </a:r>
+            <a:endParaRPr lang="ko-KR" altLang="en-US"/>
+          </a:p>
+          <a:p>
+            <a:pPr lvl="0">
+              <a:defRPr/>
+            </a:pPr>
+            <a:r>
+              <a:rPr lang="en-US" altLang="ko-KR"/>
+              <a:t>-</a:t>
+            </a:r>
+            <a:r>
+              <a:rPr lang="ko-KR" altLang="en-US"/>
+              <a:t> 회원가입 이동</a:t>
+            </a:r>
+            <a:endParaRPr lang="ko-KR" altLang="en-US"/>
+          </a:p>
+          <a:p>
+            <a:pPr lvl="0">
+              <a:defRPr/>
+            </a:pPr>
+            <a:r>
+              <a:rPr lang="en-US" altLang="ko-KR"/>
+              <a:t>-</a:t>
+            </a:r>
+            <a:r>
+              <a:rPr lang="ko-KR" altLang="en-US"/>
+              <a:t> 구글 로그인</a:t>
+            </a:r>
+            <a:endParaRPr lang="ko-KR" altLang="en-US"/>
+          </a:p>
+          <a:p>
+            <a:pPr lvl="0">
+              <a:defRPr/>
+            </a:pPr>
+            <a:r>
+              <a:rPr lang="en-US" altLang="ko-KR"/>
+              <a:t>-</a:t>
+            </a:r>
+            <a:r>
+              <a:rPr lang="ko-KR" altLang="en-US"/>
+              <a:t> 카카오 로그인</a:t>
+            </a:r>
+            <a:endParaRPr lang="ko-KR" altLang="en-US"/>
+          </a:p>
+          <a:p>
+            <a:pPr lvl="0">
+              <a:defRPr/>
+            </a:pPr>
+            <a:endParaRPr lang="ko-KR" altLang="en-US"/>
+          </a:p>
+          <a:p>
+            <a:pPr lvl="0">
+              <a:defRPr/>
+            </a:pPr>
+            <a:endParaRPr lang="ko-KR" altLang="en-US"/>
+          </a:p>
+          <a:p>
+            <a:pPr lvl="0">
+              <a:defRPr/>
+            </a:pPr>
+            <a:r>
+              <a:rPr lang="ko-KR" altLang="en-US"/>
+              <a:t>로그인 성공시 </a:t>
+            </a:r>
+            <a:r>
+              <a:rPr lang="en-US" altLang="ko-KR"/>
+              <a:t>:</a:t>
+            </a:r>
+            <a:r>
+              <a:rPr lang="ko-KR" altLang="en-US"/>
+              <a:t> 메인 화면 이동</a:t>
+            </a:r>
+            <a:endParaRPr lang="ko-KR" altLang="en-US"/>
+          </a:p>
+          <a:p>
+            <a:pPr lvl="0">
+              <a:defRPr/>
+            </a:pPr>
+            <a:r>
+              <a:rPr lang="ko-KR" altLang="en-US"/>
+              <a:t>로그인 실패시 </a:t>
+            </a:r>
+            <a:r>
+              <a:rPr lang="en-US" altLang="ko-KR"/>
+              <a:t>: </a:t>
+            </a:r>
+            <a:r>
+              <a:rPr lang="ko-KR" altLang="en-US"/>
+              <a:t>실패 메시지 표시</a:t>
+            </a:r>
+            <a:endParaRPr lang="ko-KR" altLang="en-US"/>
+          </a:p>
+          <a:p>
+            <a:pPr lvl="0">
+              <a:defRPr/>
+            </a:pPr>
+            <a:endParaRPr lang="ko-KR" altLang="en-US"/>
+          </a:p>
+        </p:txBody>
+      </p:sp>
+      <p:sp>
+        <p:nvSpPr>
+          <p:cNvPr id="29" name="직사각형 28"/>
+          <p:cNvSpPr/>
+          <p:nvPr/>
+        </p:nvSpPr>
+        <p:spPr>
+          <a:xfrm>
+            <a:off x="1365051" y="2926080"/>
+            <a:ext cx="3950709" cy="497286"/>
+          </a:xfrm>
+          <a:prstGeom prst="rect">
+            <a:avLst/>
+          </a:prstGeom>
+          <a:solidFill>
+            <a:schemeClr val="lt1"/>
+          </a:solidFill>
+          <a:ln>
+            <a:solidFill>
+              <a:srgbClr val="000000"/>
+            </a:solidFill>
+          </a:ln>
+        </p:spPr>
+        <p:style>
+          <a:lnRef idx="2">
+            <a:schemeClr val="accent1">
+              <a:shade val="20000"/>
+            </a:schemeClr>
+          </a:lnRef>
+          <a:fillRef idx="1">
+            <a:schemeClr val="accent1"/>
+          </a:fillRef>
+          <a:effectRef idx="0">
+            <a:schemeClr val="accent1"/>
+          </a:effectRef>
+          <a:fontRef idx="minor">
+            <a:schemeClr val="lt1"/>
+          </a:fontRef>
+        </p:style>
+        <p:txBody>
+          <a:bodyPr anchor="ctr"/>
+          <a:p>
+            <a:pPr lvl="0" algn="ctr">
+              <a:defRPr/>
+            </a:pPr>
+            <a:endParaRPr lang="ko-KR" altLang="en-US"/>
+          </a:p>
+        </p:txBody>
+      </p:sp>
+      <p:sp>
+        <p:nvSpPr>
+          <p:cNvPr id="25" name="가로 글상자 24"/>
+          <p:cNvSpPr txBox="1"/>
+          <p:nvPr/>
+        </p:nvSpPr>
+        <p:spPr>
+          <a:xfrm>
+            <a:off x="372018" y="2977130"/>
+            <a:ext cx="5936774" cy="367138"/>
+          </a:xfrm>
+          <a:prstGeom prst="rect">
+            <a:avLst/>
+          </a:prstGeom>
+        </p:spPr>
+        <p:txBody>
+          <a:bodyPr wrap="square">
+            <a:spAutoFit/>
+          </a:bodyPr>
+          <a:p>
+            <a:pPr lvl="0" algn="ctr">
+              <a:defRPr/>
+            </a:pPr>
+            <a:r>
+              <a:rPr lang="ko-KR" altLang="en-US"/>
+              <a:t>아이디 입력</a:t>
+            </a:r>
+            <a:endParaRPr lang="ko-KR" altLang="en-US"/>
+          </a:p>
+        </p:txBody>
+      </p:sp>
+      <p:sp>
+        <p:nvSpPr>
+          <p:cNvPr id="31" name="직사각형 30"/>
+          <p:cNvSpPr/>
+          <p:nvPr/>
+        </p:nvSpPr>
+        <p:spPr>
+          <a:xfrm>
+            <a:off x="1365051" y="3595424"/>
+            <a:ext cx="3950709" cy="497286"/>
+          </a:xfrm>
+          <a:prstGeom prst="rect">
+            <a:avLst/>
+          </a:prstGeom>
+          <a:solidFill>
+            <a:schemeClr val="lt1"/>
+          </a:solidFill>
+          <a:ln>
+            <a:solidFill>
+              <a:srgbClr val="000000"/>
+            </a:solidFill>
+          </a:ln>
+        </p:spPr>
+        <p:style>
+          <a:lnRef idx="2">
+            <a:schemeClr val="accent1">
+              <a:shade val="20000"/>
+            </a:schemeClr>
+          </a:lnRef>
+          <a:fillRef idx="1">
+            <a:schemeClr val="accent1"/>
+          </a:fillRef>
+          <a:effectRef idx="0">
+            <a:schemeClr val="accent1"/>
+          </a:effectRef>
+          <a:fontRef idx="minor">
+            <a:schemeClr val="lt1"/>
+          </a:fontRef>
+        </p:style>
+        <p:txBody>
+          <a:bodyPr anchor="ctr"/>
+          <a:p>
+            <a:pPr lvl="0" algn="ctr">
+              <a:defRPr/>
+            </a:pPr>
+            <a:endParaRPr lang="ko-KR" altLang="en-US"/>
+          </a:p>
+        </p:txBody>
+      </p:sp>
+      <p:sp>
+        <p:nvSpPr>
+          <p:cNvPr id="26" name="가로 글상자 25"/>
+          <p:cNvSpPr txBox="1"/>
+          <p:nvPr/>
+        </p:nvSpPr>
+        <p:spPr>
+          <a:xfrm>
+            <a:off x="372018" y="3689073"/>
+            <a:ext cx="5936774" cy="367138"/>
+          </a:xfrm>
+          <a:prstGeom prst="rect">
+            <a:avLst/>
+          </a:prstGeom>
+        </p:spPr>
+        <p:txBody>
+          <a:bodyPr wrap="square">
+            <a:spAutoFit/>
+          </a:bodyPr>
+          <a:p>
+            <a:pPr lvl="0" algn="ctr">
+              <a:defRPr/>
+            </a:pPr>
+            <a:r>
+              <a:rPr lang="ko-KR" altLang="en-US"/>
+              <a:t>비밀번호 입력</a:t>
+            </a:r>
+            <a:endParaRPr lang="ko-KR" altLang="en-US"/>
+          </a:p>
+        </p:txBody>
+      </p:sp>
+      <p:sp>
+        <p:nvSpPr>
+          <p:cNvPr id="30" name="직사각형 29"/>
+          <p:cNvSpPr/>
+          <p:nvPr/>
+        </p:nvSpPr>
+        <p:spPr>
+          <a:xfrm>
+            <a:off x="1365051" y="4304165"/>
+            <a:ext cx="3950709" cy="497286"/>
+          </a:xfrm>
+          <a:prstGeom prst="rect">
+            <a:avLst/>
+          </a:prstGeom>
+          <a:solidFill>
+            <a:srgbClr val="6182d6"/>
+          </a:solidFill>
+          <a:ln>
+            <a:solidFill>
+              <a:srgbClr val="000000"/>
+            </a:solidFill>
+          </a:ln>
+        </p:spPr>
+        <p:style>
+          <a:lnRef idx="2">
+            <a:schemeClr val="accent1">
+              <a:shade val="20000"/>
+            </a:schemeClr>
+          </a:lnRef>
+          <a:fillRef idx="1">
+            <a:schemeClr val="accent1"/>
+          </a:fillRef>
+          <a:effectRef idx="0">
+            <a:schemeClr val="accent1"/>
+          </a:effectRef>
+          <a:fontRef idx="minor">
+            <a:schemeClr val="lt1"/>
+          </a:fontRef>
+        </p:style>
+        <p:txBody>
+          <a:bodyPr anchor="ctr"/>
+          <a:p>
+            <a:pPr lvl="0" algn="ctr">
+              <a:defRPr/>
+            </a:pPr>
+            <a:endParaRPr lang="ko-KR" altLang="en-US">
+              <a:ln w="9525">
+                <a:solidFill>
+                  <a:schemeClr val="lt1"/>
+                </a:solidFill>
+              </a:ln>
+              <a:solidFill>
+                <a:schemeClr val="lt1"/>
+              </a:solidFill>
+            </a:endParaRPr>
+          </a:p>
+        </p:txBody>
+      </p:sp>
+      <p:sp>
+        <p:nvSpPr>
+          <p:cNvPr id="27" name="가로 글상자 26"/>
+          <p:cNvSpPr txBox="1"/>
+          <p:nvPr/>
+        </p:nvSpPr>
+        <p:spPr>
+          <a:xfrm>
+            <a:off x="372018" y="4369239"/>
+            <a:ext cx="5936774" cy="367138"/>
+          </a:xfrm>
+          <a:prstGeom prst="rect">
+            <a:avLst/>
+          </a:prstGeom>
+        </p:spPr>
+        <p:txBody>
+          <a:bodyPr wrap="square">
+            <a:spAutoFit/>
+          </a:bodyPr>
+          <a:p>
+            <a:pPr lvl="0" algn="ctr">
+              <a:defRPr/>
+            </a:pPr>
+            <a:r>
+              <a:rPr lang="ko-KR" altLang="en-US">
+                <a:ln w="9525">
+                  <a:solidFill>
+                    <a:schemeClr val="lt1"/>
+                  </a:solidFill>
+                </a:ln>
+                <a:solidFill>
+                  <a:schemeClr val="lt1"/>
+                </a:solidFill>
+              </a:rPr>
+              <a:t>로그인</a:t>
+            </a:r>
+            <a:endParaRPr lang="ko-KR" altLang="en-US">
+              <a:ln w="9525">
+                <a:solidFill>
+                  <a:schemeClr val="lt1"/>
+                </a:solidFill>
+              </a:ln>
+              <a:solidFill>
+                <a:schemeClr val="lt1"/>
+              </a:solidFill>
+            </a:endParaRPr>
+          </a:p>
+        </p:txBody>
+      </p:sp>
+      <p:sp>
+        <p:nvSpPr>
+          <p:cNvPr id="28" name="가로 글상자 27"/>
+          <p:cNvSpPr txBox="1"/>
+          <p:nvPr/>
+        </p:nvSpPr>
+        <p:spPr>
+          <a:xfrm>
+            <a:off x="372018" y="4881158"/>
+            <a:ext cx="5936774" cy="367138"/>
+          </a:xfrm>
+          <a:prstGeom prst="rect">
+            <a:avLst/>
+          </a:prstGeom>
+        </p:spPr>
+        <p:txBody>
+          <a:bodyPr wrap="square">
+            <a:spAutoFit/>
+          </a:bodyPr>
+          <a:p>
+            <a:pPr lvl="0" algn="ctr">
+              <a:defRPr/>
+            </a:pPr>
+            <a:r>
+              <a:rPr lang="ko-KR" altLang="en-US"/>
+              <a:t>계정찾기                </a:t>
+            </a:r>
+            <a:r>
+              <a:rPr lang="en-US" altLang="ko-KR"/>
+              <a:t>|</a:t>
+            </a:r>
+            <a:r>
+              <a:rPr lang="ko-KR" altLang="en-US"/>
+              <a:t>                 회원가입</a:t>
+            </a:r>
+            <a:endParaRPr lang="ko-KR" altLang="en-US"/>
+          </a:p>
+        </p:txBody>
+      </p:sp>
+      <p:sp>
+        <p:nvSpPr>
+          <p:cNvPr id="32" name="가로 글상자 31"/>
+          <p:cNvSpPr txBox="1"/>
+          <p:nvPr/>
+        </p:nvSpPr>
+        <p:spPr>
+          <a:xfrm>
+            <a:off x="372018" y="5369892"/>
+            <a:ext cx="5936774" cy="362253"/>
+          </a:xfrm>
+          <a:prstGeom prst="rect">
+            <a:avLst/>
+          </a:prstGeom>
+        </p:spPr>
+        <p:txBody>
+          <a:bodyPr wrap="square">
+            <a:spAutoFit/>
+          </a:bodyPr>
+          <a:p>
+            <a:pPr lvl="0" algn="ctr">
+              <a:defRPr/>
+            </a:pPr>
+            <a:r>
+              <a:rPr lang="ko-KR" altLang="en-US"/>
+              <a:t>또는</a:t>
+            </a:r>
+            <a:endParaRPr lang="ko-KR" altLang="en-US"/>
+          </a:p>
+        </p:txBody>
+      </p:sp>
+      <p:cxnSp>
+        <p:nvCxnSpPr>
+          <p:cNvPr id="33" name="선 32"/>
+          <p:cNvCxnSpPr/>
+          <p:nvPr/>
+        </p:nvCxnSpPr>
+        <p:spPr>
+          <a:xfrm>
+            <a:off x="1365050" y="5549904"/>
+            <a:ext cx="1549210" cy="0"/>
+          </a:xfrm>
+          <a:prstGeom prst="line">
+            <a:avLst/>
+          </a:prstGeom>
+        </p:spPr>
+        <p:style>
+          <a:lnRef idx="1">
+            <a:schemeClr val="accent1"/>
+          </a:lnRef>
+          <a:fillRef idx="0">
+            <a:schemeClr val="accent1"/>
+          </a:fillRef>
+          <a:effectRef idx="0">
+            <a:schemeClr val="accent1"/>
+          </a:effectRef>
+          <a:fontRef idx="minor">
+            <a:schemeClr val="tx1"/>
+          </a:fontRef>
+        </p:style>
+      </p:cxnSp>
+      <p:cxnSp>
+        <p:nvCxnSpPr>
+          <p:cNvPr id="35" name="선 34"/>
+          <p:cNvCxnSpPr/>
+          <p:nvPr/>
+        </p:nvCxnSpPr>
+        <p:spPr>
+          <a:xfrm>
+            <a:off x="3659880" y="5549904"/>
+            <a:ext cx="1655879" cy="0"/>
+          </a:xfrm>
+          <a:prstGeom prst="line">
+            <a:avLst/>
+          </a:prstGeom>
+        </p:spPr>
+        <p:style>
+          <a:lnRef idx="1">
+            <a:schemeClr val="accent1"/>
+          </a:lnRef>
+          <a:fillRef idx="0">
+            <a:schemeClr val="accent1"/>
+          </a:fillRef>
+          <a:effectRef idx="0">
+            <a:schemeClr val="accent1"/>
+          </a:effectRef>
+          <a:fontRef idx="minor">
+            <a:schemeClr val="tx1"/>
+          </a:fontRef>
+        </p:style>
+      </p:cxnSp>
+      <p:sp>
+        <p:nvSpPr>
+          <p:cNvPr id="36" name="가로 글상자 35"/>
+          <p:cNvSpPr txBox="1"/>
+          <p:nvPr/>
+        </p:nvSpPr>
+        <p:spPr>
+          <a:xfrm>
+            <a:off x="372018" y="5840649"/>
+            <a:ext cx="5936774" cy="358221"/>
+          </a:xfrm>
+          <a:prstGeom prst="rect">
+            <a:avLst/>
+          </a:prstGeom>
+        </p:spPr>
+        <p:txBody>
+          <a:bodyPr wrap="square">
+            <a:spAutoFit/>
+          </a:bodyPr>
+          <a:p>
+            <a:pPr lvl="0" algn="ctr">
+              <a:defRPr/>
+            </a:pPr>
+            <a:r>
+              <a:rPr lang="ko-KR" altLang="en-US"/>
+              <a:t>구글로 로그인</a:t>
+            </a:r>
+            <a:endParaRPr lang="ko-KR" altLang="en-US"/>
+          </a:p>
+        </p:txBody>
+      </p:sp>
+      <p:sp>
+        <p:nvSpPr>
+          <p:cNvPr id="37" name="가로 글상자 36"/>
+          <p:cNvSpPr txBox="1"/>
+          <p:nvPr/>
+        </p:nvSpPr>
+        <p:spPr>
+          <a:xfrm>
+            <a:off x="372018" y="6242401"/>
+            <a:ext cx="5936774" cy="366044"/>
+          </a:xfrm>
+          <a:prstGeom prst="rect">
+            <a:avLst/>
+          </a:prstGeom>
+        </p:spPr>
+        <p:txBody>
+          <a:bodyPr wrap="square">
+            <a:spAutoFit/>
+          </a:bodyPr>
+          <a:p>
+            <a:pPr lvl="0" algn="ctr">
+              <a:defRPr/>
+            </a:pPr>
+            <a:r>
+              <a:rPr lang="ko-KR" altLang="en-US"/>
+              <a:t>카카오로 로그인</a:t>
+            </a:r>
+            <a:endParaRPr lang="ko-KR" altLang="en-US"/>
+          </a:p>
+        </p:txBody>
+      </p:sp>
+    </p:spTree>
+    <p:extLst>
+      <p:ext uri="{BB962C8B-B14F-4D97-AF65-F5344CB8AC3E}">
+        <p14:creationId xmlns:p14="http://schemas.microsoft.com/office/powerpoint/2010/main" val="82967889"/>
+      </p:ext>
+    </p:extLst>
+  </p:cSld>
+  <p:clrMapOvr>
+    <a:masterClrMapping/>
+  </p:clrMapOvr>
+</p:sld>
+</file>
+
+<file path=ppt/slides/slide3.xml><?xml version="1.0" encoding="utf-8"?>
+<p:sld xmlns:r="http://schemas.openxmlformats.org/officeDocument/2006/relationships" xmlns:c="http://schemas.openxmlformats.org/drawingml/2006/chart" xmlns:a="http://schemas.openxmlformats.org/drawingml/2006/main" xmlns:dgm="http://schemas.openxmlformats.org/drawingml/2006/diagram" xmlns:dsp="http://schemas.microsoft.com/office/drawing/2008/diagram" xmlns:p="http://schemas.openxmlformats.org/presentationml/2006/main">
+  <p:cSld>
+    <p:spTree>
+      <p:nvGrpSpPr>
+        <p:cNvPr id="1" name=""/>
+        <p:cNvGrpSpPr/>
+        <p:nvPr/>
+      </p:nvGrpSpPr>
+      <p:grpSpPr>
+        <a:xfrm>
+          <a:off x="0" y="0"/>
+          <a:ext cx="0" cy="0"/>
+          <a:chOff x="0" y="0"/>
+          <a:chExt cx="0" cy="0"/>
+        </a:xfrm>
+      </p:grpSpPr>
+      <p:sp>
+        <p:nvSpPr>
+          <p:cNvPr id="4" name="가로 글상자 3"/>
+          <p:cNvSpPr txBox="1"/>
+          <p:nvPr/>
+        </p:nvSpPr>
+        <p:spPr>
+          <a:xfrm>
+            <a:off x="372018" y="334386"/>
+            <a:ext cx="11138172" cy="498463"/>
+          </a:xfrm>
+          <a:prstGeom prst="rect">
+            <a:avLst/>
+          </a:prstGeom>
+        </p:spPr>
+        <p:txBody>
+          <a:bodyPr wrap="square">
+            <a:spAutoFit/>
+          </a:bodyPr>
+          <a:p>
+            <a:pPr lvl="0">
+              <a:defRPr/>
+            </a:pPr>
+            <a:r>
+              <a:rPr lang="ko-KR" altLang="en-US" sz="2700"/>
+              <a:t>회원가입 화면</a:t>
+            </a:r>
+            <a:endParaRPr lang="ko-KR" altLang="en-US" sz="2700"/>
+          </a:p>
+        </p:txBody>
+      </p:sp>
+      <p:sp>
+        <p:nvSpPr>
+          <p:cNvPr id="8" name="직사각형 7"/>
+          <p:cNvSpPr/>
+          <p:nvPr/>
+        </p:nvSpPr>
+        <p:spPr>
+          <a:xfrm>
+            <a:off x="372018" y="1584798"/>
+            <a:ext cx="5936774" cy="5015824"/>
+          </a:xfrm>
+          <a:prstGeom prst="rect">
+            <a:avLst/>
+          </a:prstGeom>
+          <a:solidFill>
+            <a:schemeClr val="lt1"/>
+          </a:solidFill>
+          <a:ln>
+            <a:solidFill>
+              <a:srgbClr val="000000"/>
+            </a:solidFill>
+          </a:ln>
+        </p:spPr>
+        <p:style>
+          <a:lnRef idx="2">
+            <a:schemeClr val="accent1">
+              <a:shade val="20000"/>
+            </a:schemeClr>
+          </a:lnRef>
+          <a:fillRef idx="1">
+            <a:schemeClr val="accent1"/>
+          </a:fillRef>
+          <a:effectRef idx="0">
+            <a:schemeClr val="accent1"/>
+          </a:effectRef>
+          <a:fontRef idx="minor">
+            <a:schemeClr val="lt1"/>
+          </a:fontRef>
+        </p:style>
+        <p:txBody>
+          <a:bodyPr anchor="ctr"/>
+          <a:p>
+            <a:pPr lvl="0" algn="ctr">
+              <a:defRPr/>
+            </a:pPr>
+            <a:endParaRPr lang="ko-KR" altLang="en-US"/>
+          </a:p>
+        </p:txBody>
+      </p:sp>
+      <p:sp>
+        <p:nvSpPr>
+          <p:cNvPr id="17" name="가로 글상자 16"/>
+          <p:cNvSpPr txBox="1"/>
+          <p:nvPr/>
+        </p:nvSpPr>
+        <p:spPr>
+          <a:xfrm>
+            <a:off x="6957304" y="1584798"/>
+            <a:ext cx="4681436" cy="3109122"/>
+          </a:xfrm>
+          <a:prstGeom prst="rect">
+            <a:avLst/>
+          </a:prstGeom>
+        </p:spPr>
+        <p:txBody>
+          <a:bodyPr wrap="square">
+            <a:spAutoFit/>
+          </a:bodyPr>
+          <a:p>
+            <a:pPr lvl="0">
+              <a:defRPr/>
+            </a:pPr>
+            <a:r>
+              <a:rPr lang="ko-KR" altLang="en-US"/>
+              <a:t>화면</a:t>
+            </a:r>
+            <a:r>
+              <a:rPr lang="en-US" altLang="ko-KR"/>
+              <a:t>ID :</a:t>
+            </a:r>
+            <a:r>
+              <a:rPr lang="ko-KR" altLang="en-US"/>
+              <a:t> </a:t>
+            </a:r>
+            <a:r>
+              <a:rPr lang="en-US" altLang="ko-KR"/>
+              <a:t>SCR-002</a:t>
+            </a:r>
+            <a:endParaRPr lang="en-US" altLang="ko-KR"/>
+          </a:p>
+          <a:p>
+            <a:pPr lvl="0">
+              <a:defRPr/>
+            </a:pPr>
+            <a:endParaRPr lang="ko-KR" altLang="en-US"/>
+          </a:p>
+          <a:p>
+            <a:pPr lvl="0">
+              <a:defRPr/>
+            </a:pPr>
+            <a:endParaRPr lang="ko-KR" altLang="en-US"/>
+          </a:p>
+          <a:p>
+            <a:pPr lvl="0">
+              <a:defRPr/>
+            </a:pPr>
+            <a:r>
+              <a:rPr lang="ko-KR" altLang="en-US"/>
+              <a:t>기능</a:t>
+            </a:r>
+            <a:endParaRPr lang="ko-KR" altLang="en-US"/>
+          </a:p>
+          <a:p>
+            <a:pPr lvl="0">
+              <a:defRPr/>
+            </a:pPr>
+            <a:r>
+              <a:rPr lang="en-US" altLang="ko-KR"/>
+              <a:t>- </a:t>
+            </a:r>
+            <a:r>
+              <a:rPr lang="ko-KR" altLang="en-US"/>
+              <a:t>전화번호 인증</a:t>
+            </a:r>
+            <a:endParaRPr lang="ko-KR" altLang="en-US"/>
+          </a:p>
+          <a:p>
+            <a:pPr lvl="0">
+              <a:defRPr/>
+            </a:pPr>
+            <a:r>
+              <a:rPr lang="en-US" altLang="ko-KR"/>
+              <a:t>-</a:t>
+            </a:r>
+            <a:r>
+              <a:rPr lang="ko-KR" altLang="en-US"/>
+              <a:t> 회원가입 버튼</a:t>
+            </a:r>
+            <a:endParaRPr lang="ko-KR" altLang="en-US"/>
+          </a:p>
+          <a:p>
+            <a:pPr lvl="0">
+              <a:defRPr/>
+            </a:pPr>
+            <a:r>
+              <a:rPr lang="en-US" altLang="ko-KR"/>
+              <a:t>-</a:t>
+            </a:r>
+            <a:r>
+              <a:rPr lang="ko-KR" altLang="en-US"/>
+              <a:t> 유효성 체크</a:t>
+            </a:r>
+            <a:endParaRPr lang="ko-KR" altLang="en-US"/>
+          </a:p>
+          <a:p>
+            <a:pPr lvl="0">
+              <a:defRPr/>
+            </a:pPr>
+            <a:endParaRPr lang="ko-KR" altLang="en-US"/>
+          </a:p>
+          <a:p>
+            <a:pPr lvl="0">
+              <a:defRPr/>
+            </a:pPr>
+            <a:endParaRPr lang="ko-KR" altLang="en-US"/>
+          </a:p>
+          <a:p>
+            <a:pPr lvl="0">
+              <a:defRPr/>
+            </a:pPr>
+            <a:r>
+              <a:rPr lang="ko-KR" altLang="en-US"/>
+              <a:t>회원가입 성공 </a:t>
+            </a:r>
+            <a:r>
+              <a:rPr lang="en-US" altLang="ko-KR"/>
+              <a:t>:</a:t>
+            </a:r>
+            <a:r>
+              <a:rPr lang="ko-KR" altLang="en-US"/>
+              <a:t> 로그인 화면 이동</a:t>
+            </a:r>
+            <a:endParaRPr lang="ko-KR" altLang="en-US"/>
+          </a:p>
+          <a:p>
+            <a:pPr lvl="0">
+              <a:defRPr/>
+            </a:pPr>
+            <a:r>
+              <a:rPr lang="ko-KR" altLang="en-US"/>
+              <a:t>회원가입 실패 </a:t>
+            </a:r>
+            <a:r>
+              <a:rPr lang="en-US" altLang="ko-KR"/>
+              <a:t>:</a:t>
+            </a:r>
+            <a:r>
+              <a:rPr lang="ko-KR" altLang="en-US"/>
+              <a:t> 실패 메시지 표시</a:t>
+            </a:r>
+            <a:endParaRPr lang="ko-KR" altLang="en-US"/>
+          </a:p>
+        </p:txBody>
+      </p:sp>
+      <p:sp>
+        <p:nvSpPr>
+          <p:cNvPr id="19" name="가로 글상자 18"/>
+          <p:cNvSpPr txBox="1"/>
+          <p:nvPr/>
+        </p:nvSpPr>
+        <p:spPr>
+          <a:xfrm>
+            <a:off x="969864" y="2354904"/>
+            <a:ext cx="4741082" cy="3110541"/>
+          </a:xfrm>
+          <a:prstGeom prst="rect">
+            <a:avLst/>
+          </a:prstGeom>
+        </p:spPr>
+        <p:txBody>
+          <a:bodyPr wrap="square">
+            <a:spAutoFit/>
+          </a:bodyPr>
+          <a:p>
+            <a:pPr lvl="0">
+              <a:defRPr/>
+            </a:pPr>
+            <a:r>
+              <a:rPr lang="ko-KR" altLang="en-US" u="sng"/>
+              <a:t>이름 입력</a:t>
+            </a:r>
+            <a:endParaRPr lang="ko-KR" altLang="en-US" u="sng"/>
+          </a:p>
+          <a:p>
+            <a:pPr lvl="0">
+              <a:defRPr/>
+            </a:pPr>
+            <a:endParaRPr lang="ko-KR" altLang="en-US" u="sng"/>
+          </a:p>
+          <a:p>
+            <a:pPr lvl="0">
+              <a:defRPr/>
+            </a:pPr>
+            <a:r>
+              <a:rPr lang="ko-KR" altLang="en-US" u="sng"/>
+              <a:t>비밀번호 입력</a:t>
+            </a:r>
+            <a:endParaRPr lang="ko-KR" altLang="en-US" u="sng"/>
+          </a:p>
+          <a:p>
+            <a:pPr lvl="0">
+              <a:defRPr/>
+            </a:pPr>
+            <a:endParaRPr lang="ko-KR" altLang="en-US" u="sng"/>
+          </a:p>
+          <a:p>
+            <a:pPr lvl="0">
+              <a:defRPr/>
+            </a:pPr>
+            <a:r>
+              <a:rPr lang="ko-KR" altLang="en-US" u="sng"/>
+              <a:t>비밀번호 확인</a:t>
+            </a:r>
+            <a:endParaRPr lang="ko-KR" altLang="en-US" u="sng"/>
+          </a:p>
+          <a:p>
+            <a:pPr lvl="0">
+              <a:defRPr/>
+            </a:pPr>
+            <a:endParaRPr lang="ko-KR" altLang="en-US" u="sng"/>
+          </a:p>
+          <a:p>
+            <a:pPr lvl="0">
+              <a:defRPr/>
+            </a:pPr>
+            <a:r>
+              <a:rPr lang="ko-KR" altLang="en-US" u="sng"/>
+              <a:t>전화번호 입력</a:t>
+            </a:r>
+            <a:endParaRPr lang="ko-KR" altLang="en-US" u="sng"/>
+          </a:p>
+          <a:p>
+            <a:pPr lvl="0">
+              <a:defRPr/>
+            </a:pPr>
+            <a:endParaRPr lang="ko-KR" altLang="en-US" u="sng"/>
+          </a:p>
+          <a:p>
+            <a:pPr lvl="0">
+              <a:defRPr/>
+            </a:pPr>
+            <a:r>
+              <a:rPr lang="ko-KR" altLang="en-US" u="sng"/>
+              <a:t>학년 선택</a:t>
+            </a:r>
+            <a:endParaRPr lang="ko-KR" altLang="en-US" u="sng"/>
+          </a:p>
+          <a:p>
+            <a:pPr lvl="0">
+              <a:defRPr/>
+            </a:pPr>
+            <a:endParaRPr lang="ko-KR" altLang="en-US" u="sng"/>
+          </a:p>
+          <a:p>
+            <a:pPr lvl="0">
+              <a:defRPr/>
+            </a:pPr>
+            <a:r>
+              <a:rPr lang="ko-KR" altLang="en-US" u="sng"/>
+              <a:t>이메일 입력 </a:t>
+            </a:r>
+            <a:r>
+              <a:rPr lang="en-US" altLang="ko-KR" u="sng"/>
+              <a:t>(</a:t>
+            </a:r>
+            <a:r>
+              <a:rPr lang="ko-KR" altLang="en-US" u="sng"/>
+              <a:t>선택</a:t>
+            </a:r>
+            <a:r>
+              <a:rPr lang="en-US" altLang="ko-KR" u="sng"/>
+              <a:t>)</a:t>
+            </a:r>
+            <a:endParaRPr lang="ko-KR" altLang="en-US" u="sng"/>
+          </a:p>
+        </p:txBody>
+      </p:sp>
+      <p:sp>
+        <p:nvSpPr>
+          <p:cNvPr id="20" name="가로 글상자 19"/>
+          <p:cNvSpPr txBox="1"/>
+          <p:nvPr/>
+        </p:nvSpPr>
+        <p:spPr>
+          <a:xfrm>
+            <a:off x="969864" y="5617723"/>
+            <a:ext cx="4741083" cy="359640"/>
+          </a:xfrm>
+          <a:prstGeom prst="rect">
+            <a:avLst/>
+          </a:prstGeom>
+          <a:solidFill>
+            <a:srgbClr val="6182d6"/>
+          </a:solidFill>
+        </p:spPr>
+        <p:txBody>
+          <a:bodyPr wrap="square">
+            <a:spAutoFit/>
+          </a:bodyPr>
+          <a:p>
+            <a:pPr lvl="0" algn="ctr">
+              <a:defRPr/>
+            </a:pPr>
+            <a:r>
+              <a:rPr lang="ko-KR" altLang="en-US">
+                <a:ln w="9525">
+                  <a:solidFill>
+                    <a:schemeClr val="lt1"/>
+                  </a:solidFill>
+                </a:ln>
+                <a:solidFill>
+                  <a:schemeClr val="lt1"/>
+                </a:solidFill>
+              </a:rPr>
+              <a:t>회원가입</a:t>
+            </a:r>
+            <a:endParaRPr lang="ko-KR" altLang="en-US">
+              <a:ln w="9525">
+                <a:solidFill>
+                  <a:schemeClr val="lt1"/>
+                </a:solidFill>
+              </a:ln>
+              <a:solidFill>
+                <a:schemeClr val="lt1"/>
+              </a:solidFill>
+            </a:endParaRPr>
+          </a:p>
+        </p:txBody>
+      </p:sp>
+    </p:spTree>
+    <p:extLst>
+      <p:ext uri="{BB962C8B-B14F-4D97-AF65-F5344CB8AC3E}">
+        <p14:creationId xmlns:p14="http://schemas.microsoft.com/office/powerpoint/2010/main" val="1316232164"/>
+      </p:ext>
+    </p:extLst>
+  </p:cSld>
+  <p:clrMapOvr>
+    <a:masterClrMapping/>
+  </p:clrMapOvr>
+</p:sld>
+</file>
+
+<file path=ppt/slides/slide4.xml><?xml version="1.0" encoding="utf-8"?>
+<p:sld xmlns:r="http://schemas.openxmlformats.org/officeDocument/2006/relationships" xmlns:c="http://schemas.openxmlformats.org/drawingml/2006/chart" xmlns:a="http://schemas.openxmlformats.org/drawingml/2006/main" xmlns:dgm="http://schemas.openxmlformats.org/drawingml/2006/diagram" xmlns:dsp="http://schemas.microsoft.com/office/drawing/2008/diagram" xmlns:p="http://schemas.openxmlformats.org/presentationml/2006/main">
+  <p:cSld>
+    <p:spTree>
+      <p:nvGrpSpPr>
+        <p:cNvPr id="1" name=""/>
+        <p:cNvGrpSpPr/>
+        <p:nvPr/>
+      </p:nvGrpSpPr>
+      <p:grpSpPr>
+        <a:xfrm>
+          <a:off x="0" y="0"/>
+          <a:ext cx="0" cy="0"/>
+          <a:chOff x="0" y="0"/>
+          <a:chExt cx="0" cy="0"/>
+        </a:xfrm>
+      </p:grpSpPr>
+      <p:sp>
+        <p:nvSpPr>
+          <p:cNvPr id="4" name="가로 글상자 3"/>
+          <p:cNvSpPr txBox="1"/>
+          <p:nvPr/>
+        </p:nvSpPr>
+        <p:spPr>
+          <a:xfrm>
+            <a:off x="372018" y="334386"/>
+            <a:ext cx="11138172" cy="498463"/>
+          </a:xfrm>
+          <a:prstGeom prst="rect">
+            <a:avLst/>
+          </a:prstGeom>
+        </p:spPr>
+        <p:txBody>
+          <a:bodyPr wrap="square">
+            <a:spAutoFit/>
+          </a:bodyPr>
+          <a:p>
+            <a:pPr lvl="0">
+              <a:defRPr/>
+            </a:pPr>
+            <a:r>
+              <a:rPr lang="ko-KR" altLang="en-US" sz="2700"/>
+              <a:t>계정찾기 화면</a:t>
+            </a:r>
+            <a:endParaRPr lang="ko-KR" altLang="en-US" sz="2700"/>
+          </a:p>
+        </p:txBody>
+      </p:sp>
+      <p:sp>
+        <p:nvSpPr>
+          <p:cNvPr id="8" name="직사각형 7"/>
+          <p:cNvSpPr/>
+          <p:nvPr/>
+        </p:nvSpPr>
+        <p:spPr>
+          <a:xfrm>
+            <a:off x="372018" y="1584798"/>
+            <a:ext cx="5936774" cy="5015824"/>
+          </a:xfrm>
+          <a:prstGeom prst="rect">
+            <a:avLst/>
+          </a:prstGeom>
+          <a:solidFill>
+            <a:schemeClr val="lt1"/>
+          </a:solidFill>
+          <a:ln>
+            <a:solidFill>
+              <a:srgbClr val="000000"/>
+            </a:solidFill>
+          </a:ln>
+        </p:spPr>
+        <p:style>
+          <a:lnRef idx="2">
+            <a:schemeClr val="accent1">
+              <a:shade val="20000"/>
+            </a:schemeClr>
+          </a:lnRef>
+          <a:fillRef idx="1">
+            <a:schemeClr val="accent1"/>
+          </a:fillRef>
+          <a:effectRef idx="0">
+            <a:schemeClr val="accent1"/>
+          </a:effectRef>
+          <a:fontRef idx="minor">
+            <a:schemeClr val="lt1"/>
+          </a:fontRef>
+        </p:style>
+        <p:txBody>
+          <a:bodyPr anchor="ctr"/>
+          <a:p>
+            <a:pPr lvl="0" algn="ctr">
+              <a:defRPr/>
+            </a:pPr>
+            <a:endParaRPr lang="ko-KR" altLang="en-US"/>
+          </a:p>
+        </p:txBody>
+      </p:sp>
+      <p:sp>
+        <p:nvSpPr>
+          <p:cNvPr id="17" name="가로 글상자 16"/>
+          <p:cNvSpPr txBox="1"/>
+          <p:nvPr/>
+        </p:nvSpPr>
+        <p:spPr>
+          <a:xfrm>
+            <a:off x="6734378" y="1584798"/>
+            <a:ext cx="5228616" cy="4204497"/>
+          </a:xfrm>
+          <a:prstGeom prst="rect">
+            <a:avLst/>
+          </a:prstGeom>
+        </p:spPr>
+        <p:txBody>
+          <a:bodyPr wrap="square">
+            <a:spAutoFit/>
+          </a:bodyPr>
+          <a:p>
+            <a:pPr lvl="0">
+              <a:defRPr/>
+            </a:pPr>
+            <a:r>
+              <a:rPr lang="ko-KR" altLang="en-US"/>
+              <a:t>화면</a:t>
+            </a:r>
+            <a:r>
+              <a:rPr lang="en-US" altLang="ko-KR"/>
+              <a:t>ID :</a:t>
+            </a:r>
+            <a:r>
+              <a:rPr lang="ko-KR" altLang="en-US"/>
+              <a:t> </a:t>
+            </a:r>
+            <a:r>
+              <a:rPr lang="en-US" altLang="ko-KR"/>
+              <a:t>SCR-003</a:t>
+            </a:r>
+            <a:endParaRPr lang="en-US" altLang="ko-KR"/>
+          </a:p>
+          <a:p>
+            <a:pPr lvl="0">
+              <a:defRPr/>
+            </a:pPr>
+            <a:endParaRPr lang="ko-KR" altLang="en-US"/>
+          </a:p>
+          <a:p>
+            <a:pPr lvl="0">
+              <a:defRPr/>
+            </a:pPr>
+            <a:endParaRPr lang="ko-KR" altLang="en-US"/>
+          </a:p>
+          <a:p>
+            <a:pPr lvl="0">
+              <a:defRPr/>
+            </a:pPr>
+            <a:r>
+              <a:rPr lang="ko-KR" altLang="en-US"/>
+              <a:t>기능</a:t>
+            </a:r>
+            <a:endParaRPr lang="ko-KR" altLang="en-US"/>
+          </a:p>
+          <a:p>
+            <a:pPr lvl="0">
+              <a:defRPr/>
+            </a:pPr>
+            <a:r>
+              <a:rPr lang="en-US" altLang="ko-KR"/>
+              <a:t>- </a:t>
+            </a:r>
+            <a:r>
+              <a:rPr lang="ko-KR" altLang="en-US"/>
+              <a:t>아이디 찾기 </a:t>
+            </a:r>
+            <a:r>
+              <a:rPr lang="en-US" altLang="ko-KR"/>
+              <a:t>: </a:t>
+            </a:r>
+            <a:r>
+              <a:rPr lang="ko-KR" altLang="en-US"/>
+              <a:t>전화번호로 찾기 버튼</a:t>
+            </a:r>
+            <a:endParaRPr lang="ko-KR" altLang="en-US"/>
+          </a:p>
+          <a:p>
+            <a:pPr lvl="0">
+              <a:defRPr/>
+            </a:pPr>
+            <a:r>
+              <a:rPr lang="en-US" altLang="ko-KR"/>
+              <a:t>-</a:t>
+            </a:r>
+            <a:r>
+              <a:rPr lang="ko-KR" altLang="en-US"/>
+              <a:t> 아이디 찾기 </a:t>
+            </a:r>
+            <a:r>
+              <a:rPr lang="en-US" altLang="ko-KR"/>
+              <a:t>: </a:t>
+            </a:r>
+            <a:r>
+              <a:rPr lang="ko-KR" altLang="en-US"/>
+              <a:t>인증번호 확인 버튼</a:t>
+            </a:r>
+            <a:endParaRPr lang="en-US" altLang="ko-KR"/>
+          </a:p>
+          <a:p>
+            <a:pPr lvl="0">
+              <a:defRPr/>
+            </a:pPr>
+            <a:r>
+              <a:rPr lang="en-US" altLang="ko-KR"/>
+              <a:t>-</a:t>
+            </a:r>
+            <a:r>
+              <a:rPr lang="ko-KR" altLang="en-US"/>
+              <a:t> 비밀번호 찾기 </a:t>
+            </a:r>
+            <a:r>
+              <a:rPr lang="en-US" altLang="ko-KR"/>
+              <a:t>: </a:t>
+            </a:r>
+            <a:r>
+              <a:rPr lang="ko-KR" altLang="en-US"/>
+              <a:t>아이디</a:t>
+            </a:r>
+            <a:r>
+              <a:rPr lang="en-US" altLang="ko-KR"/>
+              <a:t>,</a:t>
+            </a:r>
+            <a:r>
+              <a:rPr lang="ko-KR" altLang="en-US"/>
+              <a:t> 전화번호로 아이디 찾기</a:t>
+            </a:r>
+            <a:endParaRPr lang="ko-KR" altLang="en-US"/>
+          </a:p>
+          <a:p>
+            <a:pPr lvl="0">
+              <a:defRPr/>
+            </a:pPr>
+            <a:r>
+              <a:rPr lang="en-US" altLang="ko-KR"/>
+              <a:t>-</a:t>
+            </a:r>
+            <a:r>
+              <a:rPr lang="ko-KR" altLang="en-US"/>
+              <a:t> 비밀번호 찾기 </a:t>
+            </a:r>
+            <a:r>
+              <a:rPr lang="en-US" altLang="ko-KR"/>
+              <a:t>: </a:t>
+            </a:r>
+            <a:r>
+              <a:rPr lang="ko-KR" altLang="en-US"/>
+              <a:t>인증번호 확인 버튼</a:t>
+            </a:r>
+            <a:endParaRPr lang="ko-KR" altLang="en-US"/>
+          </a:p>
+          <a:p>
+            <a:pPr lvl="0">
+              <a:defRPr/>
+            </a:pPr>
+            <a:r>
+              <a:rPr lang="en-US" altLang="ko-KR"/>
+              <a:t>-</a:t>
+            </a:r>
+            <a:r>
+              <a:rPr lang="ko-KR" altLang="en-US"/>
+              <a:t> 로그인 화면 이동</a:t>
+            </a:r>
+            <a:endParaRPr lang="ko-KR" altLang="en-US"/>
+          </a:p>
+          <a:p>
+            <a:pPr lvl="0">
+              <a:defRPr/>
+            </a:pPr>
+            <a:endParaRPr lang="ko-KR" altLang="en-US"/>
+          </a:p>
+          <a:p>
+            <a:pPr lvl="0">
+              <a:defRPr/>
+            </a:pPr>
+            <a:endParaRPr lang="ko-KR" altLang="en-US"/>
+          </a:p>
+          <a:p>
+            <a:pPr lvl="0">
+              <a:defRPr/>
+            </a:pPr>
+            <a:r>
+              <a:rPr lang="ko-KR" altLang="en-US"/>
+              <a:t>아이디 찾기 성공 </a:t>
+            </a:r>
+            <a:r>
+              <a:rPr lang="en-US" altLang="ko-KR"/>
+              <a:t>: </a:t>
+            </a:r>
+            <a:r>
+              <a:rPr lang="ko-KR" altLang="en-US"/>
+              <a:t>아이디 표시</a:t>
+            </a:r>
+            <a:endParaRPr lang="ko-KR" altLang="en-US"/>
+          </a:p>
+          <a:p>
+            <a:pPr lvl="0">
+              <a:defRPr/>
+            </a:pPr>
+            <a:r>
+              <a:rPr lang="ko-KR" altLang="en-US"/>
+              <a:t>아이디 찾기 실패 </a:t>
+            </a:r>
+            <a:r>
+              <a:rPr lang="en-US" altLang="ko-KR"/>
+              <a:t>: </a:t>
+            </a:r>
+            <a:r>
+              <a:rPr lang="ko-KR" altLang="en-US"/>
+              <a:t>실패 메시지 표시</a:t>
+            </a:r>
+            <a:endParaRPr lang="ko-KR" altLang="en-US"/>
+          </a:p>
+          <a:p>
+            <a:pPr lvl="0">
+              <a:defRPr/>
+            </a:pPr>
+            <a:r>
+              <a:rPr lang="ko-KR" altLang="en-US"/>
+              <a:t>비밀번호 찾기 성공 </a:t>
+            </a:r>
+            <a:r>
+              <a:rPr lang="en-US" altLang="ko-KR"/>
+              <a:t>: </a:t>
+            </a:r>
+            <a:r>
+              <a:rPr lang="ko-KR" altLang="en-US"/>
+              <a:t>비밀번호 표시</a:t>
+            </a:r>
+            <a:endParaRPr lang="ko-KR" altLang="en-US"/>
+          </a:p>
+          <a:p>
+            <a:pPr lvl="0">
+              <a:defRPr/>
+            </a:pPr>
+            <a:r>
+              <a:rPr lang="ko-KR" altLang="en-US"/>
+              <a:t>비밀번호 찾기 실패 </a:t>
+            </a:r>
+            <a:r>
+              <a:rPr lang="en-US" altLang="ko-KR"/>
+              <a:t>: </a:t>
+            </a:r>
+            <a:r>
+              <a:rPr lang="ko-KR" altLang="en-US"/>
+              <a:t>실패 메시지 표시</a:t>
+            </a:r>
+            <a:endParaRPr lang="ko-KR" altLang="en-US"/>
+          </a:p>
+        </p:txBody>
+      </p:sp>
+      <p:sp>
+        <p:nvSpPr>
+          <p:cNvPr id="21" name="가로 글상자 20"/>
+          <p:cNvSpPr txBox="1"/>
+          <p:nvPr/>
+        </p:nvSpPr>
+        <p:spPr>
+          <a:xfrm>
+            <a:off x="372018" y="2091446"/>
+            <a:ext cx="5936774" cy="364099"/>
+          </a:xfrm>
+          <a:prstGeom prst="rect">
+            <a:avLst/>
+          </a:prstGeom>
+        </p:spPr>
+        <p:txBody>
+          <a:bodyPr wrap="square">
+            <a:spAutoFit/>
+          </a:bodyPr>
+          <a:p>
+            <a:pPr lvl="0" algn="ctr">
+              <a:defRPr/>
+            </a:pPr>
+            <a:r>
+              <a:rPr lang="ko-KR" altLang="en-US"/>
+              <a:t>아이디 찾기</a:t>
+            </a:r>
+            <a:endParaRPr lang="ko-KR" altLang="en-US"/>
+          </a:p>
+        </p:txBody>
+      </p:sp>
+      <p:sp>
+        <p:nvSpPr>
+          <p:cNvPr id="22" name="가로 글상자 21"/>
+          <p:cNvSpPr txBox="1"/>
+          <p:nvPr/>
+        </p:nvSpPr>
+        <p:spPr>
+          <a:xfrm>
+            <a:off x="372018" y="2602472"/>
+            <a:ext cx="5936774" cy="361018"/>
+          </a:xfrm>
+          <a:prstGeom prst="rect">
+            <a:avLst/>
+          </a:prstGeom>
+        </p:spPr>
+        <p:txBody>
+          <a:bodyPr wrap="square">
+            <a:spAutoFit/>
+          </a:bodyPr>
+          <a:p>
+            <a:pPr lvl="0" algn="ctr">
+              <a:defRPr/>
+            </a:pPr>
+            <a:r>
+              <a:rPr lang="ko-KR" altLang="en-US"/>
+              <a:t>전화번호 입력</a:t>
+            </a:r>
+            <a:endParaRPr lang="ko-KR" altLang="en-US"/>
+          </a:p>
+        </p:txBody>
+      </p:sp>
+      <p:sp>
+        <p:nvSpPr>
+          <p:cNvPr id="23" name="가로 글상자 22"/>
+          <p:cNvSpPr txBox="1"/>
+          <p:nvPr/>
+        </p:nvSpPr>
+        <p:spPr>
+          <a:xfrm>
+            <a:off x="372018" y="2958850"/>
+            <a:ext cx="5936774" cy="363470"/>
+          </a:xfrm>
+          <a:prstGeom prst="rect">
+            <a:avLst/>
+          </a:prstGeom>
+        </p:spPr>
+        <p:txBody>
+          <a:bodyPr wrap="square">
+            <a:spAutoFit/>
+          </a:bodyPr>
+          <a:p>
+            <a:pPr lvl="0" algn="ctr">
+              <a:defRPr/>
+            </a:pPr>
+            <a:endParaRPr lang="ko-KR" altLang="en-US"/>
+          </a:p>
+        </p:txBody>
+      </p:sp>
+      <p:sp>
+        <p:nvSpPr>
+          <p:cNvPr id="24" name="가로 글상자 23"/>
+          <p:cNvSpPr txBox="1"/>
+          <p:nvPr/>
+        </p:nvSpPr>
+        <p:spPr>
+          <a:xfrm>
+            <a:off x="4303614" y="2600020"/>
+            <a:ext cx="779087" cy="360350"/>
+          </a:xfrm>
+          <a:prstGeom prst="rect">
+            <a:avLst/>
+          </a:prstGeom>
+          <a:ln>
+            <a:solidFill>
+              <a:srgbClr val="000000"/>
+            </a:solidFill>
+          </a:ln>
+        </p:spPr>
+        <p:txBody>
+          <a:bodyPr wrap="square">
+            <a:spAutoFit/>
+          </a:bodyPr>
+          <a:p>
+            <a:pPr lvl="0" algn="ctr">
+              <a:defRPr/>
+            </a:pPr>
+            <a:r>
+              <a:rPr lang="ko-KR" altLang="en-US"/>
+              <a:t>찾기</a:t>
+            </a:r>
+            <a:endParaRPr lang="ko-KR" altLang="en-US"/>
+          </a:p>
+        </p:txBody>
+      </p:sp>
+      <p:cxnSp>
+        <p:nvCxnSpPr>
+          <p:cNvPr id="25" name="선 24"/>
+          <p:cNvCxnSpPr/>
+          <p:nvPr/>
+        </p:nvCxnSpPr>
+        <p:spPr>
+          <a:xfrm>
+            <a:off x="1120707" y="2450478"/>
+            <a:ext cx="4610528" cy="0"/>
+          </a:xfrm>
+          <a:prstGeom prst="line">
+            <a:avLst/>
+          </a:prstGeom>
+        </p:spPr>
+        <p:style>
+          <a:lnRef idx="1">
+            <a:schemeClr val="accent1"/>
+          </a:lnRef>
+          <a:fillRef idx="0">
+            <a:schemeClr val="accent1"/>
+          </a:fillRef>
+          <a:effectRef idx="0">
+            <a:schemeClr val="accent1"/>
+          </a:effectRef>
+          <a:fontRef idx="minor">
+            <a:schemeClr val="tx1"/>
+          </a:fontRef>
+        </p:style>
+      </p:cxnSp>
+      <p:sp>
+        <p:nvSpPr>
+          <p:cNvPr id="26" name="가로 글상자 25"/>
+          <p:cNvSpPr txBox="1"/>
+          <p:nvPr/>
+        </p:nvSpPr>
+        <p:spPr>
+          <a:xfrm>
+            <a:off x="372018" y="2963490"/>
+            <a:ext cx="5936774" cy="358830"/>
+          </a:xfrm>
+          <a:prstGeom prst="rect">
+            <a:avLst/>
+          </a:prstGeom>
+        </p:spPr>
+        <p:txBody>
+          <a:bodyPr wrap="square">
+            <a:spAutoFit/>
+          </a:bodyPr>
+          <a:p>
+            <a:pPr lvl="0" algn="ctr">
+              <a:defRPr/>
+            </a:pPr>
+            <a:r>
+              <a:rPr lang="ko-KR" altLang="en-US"/>
+              <a:t>인증번호 입력</a:t>
+            </a:r>
+            <a:endParaRPr lang="ko-KR" altLang="en-US"/>
+          </a:p>
+        </p:txBody>
+      </p:sp>
+      <p:sp>
+        <p:nvSpPr>
+          <p:cNvPr id="27" name="가로 글상자 26"/>
+          <p:cNvSpPr txBox="1"/>
+          <p:nvPr/>
+        </p:nvSpPr>
+        <p:spPr>
+          <a:xfrm>
+            <a:off x="4303614" y="2963490"/>
+            <a:ext cx="779087" cy="360350"/>
+          </a:xfrm>
+          <a:prstGeom prst="rect">
+            <a:avLst/>
+          </a:prstGeom>
+          <a:ln>
+            <a:solidFill>
+              <a:srgbClr val="000000"/>
+            </a:solidFill>
+          </a:ln>
+        </p:spPr>
+        <p:txBody>
+          <a:bodyPr wrap="square">
+            <a:spAutoFit/>
+          </a:bodyPr>
+          <a:p>
+            <a:pPr lvl="0" algn="ctr">
+              <a:defRPr/>
+            </a:pPr>
+            <a:r>
+              <a:rPr lang="ko-KR" altLang="en-US"/>
+              <a:t>확인</a:t>
+            </a:r>
+            <a:endParaRPr lang="ko-KR" altLang="en-US"/>
+          </a:p>
+        </p:txBody>
+      </p:sp>
+      <p:sp>
+        <p:nvSpPr>
+          <p:cNvPr id="28" name="가로 글상자 27"/>
+          <p:cNvSpPr txBox="1"/>
+          <p:nvPr/>
+        </p:nvSpPr>
+        <p:spPr>
+          <a:xfrm>
+            <a:off x="372018" y="3913194"/>
+            <a:ext cx="5936774" cy="361626"/>
+          </a:xfrm>
+          <a:prstGeom prst="rect">
+            <a:avLst/>
+          </a:prstGeom>
+        </p:spPr>
+        <p:txBody>
+          <a:bodyPr wrap="square">
+            <a:spAutoFit/>
+          </a:bodyPr>
+          <a:p>
+            <a:pPr lvl="0" algn="ctr">
+              <a:defRPr/>
+            </a:pPr>
+            <a:r>
+              <a:rPr lang="ko-KR" altLang="en-US"/>
+              <a:t>비밀번호 찾기</a:t>
+            </a:r>
+            <a:endParaRPr lang="ko-KR" altLang="en-US"/>
+          </a:p>
+        </p:txBody>
+      </p:sp>
+      <p:sp>
+        <p:nvSpPr>
+          <p:cNvPr id="29" name="가로 글상자 28"/>
+          <p:cNvSpPr txBox="1"/>
+          <p:nvPr/>
+        </p:nvSpPr>
+        <p:spPr>
+          <a:xfrm>
+            <a:off x="372018" y="4424221"/>
+            <a:ext cx="5936774" cy="364949"/>
+          </a:xfrm>
+          <a:prstGeom prst="rect">
+            <a:avLst/>
+          </a:prstGeom>
+        </p:spPr>
+        <p:txBody>
+          <a:bodyPr wrap="square">
+            <a:spAutoFit/>
+          </a:bodyPr>
+          <a:p>
+            <a:pPr lvl="0" algn="ctr">
+              <a:defRPr/>
+            </a:pPr>
+            <a:r>
+              <a:rPr lang="ko-KR" altLang="en-US"/>
+              <a:t>아이디 입력</a:t>
+            </a:r>
+            <a:endParaRPr lang="ko-KR" altLang="en-US"/>
+          </a:p>
+        </p:txBody>
+      </p:sp>
+      <p:sp>
+        <p:nvSpPr>
+          <p:cNvPr id="30" name="가로 글상자 29"/>
+          <p:cNvSpPr txBox="1"/>
+          <p:nvPr/>
+        </p:nvSpPr>
+        <p:spPr>
+          <a:xfrm>
+            <a:off x="372018" y="4780598"/>
+            <a:ext cx="5936774" cy="363470"/>
+          </a:xfrm>
+          <a:prstGeom prst="rect">
+            <a:avLst/>
+          </a:prstGeom>
+        </p:spPr>
+        <p:txBody>
+          <a:bodyPr wrap="square">
+            <a:spAutoFit/>
+          </a:bodyPr>
+          <a:p>
+            <a:pPr lvl="0" algn="ctr">
+              <a:defRPr/>
+            </a:pPr>
+            <a:endParaRPr lang="ko-KR" altLang="en-US"/>
+          </a:p>
+        </p:txBody>
+      </p:sp>
+      <p:sp>
+        <p:nvSpPr>
+          <p:cNvPr id="31" name="가로 글상자 30"/>
+          <p:cNvSpPr txBox="1"/>
+          <p:nvPr/>
+        </p:nvSpPr>
+        <p:spPr>
+          <a:xfrm>
+            <a:off x="4303614" y="4780597"/>
+            <a:ext cx="779087" cy="360350"/>
+          </a:xfrm>
+          <a:prstGeom prst="rect">
+            <a:avLst/>
+          </a:prstGeom>
+          <a:ln>
+            <a:solidFill>
+              <a:srgbClr val="000000"/>
+            </a:solidFill>
+          </a:ln>
+        </p:spPr>
+        <p:txBody>
+          <a:bodyPr wrap="square">
+            <a:spAutoFit/>
+          </a:bodyPr>
+          <a:p>
+            <a:pPr lvl="0" algn="ctr">
+              <a:defRPr/>
+            </a:pPr>
+            <a:r>
+              <a:rPr lang="ko-KR" altLang="en-US"/>
+              <a:t>찾기</a:t>
+            </a:r>
+            <a:endParaRPr lang="ko-KR" altLang="en-US"/>
+          </a:p>
+        </p:txBody>
+      </p:sp>
+      <p:cxnSp>
+        <p:nvCxnSpPr>
+          <p:cNvPr id="32" name="선 31"/>
+          <p:cNvCxnSpPr/>
+          <p:nvPr/>
+        </p:nvCxnSpPr>
+        <p:spPr>
+          <a:xfrm>
+            <a:off x="1120707" y="4272226"/>
+            <a:ext cx="4610528" cy="0"/>
+          </a:xfrm>
+          <a:prstGeom prst="line">
+            <a:avLst/>
+          </a:prstGeom>
+        </p:spPr>
+        <p:style>
+          <a:lnRef idx="1">
+            <a:schemeClr val="accent1"/>
+          </a:lnRef>
+          <a:fillRef idx="0">
+            <a:schemeClr val="accent1"/>
+          </a:fillRef>
+          <a:effectRef idx="0">
+            <a:schemeClr val="accent1"/>
+          </a:effectRef>
+          <a:fontRef idx="minor">
+            <a:schemeClr val="tx1"/>
+          </a:fontRef>
+        </p:style>
+      </p:cxnSp>
+      <p:sp>
+        <p:nvSpPr>
+          <p:cNvPr id="33" name="가로 글상자 32"/>
+          <p:cNvSpPr txBox="1"/>
+          <p:nvPr/>
+        </p:nvSpPr>
+        <p:spPr>
+          <a:xfrm>
+            <a:off x="372018" y="4785238"/>
+            <a:ext cx="5936774" cy="365882"/>
+          </a:xfrm>
+          <a:prstGeom prst="rect">
+            <a:avLst/>
+          </a:prstGeom>
+        </p:spPr>
+        <p:txBody>
+          <a:bodyPr wrap="square">
+            <a:spAutoFit/>
+          </a:bodyPr>
+          <a:p>
+            <a:pPr lvl="0" algn="ctr">
+              <a:defRPr/>
+            </a:pPr>
+            <a:r>
+              <a:rPr lang="ko-KR" altLang="en-US"/>
+              <a:t>전화번호 입력</a:t>
+            </a:r>
+            <a:endParaRPr lang="ko-KR" altLang="en-US"/>
+          </a:p>
+        </p:txBody>
+      </p:sp>
+      <p:sp>
+        <p:nvSpPr>
+          <p:cNvPr id="34" name="가로 글상자 33"/>
+          <p:cNvSpPr txBox="1"/>
+          <p:nvPr/>
+        </p:nvSpPr>
+        <p:spPr>
+          <a:xfrm>
+            <a:off x="4303614" y="5144068"/>
+            <a:ext cx="779087" cy="360350"/>
+          </a:xfrm>
+          <a:prstGeom prst="rect">
+            <a:avLst/>
+          </a:prstGeom>
+          <a:ln>
+            <a:solidFill>
+              <a:srgbClr val="000000"/>
+            </a:solidFill>
+          </a:ln>
+        </p:spPr>
+        <p:txBody>
+          <a:bodyPr wrap="square">
+            <a:spAutoFit/>
+          </a:bodyPr>
+          <a:p>
+            <a:pPr lvl="0" algn="ctr">
+              <a:defRPr/>
+            </a:pPr>
+            <a:r>
+              <a:rPr lang="ko-KR" altLang="en-US"/>
+              <a:t>확인</a:t>
+            </a:r>
+            <a:endParaRPr lang="ko-KR" altLang="en-US"/>
+          </a:p>
+        </p:txBody>
+      </p:sp>
+      <p:sp>
+        <p:nvSpPr>
+          <p:cNvPr id="35" name="가로 글상자 34"/>
+          <p:cNvSpPr txBox="1"/>
+          <p:nvPr/>
+        </p:nvSpPr>
+        <p:spPr>
+          <a:xfrm>
+            <a:off x="372018" y="5145589"/>
+            <a:ext cx="5936774" cy="358830"/>
+          </a:xfrm>
+          <a:prstGeom prst="rect">
+            <a:avLst/>
+          </a:prstGeom>
+        </p:spPr>
+        <p:txBody>
+          <a:bodyPr wrap="square">
+            <a:spAutoFit/>
+          </a:bodyPr>
+          <a:p>
+            <a:pPr lvl="0" algn="ctr">
+              <a:defRPr/>
+            </a:pPr>
+            <a:r>
+              <a:rPr lang="ko-KR" altLang="en-US"/>
+              <a:t>인증번호 입력</a:t>
+            </a:r>
+            <a:endParaRPr lang="ko-KR" altLang="en-US"/>
+          </a:p>
+        </p:txBody>
+      </p:sp>
+      <p:sp>
+        <p:nvSpPr>
+          <p:cNvPr id="36" name="가로 글상자 35"/>
+          <p:cNvSpPr txBox="1"/>
+          <p:nvPr/>
+        </p:nvSpPr>
+        <p:spPr>
+          <a:xfrm>
+            <a:off x="372018" y="5921712"/>
+            <a:ext cx="5936774" cy="360654"/>
+          </a:xfrm>
+          <a:prstGeom prst="rect">
+            <a:avLst/>
+          </a:prstGeom>
+        </p:spPr>
+        <p:txBody>
+          <a:bodyPr wrap="square">
+            <a:spAutoFit/>
+          </a:bodyPr>
+          <a:p>
+            <a:pPr lvl="0" algn="ctr">
+              <a:defRPr/>
+            </a:pPr>
+            <a:r>
+              <a:rPr lang="ko-KR" altLang="en-US"/>
+              <a:t>로그인으로 이동</a:t>
+            </a:r>
+            <a:endParaRPr lang="ko-KR" altLang="en-US"/>
+          </a:p>
+        </p:txBody>
+      </p:sp>
+    </p:spTree>
+    <p:extLst>
+      <p:ext uri="{BB962C8B-B14F-4D97-AF65-F5344CB8AC3E}">
+        <p14:creationId xmlns:p14="http://schemas.microsoft.com/office/powerpoint/2010/main" val="672907368"/>
+      </p:ext>
+    </p:extLst>
+  </p:cSld>
+  <p:clrMapOvr>
+    <a:masterClrMapping/>
+  </p:clrMapOvr>
+</p:sld>
+</file>
+
+<file path=ppt/slides/slide5.xml><?xml version="1.0" encoding="utf-8"?>
+<p:sld xmlns:r="http://schemas.openxmlformats.org/officeDocument/2006/relationships" xmlns:c="http://schemas.openxmlformats.org/drawingml/2006/chart" xmlns:a="http://schemas.openxmlformats.org/drawingml/2006/main" xmlns:dgm="http://schemas.openxmlformats.org/drawingml/2006/diagram" xmlns:dsp="http://schemas.microsoft.com/office/drawing/2008/diagram" xmlns:p="http://schemas.openxmlformats.org/presentationml/2006/main">
+  <p:cSld>
+    <p:spTree>
+      <p:nvGrpSpPr>
+        <p:cNvPr id="1" name=""/>
+        <p:cNvGrpSpPr/>
+        <p:nvPr/>
+      </p:nvGrpSpPr>
+      <p:grpSpPr>
+        <a:xfrm>
+          <a:off x="0" y="0"/>
+          <a:ext cx="0" cy="0"/>
+          <a:chOff x="0" y="0"/>
+          <a:chExt cx="0" cy="0"/>
+        </a:xfrm>
+      </p:grpSpPr>
+      <p:sp>
+        <p:nvSpPr>
+          <p:cNvPr id="4" name="가로 글상자 3"/>
+          <p:cNvSpPr txBox="1"/>
+          <p:nvPr/>
+        </p:nvSpPr>
+        <p:spPr>
+          <a:xfrm>
+            <a:off x="372018" y="334386"/>
+            <a:ext cx="11138172" cy="498463"/>
+          </a:xfrm>
+          <a:prstGeom prst="rect">
+            <a:avLst/>
+          </a:prstGeom>
+        </p:spPr>
+        <p:txBody>
+          <a:bodyPr wrap="square">
+            <a:spAutoFit/>
+          </a:bodyPr>
+          <a:p>
+            <a:pPr lvl="0">
+              <a:defRPr/>
+            </a:pPr>
+            <a:r>
+              <a:rPr lang="ko-KR" altLang="en-US" sz="2700"/>
+              <a:t>메인 화면</a:t>
+            </a:r>
+            <a:endParaRPr lang="ko-KR" altLang="en-US" sz="2700"/>
+          </a:p>
+        </p:txBody>
+      </p:sp>
+      <p:sp>
+        <p:nvSpPr>
+          <p:cNvPr id="8" name="직사각형 7"/>
+          <p:cNvSpPr/>
+          <p:nvPr/>
+        </p:nvSpPr>
+        <p:spPr>
+          <a:xfrm>
+            <a:off x="372018" y="1584798"/>
+            <a:ext cx="5936774" cy="5015824"/>
+          </a:xfrm>
+          <a:prstGeom prst="rect">
+            <a:avLst/>
+          </a:prstGeom>
+          <a:solidFill>
+            <a:schemeClr val="lt1"/>
+          </a:solidFill>
+          <a:ln>
+            <a:solidFill>
+              <a:srgbClr val="000000"/>
+            </a:solidFill>
+          </a:ln>
+        </p:spPr>
+        <p:style>
+          <a:lnRef idx="2">
+            <a:schemeClr val="accent1">
+              <a:shade val="20000"/>
+            </a:schemeClr>
+          </a:lnRef>
+          <a:fillRef idx="1">
+            <a:schemeClr val="accent1"/>
+          </a:fillRef>
+          <a:effectRef idx="0">
+            <a:schemeClr val="accent1"/>
+          </a:effectRef>
+          <a:fontRef idx="minor">
+            <a:schemeClr val="lt1"/>
+          </a:fontRef>
+        </p:style>
+        <p:txBody>
+          <a:bodyPr anchor="ctr"/>
+          <a:p>
+            <a:pPr lvl="0" algn="ctr">
+              <a:defRPr/>
+            </a:pPr>
+            <a:endParaRPr lang="ko-KR" altLang="en-US"/>
+          </a:p>
+        </p:txBody>
+      </p:sp>
+      <p:sp>
+        <p:nvSpPr>
+          <p:cNvPr id="17" name="가로 글상자 16"/>
+          <p:cNvSpPr txBox="1"/>
+          <p:nvPr/>
+        </p:nvSpPr>
+        <p:spPr>
+          <a:xfrm>
+            <a:off x="6734378" y="1584798"/>
+            <a:ext cx="5228616" cy="642147"/>
+          </a:xfrm>
+          <a:prstGeom prst="rect">
+            <a:avLst/>
+          </a:prstGeom>
+        </p:spPr>
+        <p:txBody>
+          <a:bodyPr wrap="square">
+            <a:spAutoFit/>
+          </a:bodyPr>
+          <a:p>
+            <a:pPr lvl="0">
+              <a:defRPr/>
+            </a:pPr>
+            <a:r>
+              <a:rPr lang="ko-KR" altLang="en-US"/>
+              <a:t>화면</a:t>
+            </a:r>
+            <a:r>
+              <a:rPr lang="en-US" altLang="ko-KR"/>
+              <a:t>ID :</a:t>
+            </a:r>
+            <a:r>
+              <a:rPr lang="ko-KR" altLang="en-US"/>
+              <a:t> </a:t>
+            </a:r>
+            <a:r>
+              <a:rPr lang="en-US" altLang="ko-KR"/>
+              <a:t>SCR-004</a:t>
+            </a:r>
+            <a:endParaRPr lang="en-US" altLang="ko-KR"/>
+          </a:p>
+          <a:p>
+            <a:pPr lvl="0">
+              <a:defRPr/>
+            </a:pPr>
+            <a:endParaRPr lang="ko-KR" altLang="en-US"/>
+          </a:p>
+        </p:txBody>
+      </p:sp>
+      <p:sp>
+        <p:nvSpPr>
+          <p:cNvPr id="39" name="직사각형 38"/>
+          <p:cNvSpPr/>
+          <p:nvPr/>
+        </p:nvSpPr>
+        <p:spPr>
+          <a:xfrm>
+            <a:off x="1223188" y="2101579"/>
+            <a:ext cx="4234434" cy="3860667"/>
+          </a:xfrm>
+          <a:prstGeom prst="rect">
+            <a:avLst/>
+          </a:prstGeom>
+          <a:solidFill>
+            <a:schemeClr val="lt1"/>
+          </a:solidFill>
+        </p:spPr>
+        <p:style>
+          <a:lnRef idx="2">
+            <a:schemeClr val="accent1">
+              <a:shade val="20000"/>
+            </a:schemeClr>
+          </a:lnRef>
+          <a:fillRef idx="1">
+            <a:schemeClr val="accent1"/>
+          </a:fillRef>
+          <a:effectRef idx="0">
+            <a:schemeClr val="accent1"/>
+          </a:effectRef>
+          <a:fontRef idx="minor">
+            <a:schemeClr val="lt1"/>
+          </a:fontRef>
+        </p:style>
+        <p:txBody>
+          <a:bodyPr anchor="ctr"/>
+          <a:p>
+            <a:pPr lvl="0" algn="ctr">
+              <a:defRPr/>
+            </a:pPr>
+            <a:r>
+              <a:rPr lang="ko-KR" altLang="en-US">
+                <a:ln w="9525">
+                  <a:solidFill>
+                    <a:schemeClr val="dk1"/>
+                  </a:solidFill>
+                </a:ln>
+                <a:solidFill>
+                  <a:schemeClr val="dk1"/>
+                </a:solidFill>
+              </a:rPr>
+              <a:t>학원 이미지</a:t>
+            </a:r>
+            <a:endParaRPr lang="ko-KR" altLang="en-US">
+              <a:ln w="9525">
+                <a:solidFill>
+                  <a:schemeClr val="dk1"/>
+                </a:solidFill>
+              </a:ln>
+              <a:solidFill>
+                <a:schemeClr val="dk1"/>
+              </a:solidFill>
+            </a:endParaRPr>
+          </a:p>
+        </p:txBody>
+      </p:sp>
+      <p:sp>
+        <p:nvSpPr>
+          <p:cNvPr id="40" name="직사각형 39"/>
+          <p:cNvSpPr/>
+          <p:nvPr/>
+        </p:nvSpPr>
+        <p:spPr>
+          <a:xfrm>
+            <a:off x="372018" y="6083841"/>
+            <a:ext cx="5936774" cy="516781"/>
+          </a:xfrm>
+          <a:prstGeom prst="rect">
+            <a:avLst/>
+          </a:prstGeom>
+          <a:solidFill>
+            <a:srgbClr val="b2b2b2"/>
+          </a:solidFill>
           <a:ln>
             <a:solidFill>
               <a:schemeClr val="dk1"/>
             </a:solidFill>
           </a:ln>
         </p:spPr>
-      </p:pic>
-      <p:graphicFrame>
-        <p:nvGraphicFramePr>
-          <p:cNvPr id="7" name="표 6"/>
-          <p:cNvGraphicFramePr>
-            <a:graphicFrameLocks noGrp="1"/>
-          </p:cNvGraphicFramePr>
+        <p:style>
+          <a:lnRef idx="2">
+            <a:schemeClr val="accent1">
+              <a:shade val="20000"/>
+            </a:schemeClr>
+          </a:lnRef>
+          <a:fillRef idx="1">
+            <a:schemeClr val="accent1"/>
+          </a:fillRef>
+          <a:effectRef idx="0">
+            <a:schemeClr val="accent1"/>
+          </a:effectRef>
+          <a:fontRef idx="minor">
+            <a:schemeClr val="lt1"/>
+          </a:fontRef>
+        </p:style>
+        <p:txBody>
+          <a:bodyPr anchor="ctr"/>
+          <a:p>
+            <a:pPr lvl="0" algn="ctr">
+              <a:defRPr/>
+            </a:pPr>
+            <a:r>
+              <a:rPr lang="ko-KR" altLang="en-US"/>
+              <a:t> 푸터</a:t>
+            </a:r>
+            <a:endParaRPr lang="ko-KR" altLang="en-US"/>
+          </a:p>
+        </p:txBody>
+      </p:sp>
+      <p:sp>
+        <p:nvSpPr>
+          <p:cNvPr id="42" name="가로 글상자 41"/>
+          <p:cNvSpPr txBox="1"/>
           <p:nvPr/>
-        </p:nvGraphicFramePr>
-        <p:xfrm>
-          <a:off x="6096001" y="1336691"/>
-          <a:ext cx="5414190" cy="5096586"/>
-        </p:xfrm>
-        <a:graphic>
-          <a:graphicData uri="http://schemas.openxmlformats.org/drawingml/2006/table">
-            <a:tbl>
-              <a:tblPr firstRow="1" bandRow="1">
-                <a:tableStyleId>{F77BBAD0-2FD1-4BB3-BED5-B7D4590D3504}</a:tableStyleId>
-              </a:tblPr>
-              <a:tblGrid>
-                <a:gridCol w="1191902"/>
-                <a:gridCol w="4222287"/>
-              </a:tblGrid>
-              <a:tr h="811696">
-                <a:tc>
-                  <a:txBody>
-                    <a:bodyPr vert="horz" wrap="square" lIns="91440" tIns="45720" rIns="91440" bIns="45720" anchor="ctr" anchorCtr="0">
-                      <a:spAutoFit/>
-                    </a:bodyPr>
-                    <a:p>
-                      <a:pPr lvl="0" algn="ctr">
-                        <a:defRPr/>
-                      </a:pPr>
-                      <a:r>
-                        <a:rPr lang="ko-KR" altLang="en-US"/>
-                        <a:t>구분</a:t>
-                      </a:r>
-                      <a:endParaRPr lang="ko-KR" altLang="en-US"/>
-                    </a:p>
-                  </a:txBody>
-                  <a:tcPr marL="91440" marR="91440" anchor="ctr">
-                    <a:lnL w="12700" cap="flat" cmpd="sng" algn="ctr">
-                      <a:solidFill>
-                        <a:schemeClr val="tx1"/>
-                      </a:solidFill>
-                      <a:prstDash val="solid"/>
-                      <a:round/>
-                      <a:headEnd w="med" len="med"/>
-                      <a:tailEnd w="med" len="med"/>
-                    </a:lnL>
-                    <a:lnR w="12700" cap="flat" cmpd="sng" algn="ctr">
-                      <a:solidFill>
-                        <a:schemeClr val="tx1"/>
-                      </a:solidFill>
-                      <a:prstDash val="solid"/>
-                      <a:round/>
-                      <a:headEnd w="med" len="med"/>
-                      <a:tailEnd w="med" len="med"/>
-                    </a:lnR>
-                    <a:lnT w="12700" cap="flat" cmpd="sng" algn="ctr">
-                      <a:solidFill>
-                        <a:schemeClr val="tx1"/>
-                      </a:solidFill>
-                      <a:prstDash val="solid"/>
-                      <a:round/>
-                      <a:headEnd w="med" len="med"/>
-                      <a:tailEnd w="med" len="med"/>
-                    </a:lnT>
-                    <a:lnB w="12700" cap="flat" cmpd="sng" algn="ctr">
-                      <a:solidFill>
-                        <a:schemeClr val="tx1"/>
-                      </a:solidFill>
-                      <a:prstDash val="solid"/>
-                      <a:round/>
-                      <a:headEnd w="med" len="med"/>
-                      <a:tailEnd w="med" len="med"/>
-                    </a:lnB>
-                  </a:tcPr>
-                </a:tc>
-                <a:tc>
-                  <a:txBody>
-                    <a:bodyPr vert="horz" wrap="square" lIns="91440" tIns="45720" rIns="91440" bIns="45720" anchor="ctr" anchorCtr="0">
-                      <a:spAutoFit/>
-                    </a:bodyPr>
-                    <a:p>
-                      <a:pPr lvl="0" algn="ctr">
-                        <a:defRPr/>
-                      </a:pPr>
-                      <a:r>
-                        <a:rPr lang="ko-KR" altLang="en-US"/>
-                        <a:t>내용</a:t>
-                      </a:r>
-                      <a:endParaRPr lang="ko-KR" altLang="en-US"/>
-                    </a:p>
-                  </a:txBody>
-                  <a:tcPr marL="91440" marR="91440" anchor="ctr">
-                    <a:lnL w="12700" cap="flat" cmpd="sng" algn="ctr">
-                      <a:solidFill>
-                        <a:schemeClr val="tx1"/>
-                      </a:solidFill>
-                      <a:prstDash val="solid"/>
-                      <a:round/>
-                      <a:headEnd w="med" len="med"/>
-                      <a:tailEnd w="med" len="med"/>
-                    </a:lnL>
-                    <a:lnR w="12700" cap="flat" cmpd="sng" algn="ctr">
-                      <a:solidFill>
-                        <a:schemeClr val="tx1"/>
-                      </a:solidFill>
-                      <a:prstDash val="solid"/>
-                      <a:round/>
-                      <a:headEnd w="med" len="med"/>
-                      <a:tailEnd w="med" len="med"/>
-                    </a:lnR>
-                    <a:lnT w="12700" cap="flat" cmpd="sng" algn="ctr">
-                      <a:solidFill>
-                        <a:schemeClr val="tx1"/>
-                      </a:solidFill>
-                      <a:prstDash val="solid"/>
-                      <a:round/>
-                      <a:headEnd w="med" len="med"/>
-                      <a:tailEnd w="med" len="med"/>
-                    </a:lnT>
-                    <a:lnB w="12700" cap="flat" cmpd="sng" algn="ctr">
-                      <a:solidFill>
-                        <a:schemeClr val="tx1"/>
-                      </a:solidFill>
-                      <a:prstDash val="solid"/>
-                      <a:round/>
-                      <a:headEnd w="med" len="med"/>
-                      <a:tailEnd w="med" len="med"/>
-                    </a:lnB>
-                  </a:tcPr>
-                </a:tc>
-              </a:tr>
-              <a:tr h="834611">
-                <a:tc>
-                  <a:txBody>
-                    <a:bodyPr vert="horz" wrap="square" lIns="91440" tIns="45720" rIns="91440" bIns="45720" anchor="ctr" anchorCtr="0">
-                      <a:spAutoFit/>
-                    </a:bodyPr>
-                    <a:p>
-                      <a:pPr lvl="0" algn="r">
-                        <a:defRPr/>
-                      </a:pPr>
-                      <a:r>
-                        <a:rPr lang="ko-KR" altLang="en-US" sz="1200">
-                          <a:latin typeface="맑은 고딕"/>
-                        </a:rPr>
-                        <a:t>화면 </a:t>
-                      </a:r>
-                      <a:r>
-                        <a:rPr lang="en-US" altLang="ko-KR" sz="1200">
-                          <a:latin typeface="맑은 고딕"/>
-                        </a:rPr>
-                        <a:t>ID</a:t>
-                      </a:r>
-                      <a:endParaRPr lang="en-US" altLang="ko-KR" sz="1200">
-                        <a:latin typeface="맑은 고딕"/>
-                      </a:endParaRPr>
-                    </a:p>
-                  </a:txBody>
-                  <a:tcPr marL="91440" marR="91440" anchor="ctr">
-                    <a:lnL w="12700" cap="flat" cmpd="sng" algn="ctr">
-                      <a:solidFill>
-                        <a:schemeClr val="tx1"/>
-                      </a:solidFill>
-                      <a:prstDash val="solid"/>
-                      <a:round/>
-                      <a:headEnd w="med" len="med"/>
-                      <a:tailEnd w="med" len="med"/>
-                    </a:lnL>
-                    <a:lnR w="12700" cap="flat" cmpd="sng" algn="ctr">
-                      <a:solidFill>
-                        <a:schemeClr val="tx1"/>
-                      </a:solidFill>
-                      <a:prstDash val="solid"/>
-                      <a:round/>
-                      <a:headEnd w="med" len="med"/>
-                      <a:tailEnd w="med" len="med"/>
-                    </a:lnR>
-                    <a:lnT w="12700" cap="flat" cmpd="sng" algn="ctr">
-                      <a:solidFill>
-                        <a:schemeClr val="tx1"/>
-                      </a:solidFill>
-                      <a:prstDash val="solid"/>
-                      <a:round/>
-                      <a:headEnd w="med" len="med"/>
-                      <a:tailEnd w="med" len="med"/>
-                    </a:lnT>
-                    <a:lnB w="12700" cap="flat" cmpd="sng" algn="ctr">
-                      <a:solidFill>
-                        <a:schemeClr val="tx1"/>
-                      </a:solidFill>
-                      <a:prstDash val="solid"/>
-                      <a:round/>
-                      <a:headEnd w="med" len="med"/>
-                      <a:tailEnd w="med" len="med"/>
-                    </a:lnB>
-                  </a:tcPr>
-                </a:tc>
-                <a:tc>
-                  <a:txBody>
-                    <a:bodyPr vert="horz" wrap="square" lIns="91440" tIns="45720" rIns="91440" bIns="45720" anchor="ctr" anchorCtr="0">
-                      <a:spAutoFit/>
-                    </a:bodyPr>
-                    <a:p>
-                      <a:pPr lvl="0">
-                        <a:defRPr/>
-                      </a:pPr>
-                      <a:r>
-                        <a:rPr lang="en-US" altLang="ko-KR" sz="1200">
-                          <a:latin typeface="맑은 고딕"/>
-                        </a:rPr>
-                        <a:t>SCR-001</a:t>
-                      </a:r>
-                      <a:endParaRPr lang="en-US" altLang="ko-KR" sz="1200">
-                        <a:latin typeface="맑은 고딕"/>
-                      </a:endParaRPr>
-                    </a:p>
-                  </a:txBody>
-                  <a:tcPr marL="91440" marR="91440" anchor="ctr">
-                    <a:lnL w="12700" cap="flat" cmpd="sng" algn="ctr">
-                      <a:solidFill>
-                        <a:schemeClr val="tx1"/>
-                      </a:solidFill>
-                      <a:prstDash val="solid"/>
-                      <a:round/>
-                      <a:headEnd w="med" len="med"/>
-                      <a:tailEnd w="med" len="med"/>
-                    </a:lnL>
-                    <a:lnR w="12700" cap="flat" cmpd="sng" algn="ctr">
-                      <a:solidFill>
-                        <a:schemeClr val="tx1"/>
-                      </a:solidFill>
-                      <a:prstDash val="solid"/>
-                      <a:round/>
-                      <a:headEnd w="med" len="med"/>
-                      <a:tailEnd w="med" len="med"/>
-                    </a:lnR>
-                    <a:lnT w="12700" cap="flat" cmpd="sng" algn="ctr">
-                      <a:solidFill>
-                        <a:schemeClr val="tx1"/>
-                      </a:solidFill>
-                      <a:prstDash val="solid"/>
-                      <a:round/>
-                      <a:headEnd w="med" len="med"/>
-                      <a:tailEnd w="med" len="med"/>
-                    </a:lnT>
-                    <a:lnB w="12700" cap="flat" cmpd="sng" algn="ctr">
-                      <a:solidFill>
-                        <a:schemeClr val="tx1"/>
-                      </a:solidFill>
-                      <a:prstDash val="solid"/>
-                      <a:round/>
-                      <a:headEnd w="med" len="med"/>
-                      <a:tailEnd w="med" len="med"/>
-                    </a:lnB>
-                  </a:tcPr>
-                </a:tc>
-              </a:tr>
-              <a:tr h="795331">
-                <a:tc>
-                  <a:txBody>
-                    <a:bodyPr vert="horz" wrap="square" lIns="91440" tIns="45720" rIns="91440" bIns="45720" anchor="ctr" anchorCtr="0">
-                      <a:spAutoFit/>
-                    </a:bodyPr>
-                    <a:p>
-                      <a:pPr lvl="0" algn="r">
-                        <a:defRPr/>
-                      </a:pPr>
-                      <a:r>
-                        <a:rPr lang="ko-KR" altLang="en-US" sz="1200">
-                          <a:latin typeface="맑은 고딕"/>
-                        </a:rPr>
-                        <a:t>화면명</a:t>
-                      </a:r>
-                      <a:endParaRPr lang="ko-KR" altLang="en-US" sz="1200">
-                        <a:latin typeface="맑은 고딕"/>
-                      </a:endParaRPr>
-                    </a:p>
-                  </a:txBody>
-                  <a:tcPr marL="91440" marR="91440" anchor="ctr">
-                    <a:lnL w="12700" cap="flat" cmpd="sng" algn="ctr">
-                      <a:solidFill>
-                        <a:schemeClr val="tx1"/>
-                      </a:solidFill>
-                      <a:prstDash val="solid"/>
-                      <a:round/>
-                      <a:headEnd w="med" len="med"/>
-                      <a:tailEnd w="med" len="med"/>
-                    </a:lnL>
-                    <a:lnR w="12700" cap="flat" cmpd="sng" algn="ctr">
-                      <a:solidFill>
-                        <a:schemeClr val="tx1"/>
-                      </a:solidFill>
-                      <a:prstDash val="solid"/>
-                      <a:round/>
-                      <a:headEnd w="med" len="med"/>
-                      <a:tailEnd w="med" len="med"/>
-                    </a:lnR>
-                    <a:lnT w="12700" cap="flat" cmpd="sng" algn="ctr">
-                      <a:solidFill>
-                        <a:schemeClr val="tx1"/>
-                      </a:solidFill>
-                      <a:prstDash val="solid"/>
-                      <a:round/>
-                      <a:headEnd w="med" len="med"/>
-                      <a:tailEnd w="med" len="med"/>
-                    </a:lnT>
-                    <a:lnB w="12700" cap="flat" cmpd="sng" algn="ctr">
-                      <a:solidFill>
-                        <a:schemeClr val="tx1"/>
-                      </a:solidFill>
-                      <a:prstDash val="solid"/>
-                      <a:round/>
-                      <a:headEnd w="med" len="med"/>
-                      <a:tailEnd w="med" len="med"/>
-                    </a:lnB>
-                  </a:tcPr>
-                </a:tc>
-                <a:tc>
-                  <a:txBody>
-                    <a:bodyPr vert="horz" wrap="square" lIns="91440" tIns="45720" rIns="91440" bIns="45720" anchor="ctr" anchorCtr="0">
-                      <a:spAutoFit/>
-                    </a:bodyPr>
-                    <a:p>
-                      <a:pPr lvl="0">
-                        <a:defRPr/>
-                      </a:pPr>
-                      <a:r>
-                        <a:rPr lang="ko-KR" altLang="en-US" sz="1200">
-                          <a:latin typeface="맑은 고딕"/>
-                        </a:rPr>
-                        <a:t>로그인 페이지</a:t>
-                      </a:r>
-                      <a:endParaRPr lang="ko-KR" altLang="en-US" sz="1200">
-                        <a:latin typeface="맑은 고딕"/>
-                      </a:endParaRPr>
-                    </a:p>
-                  </a:txBody>
-                  <a:tcPr marL="91440" marR="91440" anchor="ctr">
-                    <a:lnL w="12700" cap="flat" cmpd="sng" algn="ctr">
-                      <a:solidFill>
-                        <a:schemeClr val="tx1"/>
-                      </a:solidFill>
-                      <a:prstDash val="solid"/>
-                      <a:round/>
-                      <a:headEnd w="med" len="med"/>
-                      <a:tailEnd w="med" len="med"/>
-                    </a:lnL>
-                    <a:lnR w="12700" cap="flat" cmpd="sng" algn="ctr">
-                      <a:solidFill>
-                        <a:schemeClr val="tx1"/>
-                      </a:solidFill>
-                      <a:prstDash val="solid"/>
-                      <a:round/>
-                      <a:headEnd w="med" len="med"/>
-                      <a:tailEnd w="med" len="med"/>
-                    </a:lnR>
-                    <a:lnT w="12700" cap="flat" cmpd="sng" algn="ctr">
-                      <a:solidFill>
-                        <a:schemeClr val="tx1"/>
-                      </a:solidFill>
-                      <a:prstDash val="solid"/>
-                      <a:round/>
-                      <a:headEnd w="med" len="med"/>
-                      <a:tailEnd w="med" len="med"/>
-                    </a:lnT>
-                    <a:lnB w="12700" cap="flat" cmpd="sng" algn="ctr">
-                      <a:solidFill>
-                        <a:schemeClr val="tx1"/>
-                      </a:solidFill>
-                      <a:prstDash val="solid"/>
-                      <a:round/>
-                      <a:headEnd w="med" len="med"/>
-                      <a:tailEnd w="med" len="med"/>
-                    </a:lnB>
-                  </a:tcPr>
-                </a:tc>
-              </a:tr>
-              <a:tr h="1370993">
-                <a:tc>
-                  <a:txBody>
-                    <a:bodyPr vert="horz" wrap="square" lIns="91440" tIns="45720" rIns="91440" bIns="45720" anchor="ctr" anchorCtr="0">
-                      <a:spAutoFit/>
-                    </a:bodyPr>
-                    <a:p>
-                      <a:pPr lvl="0" algn="r">
-                        <a:defRPr/>
-                      </a:pPr>
-                      <a:r>
-                        <a:rPr lang="ko-KR" altLang="en-US" sz="1200">
-                          <a:latin typeface="맑은 고딕"/>
-                        </a:rPr>
-                        <a:t>기능 설명</a:t>
-                      </a:r>
-                      <a:endParaRPr lang="ko-KR" altLang="en-US" sz="1200">
-                        <a:latin typeface="맑은 고딕"/>
-                      </a:endParaRPr>
-                    </a:p>
-                  </a:txBody>
-                  <a:tcPr marL="91440" marR="91440" anchor="ctr">
-                    <a:lnL w="12700" cap="flat" cmpd="sng" algn="ctr">
-                      <a:solidFill>
-                        <a:schemeClr val="tx1"/>
-                      </a:solidFill>
-                      <a:prstDash val="solid"/>
-                      <a:round/>
-                      <a:headEnd w="med" len="med"/>
-                      <a:tailEnd w="med" len="med"/>
-                    </a:lnL>
-                    <a:lnR w="12700" cap="flat" cmpd="sng" algn="ctr">
-                      <a:solidFill>
-                        <a:schemeClr val="tx1"/>
-                      </a:solidFill>
-                      <a:prstDash val="solid"/>
-                      <a:round/>
-                      <a:headEnd w="med" len="med"/>
-                      <a:tailEnd w="med" len="med"/>
-                    </a:lnR>
-                    <a:lnT w="12700" cap="flat" cmpd="sng" algn="ctr">
-                      <a:solidFill>
-                        <a:schemeClr val="tx1"/>
-                      </a:solidFill>
-                      <a:prstDash val="solid"/>
-                      <a:round/>
-                      <a:headEnd w="med" len="med"/>
-                      <a:tailEnd w="med" len="med"/>
-                    </a:lnT>
-                    <a:lnB w="12700" cap="flat" cmpd="sng" algn="ctr">
-                      <a:solidFill>
-                        <a:schemeClr val="tx1"/>
-                      </a:solidFill>
-                      <a:prstDash val="solid"/>
-                      <a:round/>
-                      <a:headEnd w="med" len="med"/>
-                      <a:tailEnd w="med" len="med"/>
-                    </a:lnB>
-                  </a:tcPr>
-                </a:tc>
-                <a:tc>
-                  <a:txBody>
-                    <a:bodyPr vert="horz" wrap="square" lIns="91440" tIns="45720" rIns="91440" bIns="45720" anchor="ctr" anchorCtr="0">
-                      <a:spAutoFit/>
-                    </a:bodyPr>
-                    <a:p>
-                      <a:pPr lvl="0">
-                        <a:defRPr/>
-                      </a:pPr>
-                      <a:r>
-                        <a:rPr lang="en-US" altLang="ko-KR" sz="1200">
-                          <a:latin typeface="맑은 고딕"/>
-                        </a:rPr>
-                        <a:t>1.</a:t>
-                      </a:r>
-                      <a:r>
-                        <a:rPr lang="ko-KR" altLang="en-US" sz="1200">
-                          <a:latin typeface="맑은 고딕"/>
-                        </a:rPr>
-                        <a:t> 아이디/비밀번호 입력 후 로그인 수행</a:t>
-                      </a:r>
-                      <a:endParaRPr lang="ko-KR" altLang="en-US" sz="1200">
-                        <a:latin typeface="맑은 고딕"/>
-                      </a:endParaRPr>
-                    </a:p>
-                    <a:p>
-                      <a:pPr lvl="0">
-                        <a:defRPr/>
-                      </a:pPr>
-                      <a:r>
-                        <a:rPr lang="en-US" altLang="ko-KR" sz="1200">
-                          <a:latin typeface="맑은 고딕"/>
-                        </a:rPr>
-                        <a:t>2.</a:t>
-                      </a:r>
-                      <a:r>
-                        <a:rPr lang="ko-KR" altLang="en-US" sz="1200">
-                          <a:latin typeface="맑은 고딕"/>
-                        </a:rPr>
-                        <a:t> 회원가입 및 계정 찾기 페이지 이동</a:t>
-                      </a:r>
-                      <a:endParaRPr lang="ko-KR" altLang="en-US" sz="1200">
-                        <a:latin typeface="맑은 고딕"/>
-                      </a:endParaRPr>
-                    </a:p>
-                  </a:txBody>
-                  <a:tcPr marL="91440" marR="91440" anchor="ctr">
-                    <a:lnL w="12700" cap="flat" cmpd="sng" algn="ctr">
-                      <a:solidFill>
-                        <a:schemeClr val="tx1"/>
-                      </a:solidFill>
-                      <a:prstDash val="solid"/>
-                      <a:round/>
-                      <a:headEnd w="med" len="med"/>
-                      <a:tailEnd w="med" len="med"/>
-                    </a:lnL>
-                    <a:lnR w="12700" cap="flat" cmpd="sng" algn="ctr">
-                      <a:solidFill>
-                        <a:schemeClr val="tx1"/>
-                      </a:solidFill>
-                      <a:prstDash val="solid"/>
-                      <a:round/>
-                      <a:headEnd w="med" len="med"/>
-                      <a:tailEnd w="med" len="med"/>
-                    </a:lnR>
-                    <a:lnT w="12700" cap="flat" cmpd="sng" algn="ctr">
-                      <a:solidFill>
-                        <a:schemeClr val="tx1"/>
-                      </a:solidFill>
-                      <a:prstDash val="solid"/>
-                      <a:round/>
-                      <a:headEnd w="med" len="med"/>
-                      <a:tailEnd w="med" len="med"/>
-                    </a:lnT>
-                    <a:lnB w="12700" cap="flat" cmpd="sng" algn="ctr">
-                      <a:solidFill>
-                        <a:schemeClr val="tx1"/>
-                      </a:solidFill>
-                      <a:prstDash val="solid"/>
-                      <a:round/>
-                      <a:headEnd w="med" len="med"/>
-                      <a:tailEnd w="med" len="med"/>
-                    </a:lnB>
-                  </a:tcPr>
-                </a:tc>
-              </a:tr>
-              <a:tr h="1283953">
-                <a:tc>
-                  <a:txBody>
-                    <a:bodyPr vert="horz" wrap="square" lIns="91440" tIns="45720" rIns="91440" bIns="45720" anchor="ctr" anchorCtr="0">
-                      <a:spAutoFit/>
-                    </a:bodyPr>
-                    <a:p>
-                      <a:pPr lvl="0" algn="r">
-                        <a:defRPr/>
-                      </a:pPr>
-                      <a:r>
-                        <a:rPr lang="ko-KR" altLang="en-US" sz="1200">
-                          <a:latin typeface="맑은 고딕"/>
-                        </a:rPr>
-                        <a:t>비고</a:t>
-                      </a:r>
-                      <a:r>
-                        <a:rPr lang="en-US" altLang="ko-KR" sz="1200">
-                          <a:latin typeface="맑은 고딕"/>
-                        </a:rPr>
-                        <a:t>/</a:t>
-                      </a:r>
-                      <a:r>
-                        <a:rPr lang="ko-KR" altLang="en-US" sz="1200">
-                          <a:latin typeface="맑은 고딕"/>
-                        </a:rPr>
-                        <a:t>예외</a:t>
-                      </a:r>
-                      <a:endParaRPr lang="ko-KR" altLang="en-US" sz="1200">
-                        <a:latin typeface="맑은 고딕"/>
-                      </a:endParaRPr>
-                    </a:p>
-                  </a:txBody>
-                  <a:tcPr marL="91440" marR="91440" anchor="ctr">
-                    <a:lnL w="12700" cap="flat" cmpd="sng" algn="ctr">
-                      <a:solidFill>
-                        <a:schemeClr val="tx1"/>
-                      </a:solidFill>
-                      <a:prstDash val="solid"/>
-                      <a:round/>
-                      <a:headEnd w="med" len="med"/>
-                      <a:tailEnd w="med" len="med"/>
-                    </a:lnL>
-                    <a:lnR w="12700" cap="flat" cmpd="sng" algn="ctr">
-                      <a:solidFill>
-                        <a:schemeClr val="tx1"/>
-                      </a:solidFill>
-                      <a:prstDash val="solid"/>
-                      <a:round/>
-                      <a:headEnd w="med" len="med"/>
-                      <a:tailEnd w="med" len="med"/>
-                    </a:lnR>
-                    <a:lnT w="12700" cap="flat" cmpd="sng" algn="ctr">
-                      <a:solidFill>
-                        <a:schemeClr val="tx1"/>
-                      </a:solidFill>
-                      <a:prstDash val="solid"/>
-                      <a:round/>
-                      <a:headEnd w="med" len="med"/>
-                      <a:tailEnd w="med" len="med"/>
-                    </a:lnT>
-                    <a:lnB w="12700" cap="flat" cmpd="sng" algn="ctr">
-                      <a:solidFill>
-                        <a:schemeClr val="tx1"/>
-                      </a:solidFill>
-                      <a:prstDash val="solid"/>
-                      <a:round/>
-                      <a:headEnd w="med" len="med"/>
-                      <a:tailEnd w="med" len="med"/>
-                    </a:lnB>
-                  </a:tcPr>
-                </a:tc>
-                <a:tc>
-                  <a:txBody>
-                    <a:bodyPr vert="horz" wrap="square" lIns="91440" tIns="45720" rIns="91440" bIns="45720" anchor="ctr" anchorCtr="0">
-                      <a:spAutoFit/>
-                    </a:bodyPr>
-                    <a:p>
-                      <a:pPr lvl="0">
-                        <a:defRPr/>
-                      </a:pPr>
-                      <a:r>
-                        <a:rPr lang="en-US" altLang="ko-KR" sz="1200">
-                          <a:latin typeface="맑은 고딕"/>
-                        </a:rPr>
-                        <a:t>1.</a:t>
-                      </a:r>
-                      <a:r>
-                        <a:rPr lang="ko-KR" altLang="en-US" sz="1200">
-                          <a:latin typeface="맑은 고딕"/>
-                        </a:rPr>
-                        <a:t> </a:t>
-                      </a:r>
-                      <a:r>
-                        <a:rPr lang="en-US" altLang="ko-KR" sz="1200">
-                          <a:latin typeface="맑은 고딕"/>
-                        </a:rPr>
-                        <a:t>아이디 5회 오류 시 30분간 잠금</a:t>
-                      </a:r>
-                      <a:endParaRPr lang="en-US" altLang="ko-KR" sz="1200">
-                        <a:latin typeface="맑은 고딕"/>
-                      </a:endParaRPr>
-                    </a:p>
-                    <a:p>
-                      <a:pPr lvl="0">
-                        <a:defRPr/>
-                      </a:pPr>
-                      <a:r>
-                        <a:rPr lang="en-US" altLang="ko-KR" sz="1200">
-                          <a:latin typeface="맑은 고딕"/>
-                        </a:rPr>
-                        <a:t>2.</a:t>
-                      </a:r>
-                      <a:r>
-                        <a:rPr lang="ko-KR" altLang="en-US" sz="1200">
-                          <a:latin typeface="맑은 고딕"/>
-                        </a:rPr>
-                        <a:t> 미입력 시 '정보를 입력하세요' 토스트 메시지 노출</a:t>
-                      </a:r>
-                      <a:endParaRPr lang="ko-KR" altLang="en-US" sz="1200">
-                        <a:latin typeface="맑은 고딕"/>
-                      </a:endParaRPr>
-                    </a:p>
-                  </a:txBody>
-                  <a:tcPr marL="91440" marR="91440" anchor="ctr">
-                    <a:lnL w="12700" cap="flat" cmpd="sng" algn="ctr">
-                      <a:solidFill>
-                        <a:schemeClr val="tx1"/>
-                      </a:solidFill>
-                      <a:prstDash val="solid"/>
-                      <a:round/>
-                      <a:headEnd w="med" len="med"/>
-                      <a:tailEnd w="med" len="med"/>
-                    </a:lnL>
-                    <a:lnR w="12700" cap="flat" cmpd="sng" algn="ctr">
-                      <a:solidFill>
-                        <a:schemeClr val="tx1"/>
-                      </a:solidFill>
-                      <a:prstDash val="solid"/>
-                      <a:round/>
-                      <a:headEnd w="med" len="med"/>
-                      <a:tailEnd w="med" len="med"/>
-                    </a:lnR>
-                    <a:lnT w="12700" cap="flat" cmpd="sng" algn="ctr">
-                      <a:solidFill>
-                        <a:schemeClr val="tx1"/>
-                      </a:solidFill>
-                      <a:prstDash val="solid"/>
-                      <a:round/>
-                      <a:headEnd w="med" len="med"/>
-                      <a:tailEnd w="med" len="med"/>
-                    </a:lnT>
-                    <a:lnB w="12700" cap="flat" cmpd="sng" algn="ctr">
-                      <a:solidFill>
-                        <a:schemeClr val="tx1"/>
-                      </a:solidFill>
-                      <a:prstDash val="solid"/>
-                      <a:round/>
-                      <a:headEnd w="med" len="med"/>
-                      <a:tailEnd w="med" len="med"/>
-                    </a:lnB>
-                  </a:tcPr>
-                </a:tc>
-              </a:tr>
-            </a:tbl>
-          </a:graphicData>
-        </a:graphic>
-      </p:graphicFrame>
+        </p:nvSpPr>
+        <p:spPr>
+          <a:xfrm>
+            <a:off x="372018" y="1584798"/>
+            <a:ext cx="5936774" cy="365922"/>
+          </a:xfrm>
+          <a:prstGeom prst="rect">
+            <a:avLst/>
+          </a:prstGeom>
+          <a:ln>
+            <a:solidFill>
+              <a:schemeClr val="dk1"/>
+            </a:solidFill>
+          </a:ln>
+        </p:spPr>
+        <p:txBody>
+          <a:bodyPr wrap="square">
+            <a:spAutoFit/>
+          </a:bodyPr>
+          <a:lstStyle/>
+          <a:p>
+            <a:pPr lvl="0">
+              <a:defRPr/>
+            </a:pPr>
+            <a:r>
+              <a:rPr lang="en-US" altLang="ko-KR"/>
+              <a:t> </a:t>
+            </a:r>
+            <a:r>
+              <a:rPr lang="ko-KR" altLang="en-US"/>
+              <a:t>위드유      </a:t>
+            </a:r>
+            <a:r>
+              <a:rPr lang="ko-KR" altLang="en-US" sz="1400"/>
+              <a:t>소개 </a:t>
+            </a:r>
+            <a:r>
+              <a:rPr lang="en-US" altLang="ko-KR" sz="1400"/>
+              <a:t>|</a:t>
+            </a:r>
+            <a:r>
+              <a:rPr lang="ko-KR" altLang="en-US" sz="1400"/>
+              <a:t> 수업 </a:t>
+            </a:r>
+            <a:r>
+              <a:rPr lang="en-US" altLang="ko-KR" sz="1400"/>
+              <a:t>|</a:t>
+            </a:r>
+            <a:r>
+              <a:rPr lang="ko-KR" altLang="en-US" sz="1400"/>
+              <a:t> 시험 </a:t>
+            </a:r>
+            <a:r>
+              <a:rPr lang="en-US" altLang="ko-KR" sz="1400"/>
+              <a:t>|</a:t>
+            </a:r>
+            <a:r>
+              <a:rPr lang="ko-KR" altLang="en-US" sz="1400"/>
+              <a:t> 공지사항</a:t>
+            </a:r>
+            <a:r>
+              <a:rPr lang="en-US" altLang="ko-KR" sz="1400"/>
+              <a:t> </a:t>
+            </a:r>
+            <a:r>
+              <a:rPr lang="ko-KR" altLang="en-US" sz="1400"/>
+              <a:t>        아이디</a:t>
+            </a:r>
+            <a:r>
+              <a:rPr lang="en-US" altLang="ko-KR" sz="1400"/>
+              <a:t>|</a:t>
+            </a:r>
+            <a:r>
+              <a:rPr lang="ko-KR" altLang="en-US" sz="1400"/>
+              <a:t>로그인</a:t>
+            </a:r>
+            <a:endParaRPr lang="ko-KR" altLang="en-US" sz="1400"/>
+          </a:p>
+        </p:txBody>
+      </p:sp>
     </p:spTree>
     <p:extLst>
       <p:ext uri="{BB962C8B-B14F-4D97-AF65-F5344CB8AC3E}">
-        <p14:creationId xmlns:p14="http://schemas.microsoft.com/office/powerpoint/2010/main" val="1316232164"/>
+        <p14:creationId xmlns:p14="http://schemas.microsoft.com/office/powerpoint/2010/main" val="1095132993"/>
+      </p:ext>
+    </p:extLst>
+  </p:cSld>
+  <p:clrMapOvr>
+    <a:masterClrMapping/>
+  </p:clrMapOvr>
+</p:sld>
+</file>
+
+<file path=ppt/slides/slide6.xml><?xml version="1.0" encoding="utf-8"?>
+<p:sld xmlns:r="http://schemas.openxmlformats.org/officeDocument/2006/relationships" xmlns:c="http://schemas.openxmlformats.org/drawingml/2006/chart" xmlns:a="http://schemas.openxmlformats.org/drawingml/2006/main" xmlns:dgm="http://schemas.openxmlformats.org/drawingml/2006/diagram" xmlns:dsp="http://schemas.microsoft.com/office/drawing/2008/diagram" xmlns:p="http://schemas.openxmlformats.org/presentationml/2006/main">
+  <p:cSld>
+    <p:spTree>
+      <p:nvGrpSpPr>
+        <p:cNvPr id="1" name=""/>
+        <p:cNvGrpSpPr/>
+        <p:nvPr/>
+      </p:nvGrpSpPr>
+      <p:grpSpPr>
+        <a:xfrm>
+          <a:off x="0" y="0"/>
+          <a:ext cx="0" cy="0"/>
+          <a:chOff x="0" y="0"/>
+          <a:chExt cx="0" cy="0"/>
+        </a:xfrm>
+      </p:grpSpPr>
+      <p:sp>
+        <p:nvSpPr>
+          <p:cNvPr id="4" name="가로 글상자 3"/>
+          <p:cNvSpPr txBox="1"/>
+          <p:nvPr/>
+        </p:nvSpPr>
+        <p:spPr>
+          <a:xfrm>
+            <a:off x="372018" y="334386"/>
+            <a:ext cx="11138172" cy="498463"/>
+          </a:xfrm>
+          <a:prstGeom prst="rect">
+            <a:avLst/>
+          </a:prstGeom>
+        </p:spPr>
+        <p:txBody>
+          <a:bodyPr wrap="square">
+            <a:spAutoFit/>
+          </a:bodyPr>
+          <a:p>
+            <a:pPr lvl="0">
+              <a:defRPr/>
+            </a:pPr>
+            <a:r>
+              <a:rPr lang="ko-KR" altLang="en-US" sz="2700"/>
+              <a:t>마이페이지 화면</a:t>
+            </a:r>
+            <a:endParaRPr lang="ko-KR" altLang="en-US" sz="2700"/>
+          </a:p>
+        </p:txBody>
+      </p:sp>
+      <p:sp>
+        <p:nvSpPr>
+          <p:cNvPr id="8" name="직사각형 7"/>
+          <p:cNvSpPr/>
+          <p:nvPr/>
+        </p:nvSpPr>
+        <p:spPr>
+          <a:xfrm>
+            <a:off x="372018" y="1584798"/>
+            <a:ext cx="5936774" cy="5015824"/>
+          </a:xfrm>
+          <a:prstGeom prst="rect">
+            <a:avLst/>
+          </a:prstGeom>
+          <a:solidFill>
+            <a:schemeClr val="lt1"/>
+          </a:solidFill>
+          <a:ln>
+            <a:solidFill>
+              <a:srgbClr val="000000"/>
+            </a:solidFill>
+          </a:ln>
+        </p:spPr>
+        <p:style>
+          <a:lnRef idx="2">
+            <a:schemeClr val="accent1">
+              <a:shade val="20000"/>
+            </a:schemeClr>
+          </a:lnRef>
+          <a:fillRef idx="1">
+            <a:schemeClr val="accent1"/>
+          </a:fillRef>
+          <a:effectRef idx="0">
+            <a:schemeClr val="accent1"/>
+          </a:effectRef>
+          <a:fontRef idx="minor">
+            <a:schemeClr val="lt1"/>
+          </a:fontRef>
+        </p:style>
+        <p:txBody>
+          <a:bodyPr anchor="ctr"/>
+          <a:p>
+            <a:pPr lvl="0" algn="ctr">
+              <a:defRPr/>
+            </a:pPr>
+            <a:endParaRPr lang="ko-KR" altLang="en-US"/>
+          </a:p>
+        </p:txBody>
+      </p:sp>
+      <p:sp>
+        <p:nvSpPr>
+          <p:cNvPr id="17" name="가로 글상자 16"/>
+          <p:cNvSpPr txBox="1"/>
+          <p:nvPr/>
+        </p:nvSpPr>
+        <p:spPr>
+          <a:xfrm>
+            <a:off x="6734378" y="1584798"/>
+            <a:ext cx="5228616" cy="2556672"/>
+          </a:xfrm>
+          <a:prstGeom prst="rect">
+            <a:avLst/>
+          </a:prstGeom>
+        </p:spPr>
+        <p:txBody>
+          <a:bodyPr wrap="square">
+            <a:spAutoFit/>
+          </a:bodyPr>
+          <a:p>
+            <a:pPr lvl="0">
+              <a:defRPr/>
+            </a:pPr>
+            <a:r>
+              <a:rPr lang="ko-KR" altLang="en-US"/>
+              <a:t>화면</a:t>
+            </a:r>
+            <a:r>
+              <a:rPr lang="en-US" altLang="ko-KR"/>
+              <a:t>ID :</a:t>
+            </a:r>
+            <a:r>
+              <a:rPr lang="ko-KR" altLang="en-US"/>
+              <a:t> </a:t>
+            </a:r>
+            <a:r>
+              <a:rPr lang="en-US" altLang="ko-KR"/>
+              <a:t>SCR-005</a:t>
+            </a:r>
+            <a:endParaRPr lang="en-US" altLang="ko-KR"/>
+          </a:p>
+          <a:p>
+            <a:pPr lvl="0">
+              <a:defRPr/>
+            </a:pPr>
+            <a:endParaRPr lang="ko-KR" altLang="en-US"/>
+          </a:p>
+          <a:p>
+            <a:pPr lvl="0">
+              <a:defRPr/>
+            </a:pPr>
+            <a:r>
+              <a:rPr lang="ko-KR" altLang="en-US"/>
+              <a:t>기능</a:t>
+            </a:r>
+            <a:endParaRPr lang="ko-KR" altLang="en-US"/>
+          </a:p>
+          <a:p>
+            <a:pPr lvl="0">
+              <a:defRPr/>
+            </a:pPr>
+            <a:r>
+              <a:rPr lang="en-US" altLang="ko-KR"/>
+              <a:t>-</a:t>
+            </a:r>
+            <a:r>
+              <a:rPr lang="ko-KR" altLang="en-US"/>
+              <a:t> 프로필 수정 버튼</a:t>
+            </a:r>
+            <a:endParaRPr lang="ko-KR" altLang="en-US"/>
+          </a:p>
+          <a:p>
+            <a:pPr lvl="0">
+              <a:defRPr/>
+            </a:pPr>
+            <a:r>
+              <a:rPr lang="en-US" altLang="ko-KR"/>
+              <a:t>-</a:t>
+            </a:r>
+            <a:r>
+              <a:rPr lang="ko-KR" altLang="en-US"/>
+              <a:t> 비밀번호 변경 버튼</a:t>
+            </a:r>
+            <a:endParaRPr lang="ko-KR" altLang="en-US"/>
+          </a:p>
+          <a:p>
+            <a:pPr lvl="0">
+              <a:defRPr/>
+            </a:pPr>
+            <a:r>
+              <a:rPr lang="en-US" altLang="ko-KR"/>
+              <a:t>-</a:t>
+            </a:r>
+            <a:r>
+              <a:rPr lang="ko-KR" altLang="en-US"/>
+              <a:t> 계정 탈퇴 버튼</a:t>
+            </a:r>
+            <a:endParaRPr lang="ko-KR" altLang="en-US"/>
+          </a:p>
+          <a:p>
+            <a:pPr lvl="0">
+              <a:defRPr/>
+            </a:pPr>
+            <a:endParaRPr lang="ko-KR" altLang="en-US"/>
+          </a:p>
+          <a:p>
+            <a:pPr lvl="0">
+              <a:defRPr/>
+            </a:pPr>
+            <a:endParaRPr lang="ko-KR" altLang="en-US"/>
+          </a:p>
+          <a:p>
+            <a:pPr lvl="0">
+              <a:defRPr/>
+            </a:pPr>
+            <a:r>
+              <a:rPr lang="ko-KR" altLang="en-US"/>
+              <a:t>비로그인시 </a:t>
+            </a:r>
+            <a:r>
+              <a:rPr lang="en-US" altLang="ko-KR"/>
+              <a:t>: </a:t>
+            </a:r>
+            <a:r>
+              <a:rPr lang="ko-KR" altLang="en-US"/>
+              <a:t>로그인 화면으로 이동</a:t>
+            </a:r>
+            <a:endParaRPr lang="ko-KR" altLang="en-US"/>
+          </a:p>
+        </p:txBody>
+      </p:sp>
+      <p:sp>
+        <p:nvSpPr>
+          <p:cNvPr id="40" name="가로 글상자 39"/>
+          <p:cNvSpPr txBox="1"/>
+          <p:nvPr/>
+        </p:nvSpPr>
+        <p:spPr>
+          <a:xfrm>
+            <a:off x="372018" y="2395436"/>
+            <a:ext cx="5936774" cy="1184059"/>
+          </a:xfrm>
+          <a:prstGeom prst="rect">
+            <a:avLst/>
+          </a:prstGeom>
+        </p:spPr>
+        <p:txBody>
+          <a:bodyPr wrap="square">
+            <a:spAutoFit/>
+          </a:bodyPr>
+          <a:p>
+            <a:pPr lvl="0" algn="ctr">
+              <a:defRPr/>
+            </a:pPr>
+            <a:r>
+              <a:rPr lang="ko-KR" altLang="en-US"/>
+              <a:t>이름 </a:t>
+            </a:r>
+            <a:r>
+              <a:rPr lang="en-US" altLang="ko-KR"/>
+              <a:t>:</a:t>
+            </a:r>
+            <a:r>
+              <a:rPr lang="ko-KR" altLang="en-US"/>
+              <a:t> </a:t>
+            </a:r>
+            <a:endParaRPr lang="ko-KR" altLang="en-US"/>
+          </a:p>
+          <a:p>
+            <a:pPr lvl="0" algn="ctr">
+              <a:defRPr/>
+            </a:pPr>
+            <a:r>
+              <a:rPr lang="ko-KR" altLang="en-US"/>
+              <a:t>전화번호 </a:t>
+            </a:r>
+            <a:r>
+              <a:rPr lang="en-US" altLang="ko-KR"/>
+              <a:t>: </a:t>
+            </a:r>
+            <a:endParaRPr lang="en-US" altLang="ko-KR"/>
+          </a:p>
+          <a:p>
+            <a:pPr lvl="0" algn="ctr">
+              <a:defRPr/>
+            </a:pPr>
+            <a:r>
+              <a:rPr lang="ko-KR" altLang="en-US"/>
+              <a:t>이메일 </a:t>
+            </a:r>
+            <a:r>
+              <a:rPr lang="en-US" altLang="ko-KR"/>
+              <a:t>:</a:t>
+            </a:r>
+            <a:r>
+              <a:rPr lang="ko-KR" altLang="en-US"/>
+              <a:t> </a:t>
+            </a:r>
+            <a:endParaRPr lang="ko-KR" altLang="en-US"/>
+          </a:p>
+          <a:p>
+            <a:pPr lvl="0" algn="ctr">
+              <a:defRPr/>
+            </a:pPr>
+            <a:r>
+              <a:rPr lang="ko-KR" altLang="en-US"/>
+              <a:t>학년 </a:t>
+            </a:r>
+            <a:r>
+              <a:rPr lang="en-US" altLang="ko-KR"/>
+              <a:t>:</a:t>
+            </a:r>
+            <a:r>
+              <a:rPr lang="ko-KR" altLang="en-US"/>
+              <a:t> </a:t>
+            </a:r>
+            <a:endParaRPr lang="ko-KR" altLang="en-US"/>
+          </a:p>
+        </p:txBody>
+      </p:sp>
+      <p:sp>
+        <p:nvSpPr>
+          <p:cNvPr id="41" name="직사각형 40"/>
+          <p:cNvSpPr/>
+          <p:nvPr/>
+        </p:nvSpPr>
+        <p:spPr>
+          <a:xfrm>
+            <a:off x="2459411" y="4543628"/>
+            <a:ext cx="1761987" cy="400252"/>
+          </a:xfrm>
+          <a:prstGeom prst="rect">
+            <a:avLst/>
+          </a:prstGeom>
+        </p:spPr>
+        <p:style>
+          <a:lnRef idx="2">
+            <a:schemeClr val="accent1">
+              <a:shade val="20000"/>
+            </a:schemeClr>
+          </a:lnRef>
+          <a:fillRef idx="1">
+            <a:schemeClr val="accent1"/>
+          </a:fillRef>
+          <a:effectRef idx="0">
+            <a:schemeClr val="accent1"/>
+          </a:effectRef>
+          <a:fontRef idx="minor">
+            <a:schemeClr val="lt1"/>
+          </a:fontRef>
+        </p:style>
+        <p:txBody>
+          <a:bodyPr anchor="ctr"/>
+          <a:p>
+            <a:pPr lvl="0" algn="ctr">
+              <a:defRPr/>
+            </a:pPr>
+            <a:r>
+              <a:rPr lang="ko-KR" altLang="en-US"/>
+              <a:t>프로필 수정</a:t>
+            </a:r>
+            <a:endParaRPr lang="ko-KR" altLang="en-US"/>
+          </a:p>
+        </p:txBody>
+      </p:sp>
+      <p:sp>
+        <p:nvSpPr>
+          <p:cNvPr id="42" name="직사각형 41"/>
+          <p:cNvSpPr/>
+          <p:nvPr/>
+        </p:nvSpPr>
+        <p:spPr>
+          <a:xfrm>
+            <a:off x="2459411" y="5019878"/>
+            <a:ext cx="1761987" cy="400252"/>
+          </a:xfrm>
+          <a:prstGeom prst="rect">
+            <a:avLst/>
+          </a:prstGeom>
+        </p:spPr>
+        <p:style>
+          <a:lnRef idx="2">
+            <a:schemeClr val="accent1">
+              <a:shade val="20000"/>
+            </a:schemeClr>
+          </a:lnRef>
+          <a:fillRef idx="1">
+            <a:schemeClr val="accent1"/>
+          </a:fillRef>
+          <a:effectRef idx="0">
+            <a:schemeClr val="accent1"/>
+          </a:effectRef>
+          <a:fontRef idx="minor">
+            <a:schemeClr val="lt1"/>
+          </a:fontRef>
+        </p:style>
+        <p:txBody>
+          <a:bodyPr anchor="ctr"/>
+          <a:p>
+            <a:pPr lvl="0" algn="ctr">
+              <a:defRPr/>
+            </a:pPr>
+            <a:r>
+              <a:rPr lang="ko-KR" altLang="en-US"/>
+              <a:t>비밀번호 변경</a:t>
+            </a:r>
+            <a:endParaRPr lang="ko-KR" altLang="en-US"/>
+          </a:p>
+        </p:txBody>
+      </p:sp>
+      <p:sp>
+        <p:nvSpPr>
+          <p:cNvPr id="43" name="직사각형 42"/>
+          <p:cNvSpPr/>
+          <p:nvPr/>
+        </p:nvSpPr>
+        <p:spPr>
+          <a:xfrm>
+            <a:off x="2459411" y="5485995"/>
+            <a:ext cx="1761987" cy="400252"/>
+          </a:xfrm>
+          <a:prstGeom prst="rect">
+            <a:avLst/>
+          </a:prstGeom>
+        </p:spPr>
+        <p:style>
+          <a:lnRef idx="2">
+            <a:schemeClr val="accent1">
+              <a:shade val="20000"/>
+            </a:schemeClr>
+          </a:lnRef>
+          <a:fillRef idx="1">
+            <a:schemeClr val="accent1"/>
+          </a:fillRef>
+          <a:effectRef idx="0">
+            <a:schemeClr val="accent1"/>
+          </a:effectRef>
+          <a:fontRef idx="minor">
+            <a:schemeClr val="lt1"/>
+          </a:fontRef>
+        </p:style>
+        <p:txBody>
+          <a:bodyPr anchor="ctr"/>
+          <a:p>
+            <a:pPr lvl="0" algn="ctr">
+              <a:defRPr/>
+            </a:pPr>
+            <a:r>
+              <a:rPr lang="ko-KR" altLang="en-US"/>
+              <a:t>계정 탈퇴</a:t>
+            </a:r>
+            <a:endParaRPr lang="ko-KR" altLang="en-US"/>
+          </a:p>
+        </p:txBody>
+      </p:sp>
+      <p:sp>
+        <p:nvSpPr>
+          <p:cNvPr id="44" name="가로 글상자 43"/>
+          <p:cNvSpPr txBox="1"/>
+          <p:nvPr/>
+        </p:nvSpPr>
+        <p:spPr>
+          <a:xfrm>
+            <a:off x="372018" y="1584798"/>
+            <a:ext cx="5936774" cy="365922"/>
+          </a:xfrm>
+          <a:prstGeom prst="rect">
+            <a:avLst/>
+          </a:prstGeom>
+          <a:ln>
+            <a:solidFill>
+              <a:schemeClr val="dk1"/>
+            </a:solidFill>
+          </a:ln>
+        </p:spPr>
+        <p:txBody>
+          <a:bodyPr wrap="square">
+            <a:spAutoFit/>
+          </a:bodyPr>
+          <a:lstStyle/>
+          <a:p>
+            <a:pPr lvl="0">
+              <a:defRPr/>
+            </a:pPr>
+            <a:r>
+              <a:rPr lang="en-US" altLang="ko-KR"/>
+              <a:t> </a:t>
+            </a:r>
+            <a:r>
+              <a:rPr lang="ko-KR" altLang="en-US"/>
+              <a:t>위드유      </a:t>
+            </a:r>
+            <a:r>
+              <a:rPr lang="ko-KR" altLang="en-US" sz="1400"/>
+              <a:t>소개 </a:t>
+            </a:r>
+            <a:r>
+              <a:rPr lang="en-US" altLang="ko-KR" sz="1400"/>
+              <a:t>|</a:t>
+            </a:r>
+            <a:r>
+              <a:rPr lang="ko-KR" altLang="en-US" sz="1400"/>
+              <a:t> 수업 </a:t>
+            </a:r>
+            <a:r>
+              <a:rPr lang="en-US" altLang="ko-KR" sz="1400"/>
+              <a:t>|</a:t>
+            </a:r>
+            <a:r>
+              <a:rPr lang="ko-KR" altLang="en-US" sz="1400"/>
+              <a:t> 시험 </a:t>
+            </a:r>
+            <a:r>
+              <a:rPr lang="en-US" altLang="ko-KR" sz="1400"/>
+              <a:t>|</a:t>
+            </a:r>
+            <a:r>
+              <a:rPr lang="ko-KR" altLang="en-US" sz="1400"/>
+              <a:t> 공지사항</a:t>
+            </a:r>
+            <a:r>
+              <a:rPr lang="en-US" altLang="ko-KR" sz="1400"/>
+              <a:t> </a:t>
+            </a:r>
+            <a:r>
+              <a:rPr lang="ko-KR" altLang="en-US" sz="1400"/>
+              <a:t>        아이디</a:t>
+            </a:r>
+            <a:r>
+              <a:rPr lang="en-US" altLang="ko-KR" sz="1400"/>
+              <a:t>|</a:t>
+            </a:r>
+            <a:r>
+              <a:rPr lang="ko-KR" altLang="en-US" sz="1400"/>
+              <a:t>로그인</a:t>
+            </a:r>
+            <a:endParaRPr lang="ko-KR" altLang="en-US" sz="1400"/>
+          </a:p>
+        </p:txBody>
+      </p:sp>
+    </p:spTree>
+    <p:extLst>
+      <p:ext uri="{BB962C8B-B14F-4D97-AF65-F5344CB8AC3E}">
+        <p14:creationId xmlns:p14="http://schemas.microsoft.com/office/powerpoint/2010/main" val="1376019027"/>
+      </p:ext>
+    </p:extLst>
+  </p:cSld>
+  <p:clrMapOvr>
+    <a:masterClrMapping/>
+  </p:clrMapOvr>
+</p:sld>
+</file>
+
+<file path=ppt/slides/slide7.xml><?xml version="1.0" encoding="utf-8"?>
+<p:sld xmlns:r="http://schemas.openxmlformats.org/officeDocument/2006/relationships" xmlns:c="http://schemas.openxmlformats.org/drawingml/2006/chart" xmlns:a="http://schemas.openxmlformats.org/drawingml/2006/main" xmlns:dgm="http://schemas.openxmlformats.org/drawingml/2006/diagram" xmlns:dsp="http://schemas.microsoft.com/office/drawing/2008/diagram" xmlns:p="http://schemas.openxmlformats.org/presentationml/2006/main">
+  <p:cSld>
+    <p:spTree>
+      <p:nvGrpSpPr>
+        <p:cNvPr id="1" name=""/>
+        <p:cNvGrpSpPr/>
+        <p:nvPr/>
+      </p:nvGrpSpPr>
+      <p:grpSpPr>
+        <a:xfrm>
+          <a:off x="0" y="0"/>
+          <a:ext cx="0" cy="0"/>
+          <a:chOff x="0" y="0"/>
+          <a:chExt cx="0" cy="0"/>
+        </a:xfrm>
+      </p:grpSpPr>
+      <p:sp>
+        <p:nvSpPr>
+          <p:cNvPr id="4" name="가로 글상자 3"/>
+          <p:cNvSpPr txBox="1"/>
+          <p:nvPr/>
+        </p:nvSpPr>
+        <p:spPr>
+          <a:xfrm>
+            <a:off x="372018" y="334386"/>
+            <a:ext cx="11138172" cy="498463"/>
+          </a:xfrm>
+          <a:prstGeom prst="rect">
+            <a:avLst/>
+          </a:prstGeom>
+        </p:spPr>
+        <p:txBody>
+          <a:bodyPr wrap="square">
+            <a:spAutoFit/>
+          </a:bodyPr>
+          <a:p>
+            <a:pPr lvl="0">
+              <a:defRPr/>
+            </a:pPr>
+            <a:r>
+              <a:rPr lang="ko-KR" altLang="en-US" sz="2700"/>
+              <a:t>소개 화면</a:t>
+            </a:r>
+            <a:endParaRPr lang="ko-KR" altLang="en-US" sz="2700"/>
+          </a:p>
+        </p:txBody>
+      </p:sp>
+      <p:sp>
+        <p:nvSpPr>
+          <p:cNvPr id="8" name="직사각형 7"/>
+          <p:cNvSpPr/>
+          <p:nvPr/>
+        </p:nvSpPr>
+        <p:spPr>
+          <a:xfrm>
+            <a:off x="372018" y="1584798"/>
+            <a:ext cx="5936774" cy="5015824"/>
+          </a:xfrm>
+          <a:prstGeom prst="rect">
+            <a:avLst/>
+          </a:prstGeom>
+          <a:solidFill>
+            <a:schemeClr val="lt1"/>
+          </a:solidFill>
+          <a:ln>
+            <a:solidFill>
+              <a:srgbClr val="000000"/>
+            </a:solidFill>
+          </a:ln>
+        </p:spPr>
+        <p:style>
+          <a:lnRef idx="2">
+            <a:schemeClr val="accent1">
+              <a:shade val="20000"/>
+            </a:schemeClr>
+          </a:lnRef>
+          <a:fillRef idx="1">
+            <a:schemeClr val="accent1"/>
+          </a:fillRef>
+          <a:effectRef idx="0">
+            <a:schemeClr val="accent1"/>
+          </a:effectRef>
+          <a:fontRef idx="minor">
+            <a:schemeClr val="lt1"/>
+          </a:fontRef>
+        </p:style>
+        <p:txBody>
+          <a:bodyPr anchor="ctr"/>
+          <a:p>
+            <a:pPr lvl="0" algn="ctr">
+              <a:defRPr/>
+            </a:pPr>
+            <a:endParaRPr lang="ko-KR" altLang="en-US"/>
+          </a:p>
+        </p:txBody>
+      </p:sp>
+      <p:sp>
+        <p:nvSpPr>
+          <p:cNvPr id="17" name="가로 글상자 16"/>
+          <p:cNvSpPr txBox="1"/>
+          <p:nvPr/>
+        </p:nvSpPr>
+        <p:spPr>
+          <a:xfrm>
+            <a:off x="6734378" y="1584798"/>
+            <a:ext cx="5228616" cy="1185072"/>
+          </a:xfrm>
+          <a:prstGeom prst="rect">
+            <a:avLst/>
+          </a:prstGeom>
+        </p:spPr>
+        <p:txBody>
+          <a:bodyPr wrap="square">
+            <a:spAutoFit/>
+          </a:bodyPr>
+          <a:p>
+            <a:pPr lvl="0">
+              <a:defRPr/>
+            </a:pPr>
+            <a:r>
+              <a:rPr lang="ko-KR" altLang="en-US"/>
+              <a:t>화면</a:t>
+            </a:r>
+            <a:r>
+              <a:rPr lang="en-US" altLang="ko-KR"/>
+              <a:t>ID :</a:t>
+            </a:r>
+            <a:r>
+              <a:rPr lang="ko-KR" altLang="en-US"/>
+              <a:t> </a:t>
+            </a:r>
+            <a:r>
+              <a:rPr lang="en-US" altLang="ko-KR"/>
+              <a:t>SCR-006</a:t>
+            </a:r>
+            <a:endParaRPr lang="en-US" altLang="ko-KR"/>
+          </a:p>
+          <a:p>
+            <a:pPr lvl="0">
+              <a:defRPr/>
+            </a:pPr>
+            <a:endParaRPr lang="ko-KR" altLang="en-US"/>
+          </a:p>
+          <a:p>
+            <a:pPr lvl="0">
+              <a:defRPr/>
+            </a:pPr>
+            <a:r>
+              <a:rPr lang="ko-KR" altLang="en-US"/>
+              <a:t>기능</a:t>
+            </a:r>
+            <a:endParaRPr lang="ko-KR" altLang="en-US"/>
+          </a:p>
+          <a:p>
+            <a:pPr lvl="0">
+              <a:defRPr/>
+            </a:pPr>
+            <a:r>
+              <a:rPr lang="en-US" altLang="ko-KR"/>
+              <a:t>-</a:t>
+            </a:r>
+            <a:r>
+              <a:rPr lang="ko-KR" altLang="en-US"/>
+              <a:t> 구글지도 </a:t>
+            </a:r>
+            <a:r>
+              <a:rPr lang="en-US" altLang="ko-KR"/>
+              <a:t>API</a:t>
+            </a:r>
+            <a:r>
+              <a:rPr lang="ko-KR" altLang="en-US"/>
+              <a:t> 위치 표시</a:t>
+            </a:r>
+            <a:endParaRPr lang="ko-KR" altLang="en-US"/>
+          </a:p>
+        </p:txBody>
+      </p:sp>
+      <p:sp>
+        <p:nvSpPr>
+          <p:cNvPr id="44" name="직사각형 43"/>
+          <p:cNvSpPr/>
+          <p:nvPr/>
+        </p:nvSpPr>
+        <p:spPr>
+          <a:xfrm>
+            <a:off x="2206087" y="2354904"/>
+            <a:ext cx="2268636" cy="770106"/>
+          </a:xfrm>
+          <a:prstGeom prst="rect">
+            <a:avLst/>
+          </a:prstGeom>
+        </p:spPr>
+        <p:style>
+          <a:lnRef idx="2">
+            <a:schemeClr val="accent1">
+              <a:shade val="20000"/>
+            </a:schemeClr>
+          </a:lnRef>
+          <a:fillRef idx="1">
+            <a:schemeClr val="accent1"/>
+          </a:fillRef>
+          <a:effectRef idx="0">
+            <a:schemeClr val="accent1"/>
+          </a:effectRef>
+          <a:fontRef idx="minor">
+            <a:schemeClr val="lt1"/>
+          </a:fontRef>
+        </p:style>
+        <p:txBody>
+          <a:bodyPr anchor="ctr"/>
+          <a:p>
+            <a:pPr lvl="0" algn="ctr">
+              <a:defRPr/>
+            </a:pPr>
+            <a:r>
+              <a:rPr lang="ko-KR" altLang="en-US"/>
+              <a:t>선생님 이미지</a:t>
+            </a:r>
+            <a:endParaRPr lang="ko-KR" altLang="en-US"/>
+          </a:p>
+        </p:txBody>
+      </p:sp>
+      <p:sp>
+        <p:nvSpPr>
+          <p:cNvPr id="45" name="가로 글상자 44"/>
+          <p:cNvSpPr txBox="1"/>
+          <p:nvPr/>
+        </p:nvSpPr>
+        <p:spPr>
+          <a:xfrm>
+            <a:off x="2206086" y="3123673"/>
+            <a:ext cx="2268637" cy="362477"/>
+          </a:xfrm>
+          <a:prstGeom prst="rect">
+            <a:avLst/>
+          </a:prstGeom>
+        </p:spPr>
+        <p:txBody>
+          <a:bodyPr wrap="square">
+            <a:spAutoFit/>
+          </a:bodyPr>
+          <a:p>
+            <a:pPr lvl="0">
+              <a:defRPr/>
+            </a:pPr>
+            <a:r>
+              <a:rPr lang="ko-KR" altLang="en-US"/>
+              <a:t>선생님 소개글</a:t>
+            </a:r>
+            <a:endParaRPr lang="ko-KR" altLang="en-US"/>
+          </a:p>
+        </p:txBody>
+      </p:sp>
+      <p:sp>
+        <p:nvSpPr>
+          <p:cNvPr id="48" name="직사각형 47"/>
+          <p:cNvSpPr/>
+          <p:nvPr/>
+        </p:nvSpPr>
+        <p:spPr>
+          <a:xfrm>
+            <a:off x="2529767" y="5171873"/>
+            <a:ext cx="1621276" cy="911968"/>
+          </a:xfrm>
+          <a:prstGeom prst="rect">
+            <a:avLst/>
+          </a:prstGeom>
+          <a:solidFill>
+            <a:schemeClr val="lt1"/>
+          </a:solidFill>
+          <a:ln>
+            <a:solidFill>
+              <a:schemeClr val="dk1"/>
+            </a:solidFill>
+          </a:ln>
+        </p:spPr>
+        <p:style>
+          <a:lnRef idx="2">
+            <a:schemeClr val="accent1">
+              <a:shade val="20000"/>
+            </a:schemeClr>
+          </a:lnRef>
+          <a:fillRef idx="1">
+            <a:schemeClr val="accent1"/>
+          </a:fillRef>
+          <a:effectRef idx="0">
+            <a:schemeClr val="accent1"/>
+          </a:effectRef>
+          <a:fontRef idx="minor">
+            <a:schemeClr val="lt1"/>
+          </a:fontRef>
+        </p:style>
+        <p:txBody>
+          <a:bodyPr anchor="ctr"/>
+          <a:p>
+            <a:pPr lvl="0" algn="ctr">
+              <a:defRPr/>
+            </a:pPr>
+            <a:r>
+              <a:rPr lang="ko-KR" altLang="en-US">
+                <a:ln w="9525">
+                  <a:solidFill>
+                    <a:schemeClr val="dk1"/>
+                  </a:solidFill>
+                </a:ln>
+                <a:solidFill>
+                  <a:schemeClr val="dk1"/>
+                </a:solidFill>
+              </a:rPr>
+              <a:t>지도</a:t>
+            </a:r>
+            <a:endParaRPr lang="ko-KR" altLang="en-US">
+              <a:ln w="9525">
+                <a:solidFill>
+                  <a:schemeClr val="dk1"/>
+                </a:solidFill>
+              </a:ln>
+              <a:solidFill>
+                <a:schemeClr val="dk1"/>
+              </a:solidFill>
+            </a:endParaRPr>
+          </a:p>
+        </p:txBody>
+      </p:sp>
+      <p:sp>
+        <p:nvSpPr>
+          <p:cNvPr id="49" name="직사각형 48"/>
+          <p:cNvSpPr/>
+          <p:nvPr/>
+        </p:nvSpPr>
+        <p:spPr>
+          <a:xfrm>
+            <a:off x="372018" y="6083841"/>
+            <a:ext cx="5936774" cy="516781"/>
+          </a:xfrm>
+          <a:prstGeom prst="rect">
+            <a:avLst/>
+          </a:prstGeom>
+          <a:solidFill>
+            <a:srgbClr val="b2b2b2"/>
+          </a:solidFill>
+          <a:ln>
+            <a:solidFill>
+              <a:schemeClr val="dk1"/>
+            </a:solidFill>
+          </a:ln>
+        </p:spPr>
+        <p:style>
+          <a:lnRef idx="2">
+            <a:schemeClr val="accent1">
+              <a:shade val="20000"/>
+            </a:schemeClr>
+          </a:lnRef>
+          <a:fillRef idx="1">
+            <a:schemeClr val="accent1"/>
+          </a:fillRef>
+          <a:effectRef idx="0">
+            <a:schemeClr val="accent1"/>
+          </a:effectRef>
+          <a:fontRef idx="minor">
+            <a:schemeClr val="lt1"/>
+          </a:fontRef>
+        </p:style>
+        <p:txBody>
+          <a:bodyPr anchor="ctr"/>
+          <a:lstStyle/>
+          <a:p>
+            <a:pPr lvl="0" algn="ctr">
+              <a:defRPr/>
+            </a:pPr>
+            <a:r>
+              <a:rPr lang="ko-KR" altLang="en-US"/>
+              <a:t> 푸터</a:t>
+            </a:r>
+            <a:endParaRPr lang="ko-KR" altLang="en-US"/>
+          </a:p>
+        </p:txBody>
+      </p:sp>
+      <p:sp>
+        <p:nvSpPr>
+          <p:cNvPr id="50" name="직사각형 49"/>
+          <p:cNvSpPr/>
+          <p:nvPr/>
+        </p:nvSpPr>
+        <p:spPr>
+          <a:xfrm>
+            <a:off x="2206087" y="3707657"/>
+            <a:ext cx="2268636" cy="1124760"/>
+          </a:xfrm>
+          <a:prstGeom prst="rect">
+            <a:avLst/>
+          </a:prstGeom>
+        </p:spPr>
+        <p:style>
+          <a:lnRef idx="2">
+            <a:schemeClr val="accent1">
+              <a:shade val="20000"/>
+            </a:schemeClr>
+          </a:lnRef>
+          <a:fillRef idx="1">
+            <a:schemeClr val="accent1"/>
+          </a:fillRef>
+          <a:effectRef idx="0">
+            <a:schemeClr val="accent1"/>
+          </a:effectRef>
+          <a:fontRef idx="minor">
+            <a:schemeClr val="lt1"/>
+          </a:fontRef>
+        </p:style>
+        <p:txBody>
+          <a:bodyPr anchor="ctr"/>
+          <a:p>
+            <a:pPr lvl="0" algn="ctr">
+              <a:defRPr/>
+            </a:pPr>
+            <a:r>
+              <a:rPr lang="ko-KR" altLang="en-US"/>
+              <a:t>학원 내부 이미지</a:t>
+            </a:r>
+            <a:endParaRPr lang="ko-KR" altLang="en-US"/>
+          </a:p>
+        </p:txBody>
+      </p:sp>
+      <p:sp>
+        <p:nvSpPr>
+          <p:cNvPr id="51" name="가로 글상자 50"/>
+          <p:cNvSpPr txBox="1"/>
+          <p:nvPr/>
+        </p:nvSpPr>
+        <p:spPr>
+          <a:xfrm>
+            <a:off x="372018" y="1584798"/>
+            <a:ext cx="5936774" cy="365922"/>
+          </a:xfrm>
+          <a:prstGeom prst="rect">
+            <a:avLst/>
+          </a:prstGeom>
+          <a:ln>
+            <a:solidFill>
+              <a:schemeClr val="dk1"/>
+            </a:solidFill>
+          </a:ln>
+        </p:spPr>
+        <p:txBody>
+          <a:bodyPr wrap="square">
+            <a:spAutoFit/>
+          </a:bodyPr>
+          <a:lstStyle/>
+          <a:p>
+            <a:pPr lvl="0">
+              <a:defRPr/>
+            </a:pPr>
+            <a:r>
+              <a:rPr lang="en-US" altLang="ko-KR"/>
+              <a:t> </a:t>
+            </a:r>
+            <a:r>
+              <a:rPr lang="ko-KR" altLang="en-US"/>
+              <a:t>위드유      </a:t>
+            </a:r>
+            <a:r>
+              <a:rPr lang="ko-KR" altLang="en-US" sz="1400"/>
+              <a:t>소개 </a:t>
+            </a:r>
+            <a:r>
+              <a:rPr lang="en-US" altLang="ko-KR" sz="1400"/>
+              <a:t>|</a:t>
+            </a:r>
+            <a:r>
+              <a:rPr lang="ko-KR" altLang="en-US" sz="1400"/>
+              <a:t> 수업 </a:t>
+            </a:r>
+            <a:r>
+              <a:rPr lang="en-US" altLang="ko-KR" sz="1400"/>
+              <a:t>|</a:t>
+            </a:r>
+            <a:r>
+              <a:rPr lang="ko-KR" altLang="en-US" sz="1400"/>
+              <a:t> 시험 </a:t>
+            </a:r>
+            <a:r>
+              <a:rPr lang="en-US" altLang="ko-KR" sz="1400"/>
+              <a:t>|</a:t>
+            </a:r>
+            <a:r>
+              <a:rPr lang="ko-KR" altLang="en-US" sz="1400"/>
+              <a:t> 공지사항</a:t>
+            </a:r>
+            <a:r>
+              <a:rPr lang="en-US" altLang="ko-KR" sz="1400"/>
+              <a:t> </a:t>
+            </a:r>
+            <a:r>
+              <a:rPr lang="ko-KR" altLang="en-US" sz="1400"/>
+              <a:t>        아이디</a:t>
+            </a:r>
+            <a:r>
+              <a:rPr lang="en-US" altLang="ko-KR" sz="1400"/>
+              <a:t>|</a:t>
+            </a:r>
+            <a:r>
+              <a:rPr lang="ko-KR" altLang="en-US" sz="1400"/>
+              <a:t>로그인</a:t>
+            </a:r>
+            <a:endParaRPr lang="ko-KR" altLang="en-US" sz="1400"/>
+          </a:p>
+        </p:txBody>
+      </p:sp>
+    </p:spTree>
+    <p:extLst>
+      <p:ext uri="{BB962C8B-B14F-4D97-AF65-F5344CB8AC3E}">
+        <p14:creationId xmlns:p14="http://schemas.microsoft.com/office/powerpoint/2010/main" val="3866660547"/>
+      </p:ext>
+    </p:extLst>
+  </p:cSld>
+  <p:clrMapOvr>
+    <a:masterClrMapping/>
+  </p:clrMapOvr>
+</p:sld>
+</file>
+
+<file path=ppt/slides/slide8.xml><?xml version="1.0" encoding="utf-8"?>
+<p:sld xmlns:r="http://schemas.openxmlformats.org/officeDocument/2006/relationships" xmlns:c="http://schemas.openxmlformats.org/drawingml/2006/chart" xmlns:a="http://schemas.openxmlformats.org/drawingml/2006/main" xmlns:dgm="http://schemas.openxmlformats.org/drawingml/2006/diagram" xmlns:dsp="http://schemas.microsoft.com/office/drawing/2008/diagram" xmlns:p="http://schemas.openxmlformats.org/presentationml/2006/main">
+  <p:cSld>
+    <p:spTree>
+      <p:nvGrpSpPr>
+        <p:cNvPr id="1" name=""/>
+        <p:cNvGrpSpPr/>
+        <p:nvPr/>
+      </p:nvGrpSpPr>
+      <p:grpSpPr>
+        <a:xfrm>
+          <a:off x="0" y="0"/>
+          <a:ext cx="0" cy="0"/>
+          <a:chOff x="0" y="0"/>
+          <a:chExt cx="0" cy="0"/>
+        </a:xfrm>
+      </p:grpSpPr>
+      <p:sp>
+        <p:nvSpPr>
+          <p:cNvPr id="4" name="가로 글상자 3"/>
+          <p:cNvSpPr txBox="1"/>
+          <p:nvPr/>
+        </p:nvSpPr>
+        <p:spPr>
+          <a:xfrm>
+            <a:off x="372018" y="334386"/>
+            <a:ext cx="11138172" cy="498463"/>
+          </a:xfrm>
+          <a:prstGeom prst="rect">
+            <a:avLst/>
+          </a:prstGeom>
+        </p:spPr>
+        <p:txBody>
+          <a:bodyPr wrap="square">
+            <a:spAutoFit/>
+          </a:bodyPr>
+          <a:p>
+            <a:pPr lvl="0">
+              <a:defRPr/>
+            </a:pPr>
+            <a:r>
+              <a:rPr lang="ko-KR" altLang="en-US" sz="2700"/>
+              <a:t>수업 화면</a:t>
+            </a:r>
+            <a:endParaRPr lang="ko-KR" altLang="en-US" sz="2700"/>
+          </a:p>
+        </p:txBody>
+      </p:sp>
+      <p:sp>
+        <p:nvSpPr>
+          <p:cNvPr id="8" name="직사각형 7"/>
+          <p:cNvSpPr/>
+          <p:nvPr/>
+        </p:nvSpPr>
+        <p:spPr>
+          <a:xfrm>
+            <a:off x="372018" y="1584798"/>
+            <a:ext cx="5936774" cy="5015824"/>
+          </a:xfrm>
+          <a:prstGeom prst="rect">
+            <a:avLst/>
+          </a:prstGeom>
+          <a:solidFill>
+            <a:schemeClr val="lt1"/>
+          </a:solidFill>
+          <a:ln>
+            <a:solidFill>
+              <a:srgbClr val="000000"/>
+            </a:solidFill>
+          </a:ln>
+        </p:spPr>
+        <p:style>
+          <a:lnRef idx="2">
+            <a:schemeClr val="accent1">
+              <a:shade val="20000"/>
+            </a:schemeClr>
+          </a:lnRef>
+          <a:fillRef idx="1">
+            <a:schemeClr val="accent1"/>
+          </a:fillRef>
+          <a:effectRef idx="0">
+            <a:schemeClr val="accent1"/>
+          </a:effectRef>
+          <a:fontRef idx="minor">
+            <a:schemeClr val="lt1"/>
+          </a:fontRef>
+        </p:style>
+        <p:txBody>
+          <a:bodyPr anchor="ctr"/>
+          <a:p>
+            <a:pPr lvl="0" algn="ctr">
+              <a:defRPr/>
+            </a:pPr>
+            <a:endParaRPr lang="ko-KR" altLang="en-US"/>
+          </a:p>
+        </p:txBody>
+      </p:sp>
+      <p:sp>
+        <p:nvSpPr>
+          <p:cNvPr id="17" name="가로 글상자 16"/>
+          <p:cNvSpPr txBox="1"/>
+          <p:nvPr/>
+        </p:nvSpPr>
+        <p:spPr>
+          <a:xfrm>
+            <a:off x="6734378" y="1584798"/>
+            <a:ext cx="5228616" cy="1737521"/>
+          </a:xfrm>
+          <a:prstGeom prst="rect">
+            <a:avLst/>
+          </a:prstGeom>
+        </p:spPr>
+        <p:txBody>
+          <a:bodyPr wrap="square">
+            <a:spAutoFit/>
+          </a:bodyPr>
+          <a:p>
+            <a:pPr lvl="0">
+              <a:defRPr/>
+            </a:pPr>
+            <a:r>
+              <a:rPr lang="ko-KR" altLang="en-US"/>
+              <a:t>화면</a:t>
+            </a:r>
+            <a:r>
+              <a:rPr lang="en-US" altLang="ko-KR"/>
+              <a:t>ID :</a:t>
+            </a:r>
+            <a:r>
+              <a:rPr lang="ko-KR" altLang="en-US"/>
+              <a:t> </a:t>
+            </a:r>
+            <a:r>
+              <a:rPr lang="en-US" altLang="ko-KR"/>
+              <a:t>SCR-007</a:t>
+            </a:r>
+            <a:endParaRPr lang="en-US" altLang="ko-KR"/>
+          </a:p>
+          <a:p>
+            <a:pPr lvl="0">
+              <a:defRPr/>
+            </a:pPr>
+            <a:endParaRPr lang="ko-KR" altLang="en-US"/>
+          </a:p>
+          <a:p>
+            <a:pPr lvl="0">
+              <a:defRPr/>
+            </a:pPr>
+            <a:r>
+              <a:rPr lang="ko-KR" altLang="en-US"/>
+              <a:t>기능</a:t>
+            </a:r>
+            <a:endParaRPr lang="ko-KR" altLang="en-US"/>
+          </a:p>
+          <a:p>
+            <a:pPr lvl="0">
+              <a:defRPr/>
+            </a:pPr>
+            <a:r>
+              <a:rPr lang="en-US" altLang="ko-KR"/>
+              <a:t>-</a:t>
+            </a:r>
+            <a:r>
+              <a:rPr lang="ko-KR" altLang="en-US"/>
+              <a:t> 수업 소개 및 가격 변경 버튼</a:t>
+            </a:r>
+            <a:endParaRPr lang="ko-KR" altLang="en-US"/>
+          </a:p>
+          <a:p>
+            <a:pPr lvl="0">
+              <a:defRPr/>
+            </a:pPr>
+            <a:endParaRPr lang="ko-KR" altLang="en-US"/>
+          </a:p>
+          <a:p>
+            <a:pPr lvl="0">
+              <a:defRPr/>
+            </a:pPr>
+            <a:endParaRPr lang="ko-KR" altLang="en-US"/>
+          </a:p>
+        </p:txBody>
+      </p:sp>
+      <p:sp>
+        <p:nvSpPr>
+          <p:cNvPr id="39" name="가로 글상자 38"/>
+          <p:cNvSpPr txBox="1"/>
+          <p:nvPr/>
+        </p:nvSpPr>
+        <p:spPr>
+          <a:xfrm>
+            <a:off x="372018" y="1584798"/>
+            <a:ext cx="5936774" cy="365922"/>
+          </a:xfrm>
+          <a:prstGeom prst="rect">
+            <a:avLst/>
+          </a:prstGeom>
+          <a:ln>
+            <a:solidFill>
+              <a:schemeClr val="dk1"/>
+            </a:solidFill>
+          </a:ln>
+        </p:spPr>
+        <p:txBody>
+          <a:bodyPr wrap="square">
+            <a:spAutoFit/>
+          </a:bodyPr>
+          <a:lstStyle/>
+          <a:p>
+            <a:pPr lvl="0">
+              <a:defRPr/>
+            </a:pPr>
+            <a:r>
+              <a:rPr lang="en-US" altLang="ko-KR"/>
+              <a:t> </a:t>
+            </a:r>
+            <a:r>
+              <a:rPr lang="ko-KR" altLang="en-US"/>
+              <a:t>위드유      </a:t>
+            </a:r>
+            <a:r>
+              <a:rPr lang="ko-KR" altLang="en-US" sz="1400"/>
+              <a:t>소개 </a:t>
+            </a:r>
+            <a:r>
+              <a:rPr lang="en-US" altLang="ko-KR" sz="1400"/>
+              <a:t>|</a:t>
+            </a:r>
+            <a:r>
+              <a:rPr lang="ko-KR" altLang="en-US" sz="1400"/>
+              <a:t> 수업 </a:t>
+            </a:r>
+            <a:r>
+              <a:rPr lang="en-US" altLang="ko-KR" sz="1400"/>
+              <a:t>|</a:t>
+            </a:r>
+            <a:r>
+              <a:rPr lang="ko-KR" altLang="en-US" sz="1400"/>
+              <a:t> 시험 </a:t>
+            </a:r>
+            <a:r>
+              <a:rPr lang="en-US" altLang="ko-KR" sz="1400"/>
+              <a:t>|</a:t>
+            </a:r>
+            <a:r>
+              <a:rPr lang="ko-KR" altLang="en-US" sz="1400"/>
+              <a:t> 공지사항</a:t>
+            </a:r>
+            <a:r>
+              <a:rPr lang="en-US" altLang="ko-KR" sz="1400"/>
+              <a:t> </a:t>
+            </a:r>
+            <a:r>
+              <a:rPr lang="ko-KR" altLang="en-US" sz="1400"/>
+              <a:t>        아이디</a:t>
+            </a:r>
+            <a:r>
+              <a:rPr lang="en-US" altLang="ko-KR" sz="1400"/>
+              <a:t>|</a:t>
+            </a:r>
+            <a:r>
+              <a:rPr lang="ko-KR" altLang="en-US" sz="1400"/>
+              <a:t>로그인</a:t>
+            </a:r>
+            <a:endParaRPr lang="ko-KR" altLang="en-US" sz="1400"/>
+          </a:p>
+        </p:txBody>
+      </p:sp>
+      <p:sp>
+        <p:nvSpPr>
+          <p:cNvPr id="51" name="직사각형 50"/>
+          <p:cNvSpPr/>
+          <p:nvPr/>
+        </p:nvSpPr>
+        <p:spPr>
+          <a:xfrm>
+            <a:off x="1669039" y="2699426"/>
+            <a:ext cx="3342732" cy="1783403"/>
+          </a:xfrm>
+          <a:prstGeom prst="rect">
+            <a:avLst/>
+          </a:prstGeom>
+        </p:spPr>
+        <p:style>
+          <a:lnRef idx="2">
+            <a:schemeClr val="accent1">
+              <a:shade val="20000"/>
+            </a:schemeClr>
+          </a:lnRef>
+          <a:fillRef idx="1">
+            <a:schemeClr val="accent1"/>
+          </a:fillRef>
+          <a:effectRef idx="0">
+            <a:schemeClr val="accent1"/>
+          </a:effectRef>
+          <a:fontRef idx="minor">
+            <a:schemeClr val="lt1"/>
+          </a:fontRef>
+        </p:style>
+        <p:txBody>
+          <a:bodyPr anchor="ctr"/>
+          <a:p>
+            <a:pPr lvl="0" algn="ctr">
+              <a:defRPr/>
+            </a:pPr>
+            <a:r>
+              <a:rPr lang="ko-KR" altLang="en-US"/>
+              <a:t>수업 소개 및 가격</a:t>
+            </a:r>
+            <a:endParaRPr lang="ko-KR" altLang="en-US"/>
+          </a:p>
+        </p:txBody>
+      </p:sp>
+    </p:spTree>
+    <p:extLst>
+      <p:ext uri="{BB962C8B-B14F-4D97-AF65-F5344CB8AC3E}">
+        <p14:creationId xmlns:p14="http://schemas.microsoft.com/office/powerpoint/2010/main" val="261643265"/>
+      </p:ext>
+    </p:extLst>
+  </p:cSld>
+  <p:clrMapOvr>
+    <a:masterClrMapping/>
+  </p:clrMapOvr>
+</p:sld>
+</file>
+
+<file path=ppt/slides/slide9.xml><?xml version="1.0" encoding="utf-8"?>
+<p:sld xmlns:r="http://schemas.openxmlformats.org/officeDocument/2006/relationships" xmlns:c="http://schemas.openxmlformats.org/drawingml/2006/chart" xmlns:a="http://schemas.openxmlformats.org/drawingml/2006/main" xmlns:dgm="http://schemas.openxmlformats.org/drawingml/2006/diagram" xmlns:dsp="http://schemas.microsoft.com/office/drawing/2008/diagram" xmlns:p="http://schemas.openxmlformats.org/presentationml/2006/main">
+  <p:cSld>
+    <p:spTree>
+      <p:nvGrpSpPr>
+        <p:cNvPr id="1" name=""/>
+        <p:cNvGrpSpPr/>
+        <p:nvPr/>
+      </p:nvGrpSpPr>
+      <p:grpSpPr>
+        <a:xfrm>
+          <a:off x="0" y="0"/>
+          <a:ext cx="0" cy="0"/>
+          <a:chOff x="0" y="0"/>
+          <a:chExt cx="0" cy="0"/>
+        </a:xfrm>
+      </p:grpSpPr>
+      <p:sp>
+        <p:nvSpPr>
+          <p:cNvPr id="2" name="제목 1"/>
+          <p:cNvSpPr>
+            <a:spLocks noGrp="1"/>
+          </p:cNvSpPr>
+          <p:nvPr>
+            <p:ph type="title" idx="0"/>
+          </p:nvPr>
+        </p:nvSpPr>
+        <p:spPr/>
+        <p:txBody>
+          <a:bodyPr/>
+          <a:p>
+            <a:pPr lvl="0">
+              <a:defRPr/>
+            </a:pPr>
+            <a:r>
+              <a:rPr lang="ko-KR" altLang="en-US"/>
+              <a:t/>
+            </a:r>
+            <a:endParaRPr lang="ko-KR" altLang="en-US"/>
+          </a:p>
+        </p:txBody>
+      </p:sp>
+      <p:sp>
+        <p:nvSpPr>
+          <p:cNvPr id="3" name="내용 개체 틀 2"/>
+          <p:cNvSpPr>
+            <a:spLocks noGrp="1"/>
+          </p:cNvSpPr>
+          <p:nvPr>
+            <p:ph idx="1"/>
+          </p:nvPr>
+        </p:nvSpPr>
+        <p:spPr/>
+        <p:txBody>
+          <a:bodyPr/>
+          <a:p>
+            <a:pPr lvl="0">
+              <a:defRPr/>
+            </a:pPr>
+            <a:r>
+              <a:rPr lang="ko-KR" altLang="en-US"/>
+              <a:t/>
+            </a:r>
+            <a:endParaRPr lang="ko-KR" altLang="en-US"/>
+          </a:p>
+        </p:txBody>
+      </p:sp>
+    </p:spTree>
+    <p:extLst>
+      <p:ext uri="{BB962C8B-B14F-4D97-AF65-F5344CB8AC3E}">
+        <p14:creationId xmlns:p14="http://schemas.microsoft.com/office/powerpoint/2010/main" val="172617095"/>
       </p:ext>
     </p:extLst>
   </p:cSld>

--- a/docs/4_화면정의서/화면정의서.pptx
+++ b/docs/4_화면정의서/화면정의서.pptx
@@ -13,7 +13,9 @@
     <p:sldId id="264" r:id="rId7"/>
     <p:sldId id="265" r:id="rId8"/>
     <p:sldId id="266" r:id="rId9"/>
-    <p:sldId id="268" r:id="rId10"/>
+    <p:sldId id="267" r:id="rId10"/>
+    <p:sldId id="268" r:id="rId11"/>
+    <p:sldId id="269" r:id="rId12"/>
   </p:sldIdLst>
   <p:sldSz cx="12192000" cy="6858000"/>
   <p:notesSz cx="6858000" cy="9144000"/>
@@ -3695,6 +3697,1250 @@
 </p:sld>
 </file>
 
+<file path=ppt/slides/slide10.xml><?xml version="1.0" encoding="utf-8"?>
+<p:sld xmlns:r="http://schemas.openxmlformats.org/officeDocument/2006/relationships" xmlns:c="http://schemas.openxmlformats.org/drawingml/2006/chart" xmlns:a="http://schemas.openxmlformats.org/drawingml/2006/main" xmlns:dgm="http://schemas.openxmlformats.org/drawingml/2006/diagram" xmlns:dsp="http://schemas.microsoft.com/office/drawing/2008/diagram" xmlns:p="http://schemas.openxmlformats.org/presentationml/2006/main">
+  <p:cSld>
+    <p:spTree>
+      <p:nvGrpSpPr>
+        <p:cNvPr id="1" name=""/>
+        <p:cNvGrpSpPr/>
+        <p:nvPr/>
+      </p:nvGrpSpPr>
+      <p:grpSpPr>
+        <a:xfrm>
+          <a:off x="0" y="0"/>
+          <a:ext cx="0" cy="0"/>
+          <a:chOff x="0" y="0"/>
+          <a:chExt cx="0" cy="0"/>
+        </a:xfrm>
+      </p:grpSpPr>
+      <p:sp>
+        <p:nvSpPr>
+          <p:cNvPr id="4" name="가로 글상자 3"/>
+          <p:cNvSpPr txBox="1"/>
+          <p:nvPr/>
+        </p:nvSpPr>
+        <p:spPr>
+          <a:xfrm>
+            <a:off x="372018" y="334386"/>
+            <a:ext cx="11138172" cy="498463"/>
+          </a:xfrm>
+          <a:prstGeom prst="rect">
+            <a:avLst/>
+          </a:prstGeom>
+        </p:spPr>
+        <p:txBody>
+          <a:bodyPr wrap="square">
+            <a:spAutoFit/>
+          </a:bodyPr>
+          <a:p>
+            <a:pPr lvl="0">
+              <a:defRPr/>
+            </a:pPr>
+            <a:r>
+              <a:rPr lang="ko-KR" altLang="en-US" sz="2700"/>
+              <a:t>공지사항 화면</a:t>
+            </a:r>
+            <a:endParaRPr lang="ko-KR" altLang="en-US" sz="2700"/>
+          </a:p>
+        </p:txBody>
+      </p:sp>
+      <p:sp>
+        <p:nvSpPr>
+          <p:cNvPr id="8" name="직사각형 7"/>
+          <p:cNvSpPr/>
+          <p:nvPr/>
+        </p:nvSpPr>
+        <p:spPr>
+          <a:xfrm>
+            <a:off x="372018" y="1584798"/>
+            <a:ext cx="5936774" cy="5015824"/>
+          </a:xfrm>
+          <a:prstGeom prst="rect">
+            <a:avLst/>
+          </a:prstGeom>
+          <a:solidFill>
+            <a:schemeClr val="lt1"/>
+          </a:solidFill>
+          <a:ln>
+            <a:solidFill>
+              <a:srgbClr val="000000"/>
+            </a:solidFill>
+          </a:ln>
+        </p:spPr>
+        <p:style>
+          <a:lnRef idx="2">
+            <a:schemeClr val="accent1">
+              <a:shade val="20000"/>
+            </a:schemeClr>
+          </a:lnRef>
+          <a:fillRef idx="1">
+            <a:schemeClr val="accent1"/>
+          </a:fillRef>
+          <a:effectRef idx="0">
+            <a:schemeClr val="accent1"/>
+          </a:effectRef>
+          <a:fontRef idx="minor">
+            <a:schemeClr val="lt1"/>
+          </a:fontRef>
+        </p:style>
+        <p:txBody>
+          <a:bodyPr anchor="ctr"/>
+          <a:p>
+            <a:pPr lvl="0" algn="ctr">
+              <a:defRPr/>
+            </a:pPr>
+            <a:endParaRPr lang="ko-KR" altLang="en-US"/>
+          </a:p>
+        </p:txBody>
+      </p:sp>
+      <p:sp>
+        <p:nvSpPr>
+          <p:cNvPr id="17" name="가로 글상자 16"/>
+          <p:cNvSpPr txBox="1"/>
+          <p:nvPr/>
+        </p:nvSpPr>
+        <p:spPr>
+          <a:xfrm>
+            <a:off x="6734378" y="1584798"/>
+            <a:ext cx="5228616" cy="2013747"/>
+          </a:xfrm>
+          <a:prstGeom prst="rect">
+            <a:avLst/>
+          </a:prstGeom>
+        </p:spPr>
+        <p:txBody>
+          <a:bodyPr wrap="square">
+            <a:spAutoFit/>
+          </a:bodyPr>
+          <a:p>
+            <a:pPr lvl="0">
+              <a:defRPr/>
+            </a:pPr>
+            <a:r>
+              <a:rPr lang="ko-KR" altLang="en-US"/>
+              <a:t>화면</a:t>
+            </a:r>
+            <a:r>
+              <a:rPr lang="en-US" altLang="ko-KR"/>
+              <a:t>ID :</a:t>
+            </a:r>
+            <a:r>
+              <a:rPr lang="ko-KR" altLang="en-US"/>
+              <a:t> </a:t>
+            </a:r>
+            <a:r>
+              <a:rPr lang="en-US" altLang="ko-KR"/>
+              <a:t>SCR-009</a:t>
+            </a:r>
+            <a:endParaRPr lang="en-US" altLang="ko-KR"/>
+          </a:p>
+          <a:p>
+            <a:pPr lvl="0">
+              <a:defRPr/>
+            </a:pPr>
+            <a:endParaRPr lang="ko-KR" altLang="en-US"/>
+          </a:p>
+          <a:p>
+            <a:pPr lvl="0">
+              <a:defRPr/>
+            </a:pPr>
+            <a:r>
+              <a:rPr lang="ko-KR" altLang="en-US"/>
+              <a:t>기능</a:t>
+            </a:r>
+            <a:endParaRPr lang="ko-KR" altLang="en-US"/>
+          </a:p>
+          <a:p>
+            <a:pPr lvl="0">
+              <a:defRPr/>
+            </a:pPr>
+            <a:r>
+              <a:rPr lang="en-US" altLang="ko-KR"/>
+              <a:t>-</a:t>
+            </a:r>
+            <a:r>
+              <a:rPr lang="ko-KR" altLang="en-US"/>
+              <a:t> 공지사항 클릭시 상세 페이지로 이동</a:t>
+            </a:r>
+            <a:endParaRPr lang="ko-KR" altLang="en-US"/>
+          </a:p>
+          <a:p>
+            <a:pPr lvl="0">
+              <a:defRPr/>
+            </a:pPr>
+            <a:r>
+              <a:rPr lang="en-US" altLang="ko-KR"/>
+              <a:t>-</a:t>
+            </a:r>
+            <a:r>
+              <a:rPr lang="ko-KR" altLang="en-US"/>
+              <a:t> 페이징 버튼</a:t>
+            </a:r>
+            <a:endParaRPr lang="ko-KR" altLang="en-US"/>
+          </a:p>
+          <a:p>
+            <a:pPr lvl="0">
+              <a:defRPr/>
+            </a:pPr>
+            <a:endParaRPr lang="ko-KR" altLang="en-US"/>
+          </a:p>
+          <a:p>
+            <a:pPr lvl="0">
+              <a:defRPr/>
+            </a:pPr>
+            <a:endParaRPr lang="ko-KR" altLang="en-US"/>
+          </a:p>
+        </p:txBody>
+      </p:sp>
+      <p:sp>
+        <p:nvSpPr>
+          <p:cNvPr id="39" name="가로 글상자 38"/>
+          <p:cNvSpPr txBox="1"/>
+          <p:nvPr/>
+        </p:nvSpPr>
+        <p:spPr>
+          <a:xfrm>
+            <a:off x="372018" y="1584798"/>
+            <a:ext cx="5936774" cy="365922"/>
+          </a:xfrm>
+          <a:prstGeom prst="rect">
+            <a:avLst/>
+          </a:prstGeom>
+          <a:ln>
+            <a:solidFill>
+              <a:schemeClr val="dk1"/>
+            </a:solidFill>
+          </a:ln>
+        </p:spPr>
+        <p:txBody>
+          <a:bodyPr wrap="square">
+            <a:spAutoFit/>
+          </a:bodyPr>
+          <a:lstStyle/>
+          <a:p>
+            <a:pPr lvl="0">
+              <a:defRPr/>
+            </a:pPr>
+            <a:r>
+              <a:rPr lang="en-US" altLang="ko-KR"/>
+              <a:t> </a:t>
+            </a:r>
+            <a:r>
+              <a:rPr lang="ko-KR" altLang="en-US"/>
+              <a:t>위드유      </a:t>
+            </a:r>
+            <a:r>
+              <a:rPr lang="ko-KR" altLang="en-US" sz="1400"/>
+              <a:t>소개 </a:t>
+            </a:r>
+            <a:r>
+              <a:rPr lang="en-US" altLang="ko-KR" sz="1400"/>
+              <a:t>|</a:t>
+            </a:r>
+            <a:r>
+              <a:rPr lang="ko-KR" altLang="en-US" sz="1400"/>
+              <a:t> 수업 </a:t>
+            </a:r>
+            <a:r>
+              <a:rPr lang="en-US" altLang="ko-KR" sz="1400"/>
+              <a:t>|</a:t>
+            </a:r>
+            <a:r>
+              <a:rPr lang="ko-KR" altLang="en-US" sz="1400"/>
+              <a:t> 시험 </a:t>
+            </a:r>
+            <a:r>
+              <a:rPr lang="en-US" altLang="ko-KR" sz="1400"/>
+              <a:t>|</a:t>
+            </a:r>
+            <a:r>
+              <a:rPr lang="ko-KR" altLang="en-US" sz="1400"/>
+              <a:t> 공지사항</a:t>
+            </a:r>
+            <a:r>
+              <a:rPr lang="en-US" altLang="ko-KR" sz="1400"/>
+              <a:t> </a:t>
+            </a:r>
+            <a:r>
+              <a:rPr lang="ko-KR" altLang="en-US" sz="1400"/>
+              <a:t>        아이디</a:t>
+            </a:r>
+            <a:r>
+              <a:rPr lang="en-US" altLang="ko-KR" sz="1400"/>
+              <a:t>|</a:t>
+            </a:r>
+            <a:r>
+              <a:rPr lang="ko-KR" altLang="en-US" sz="1400"/>
+              <a:t>로그인</a:t>
+            </a:r>
+            <a:endParaRPr lang="ko-KR" altLang="en-US" sz="1400"/>
+          </a:p>
+        </p:txBody>
+      </p:sp>
+      <p:sp>
+        <p:nvSpPr>
+          <p:cNvPr id="52" name="직사각형 51"/>
+          <p:cNvSpPr/>
+          <p:nvPr/>
+        </p:nvSpPr>
+        <p:spPr>
+          <a:xfrm>
+            <a:off x="1506912" y="2324505"/>
+            <a:ext cx="3666986" cy="3698537"/>
+          </a:xfrm>
+          <a:prstGeom prst="rect">
+            <a:avLst/>
+          </a:prstGeom>
+          <a:solidFill>
+            <a:schemeClr val="lt1"/>
+          </a:solidFill>
+          <a:ln>
+            <a:solidFill>
+              <a:schemeClr val="dk1"/>
+            </a:solidFill>
+          </a:ln>
+        </p:spPr>
+        <p:style>
+          <a:lnRef idx="2">
+            <a:schemeClr val="accent1">
+              <a:shade val="20000"/>
+            </a:schemeClr>
+          </a:lnRef>
+          <a:fillRef idx="1">
+            <a:schemeClr val="accent1"/>
+          </a:fillRef>
+          <a:effectRef idx="0">
+            <a:schemeClr val="accent1"/>
+          </a:effectRef>
+          <a:fontRef idx="minor">
+            <a:schemeClr val="lt1"/>
+          </a:fontRef>
+        </p:style>
+        <p:txBody>
+          <a:bodyPr anchor="ctr"/>
+          <a:p>
+            <a:pPr lvl="0" algn="ctr">
+              <a:defRPr/>
+            </a:pPr>
+            <a:endParaRPr lang="ko-KR" altLang="en-US">
+              <a:ln w="9525">
+                <a:solidFill>
+                  <a:schemeClr val="dk1"/>
+                </a:solidFill>
+              </a:ln>
+              <a:solidFill>
+                <a:schemeClr val="dk1"/>
+              </a:solidFill>
+            </a:endParaRPr>
+          </a:p>
+        </p:txBody>
+      </p:sp>
+      <p:sp>
+        <p:nvSpPr>
+          <p:cNvPr id="53" name="가로 글상자 52"/>
+          <p:cNvSpPr txBox="1"/>
+          <p:nvPr/>
+        </p:nvSpPr>
+        <p:spPr>
+          <a:xfrm>
+            <a:off x="1506912" y="2324505"/>
+            <a:ext cx="3666986" cy="3645765"/>
+          </a:xfrm>
+          <a:prstGeom prst="rect">
+            <a:avLst/>
+          </a:prstGeom>
+        </p:spPr>
+        <p:txBody>
+          <a:bodyPr wrap="square">
+            <a:spAutoFit/>
+          </a:bodyPr>
+          <a:p>
+            <a:pPr lvl="0" algn="ctr">
+              <a:defRPr/>
+            </a:pPr>
+            <a:r>
+              <a:rPr lang="ko-KR" altLang="en-US"/>
+              <a:t>공지사항</a:t>
+            </a:r>
+            <a:endParaRPr lang="ko-KR" altLang="en-US"/>
+          </a:p>
+          <a:p>
+            <a:pPr lvl="0">
+              <a:defRPr/>
+            </a:pPr>
+            <a:endParaRPr lang="ko-KR" altLang="en-US"/>
+          </a:p>
+          <a:p>
+            <a:pPr lvl="0">
+              <a:defRPr/>
+            </a:pPr>
+            <a:r>
+              <a:rPr lang="en-US" altLang="ko-KR"/>
+              <a:t>1.</a:t>
+            </a:r>
+            <a:r>
+              <a:rPr lang="ko-KR" altLang="en-US"/>
+              <a:t> 공지사항</a:t>
+            </a:r>
+            <a:r>
+              <a:rPr lang="en-US" altLang="ko-KR"/>
+              <a:t>1</a:t>
+            </a:r>
+            <a:endParaRPr lang="en-US" altLang="ko-KR"/>
+          </a:p>
+          <a:p>
+            <a:pPr lvl="0">
+              <a:defRPr/>
+            </a:pPr>
+            <a:r>
+              <a:rPr lang="en-US" altLang="ko-KR"/>
+              <a:t>2.</a:t>
+            </a:r>
+            <a:r>
+              <a:rPr lang="ko-KR" altLang="en-US"/>
+              <a:t> 공지사항</a:t>
+            </a:r>
+            <a:r>
+              <a:rPr lang="en-US" altLang="ko-KR"/>
+              <a:t>2</a:t>
+            </a:r>
+            <a:endParaRPr lang="en-US" altLang="ko-KR"/>
+          </a:p>
+          <a:p>
+            <a:pPr lvl="0">
+              <a:defRPr/>
+            </a:pPr>
+            <a:r>
+              <a:rPr lang="en-US" altLang="ko-KR"/>
+              <a:t>3.</a:t>
+            </a:r>
+            <a:r>
+              <a:rPr lang="ko-KR" altLang="en-US"/>
+              <a:t> 공지사항</a:t>
+            </a:r>
+            <a:r>
+              <a:rPr lang="en-US" altLang="ko-KR"/>
+              <a:t>3</a:t>
+            </a:r>
+            <a:endParaRPr lang="en-US" altLang="ko-KR"/>
+          </a:p>
+          <a:p>
+            <a:pPr lvl="0">
+              <a:defRPr/>
+            </a:pPr>
+            <a:r>
+              <a:rPr lang="en-US" altLang="ko-KR"/>
+              <a:t>4.</a:t>
+            </a:r>
+            <a:r>
+              <a:rPr lang="ko-KR" altLang="en-US"/>
+              <a:t> 공지사항</a:t>
+            </a:r>
+            <a:r>
+              <a:rPr lang="en-US" altLang="ko-KR"/>
+              <a:t>4</a:t>
+            </a:r>
+            <a:endParaRPr lang="en-US" altLang="ko-KR"/>
+          </a:p>
+          <a:p>
+            <a:pPr lvl="0">
+              <a:defRPr/>
+            </a:pPr>
+            <a:r>
+              <a:rPr lang="en-US" altLang="ko-KR"/>
+              <a:t>5.</a:t>
+            </a:r>
+            <a:r>
+              <a:rPr lang="ko-KR" altLang="en-US"/>
+              <a:t> 공지사항</a:t>
+            </a:r>
+            <a:r>
+              <a:rPr lang="en-US" altLang="ko-KR"/>
+              <a:t>5</a:t>
+            </a:r>
+            <a:endParaRPr lang="en-US" altLang="ko-KR"/>
+          </a:p>
+          <a:p>
+            <a:pPr lvl="0">
+              <a:defRPr/>
+            </a:pPr>
+            <a:r>
+              <a:rPr lang="en-US" altLang="ko-KR"/>
+              <a:t>6.</a:t>
+            </a:r>
+            <a:r>
+              <a:rPr lang="ko-KR" altLang="en-US"/>
+              <a:t> 공지사항</a:t>
+            </a:r>
+            <a:r>
+              <a:rPr lang="en-US" altLang="ko-KR"/>
+              <a:t>6</a:t>
+            </a:r>
+            <a:endParaRPr lang="en-US" altLang="ko-KR"/>
+          </a:p>
+          <a:p>
+            <a:pPr lvl="0">
+              <a:defRPr/>
+            </a:pPr>
+            <a:endParaRPr lang="ko-KR" altLang="en-US"/>
+          </a:p>
+          <a:p>
+            <a:pPr lvl="0">
+              <a:defRPr/>
+            </a:pPr>
+            <a:endParaRPr lang="ko-KR" altLang="en-US"/>
+          </a:p>
+          <a:p>
+            <a:pPr lvl="0">
+              <a:defRPr/>
+            </a:pPr>
+            <a:endParaRPr lang="ko-KR" altLang="en-US"/>
+          </a:p>
+          <a:p>
+            <a:pPr lvl="0">
+              <a:defRPr/>
+            </a:pPr>
+            <a:endParaRPr lang="ko-KR" altLang="en-US"/>
+          </a:p>
+          <a:p>
+            <a:pPr lvl="0">
+              <a:defRPr/>
+            </a:pPr>
+            <a:endParaRPr lang="ko-KR" altLang="en-US"/>
+          </a:p>
+        </p:txBody>
+      </p:sp>
+      <p:sp>
+        <p:nvSpPr>
+          <p:cNvPr id="54" name="가로 글상자 53"/>
+          <p:cNvSpPr txBox="1"/>
+          <p:nvPr/>
+        </p:nvSpPr>
+        <p:spPr>
+          <a:xfrm>
+            <a:off x="1506912" y="5657445"/>
+            <a:ext cx="3666986" cy="360450"/>
+          </a:xfrm>
+          <a:prstGeom prst="rect">
+            <a:avLst/>
+          </a:prstGeom>
+        </p:spPr>
+        <p:txBody>
+          <a:bodyPr wrap="square">
+            <a:spAutoFit/>
+          </a:bodyPr>
+          <a:p>
+            <a:pPr lvl="0" algn="ctr">
+              <a:defRPr/>
+            </a:pPr>
+            <a:r>
+              <a:rPr lang="en-US" altLang="ko-KR"/>
+              <a:t>1</a:t>
+            </a:r>
+            <a:r>
+              <a:rPr lang="ko-KR" altLang="en-US"/>
+              <a:t>  </a:t>
+            </a:r>
+            <a:r>
+              <a:rPr lang="en-US" altLang="ko-KR"/>
+              <a:t>2</a:t>
+            </a:r>
+            <a:r>
+              <a:rPr lang="ko-KR" altLang="en-US"/>
+              <a:t>  </a:t>
+            </a:r>
+            <a:r>
+              <a:rPr lang="en-US" altLang="ko-KR"/>
+              <a:t>3</a:t>
+            </a:r>
+            <a:r>
+              <a:rPr lang="ko-KR" altLang="en-US"/>
+              <a:t>  </a:t>
+            </a:r>
+            <a:r>
+              <a:rPr lang="en-US" altLang="ko-KR"/>
+              <a:t>4</a:t>
+            </a:r>
+            <a:r>
+              <a:rPr lang="ko-KR" altLang="en-US"/>
+              <a:t>  </a:t>
+            </a:r>
+            <a:r>
+              <a:rPr lang="en-US" altLang="ko-KR"/>
+              <a:t>5</a:t>
+            </a:r>
+            <a:r>
+              <a:rPr lang="ko-KR" altLang="en-US"/>
+              <a:t>  </a:t>
+            </a:r>
+            <a:r>
+              <a:rPr lang="en-US" altLang="ko-KR"/>
+              <a:t>6</a:t>
+            </a:r>
+            <a:r>
+              <a:rPr lang="ko-KR" altLang="en-US"/>
+              <a:t>  </a:t>
+            </a:r>
+            <a:r>
+              <a:rPr lang="en-US" altLang="ko-KR"/>
+              <a:t>7</a:t>
+            </a:r>
+            <a:r>
+              <a:rPr lang="ko-KR" altLang="en-US"/>
+              <a:t>  </a:t>
+            </a:r>
+            <a:r>
+              <a:rPr lang="en-US" altLang="ko-KR"/>
+              <a:t>8</a:t>
+            </a:r>
+            <a:r>
+              <a:rPr lang="ko-KR" altLang="en-US"/>
+              <a:t>  </a:t>
+            </a:r>
+            <a:r>
+              <a:rPr lang="en-US" altLang="ko-KR"/>
+              <a:t>9</a:t>
+            </a:r>
+            <a:r>
+              <a:rPr lang="ko-KR" altLang="en-US"/>
+              <a:t>  </a:t>
+            </a:r>
+            <a:r>
+              <a:rPr lang="en-US" altLang="ko-KR"/>
+              <a:t>10</a:t>
+            </a:r>
+            <a:endParaRPr lang="en-US" altLang="ko-KR"/>
+          </a:p>
+        </p:txBody>
+      </p:sp>
+    </p:spTree>
+    <p:extLst>
+      <p:ext uri="{BB962C8B-B14F-4D97-AF65-F5344CB8AC3E}">
+        <p14:creationId xmlns:p14="http://schemas.microsoft.com/office/powerpoint/2010/main" val="3633076715"/>
+      </p:ext>
+    </p:extLst>
+  </p:cSld>
+  <p:clrMapOvr>
+    <a:masterClrMapping/>
+  </p:clrMapOvr>
+</p:sld>
+</file>
+
+<file path=ppt/slides/slide11.xml><?xml version="1.0" encoding="utf-8"?>
+<p:sld xmlns:r="http://schemas.openxmlformats.org/officeDocument/2006/relationships" xmlns:c="http://schemas.openxmlformats.org/drawingml/2006/chart" xmlns:a="http://schemas.openxmlformats.org/drawingml/2006/main" xmlns:dgm="http://schemas.openxmlformats.org/drawingml/2006/diagram" xmlns:dsp="http://schemas.microsoft.com/office/drawing/2008/diagram" xmlns:p="http://schemas.openxmlformats.org/presentationml/2006/main">
+  <p:cSld>
+    <p:spTree>
+      <p:nvGrpSpPr>
+        <p:cNvPr id="1" name=""/>
+        <p:cNvGrpSpPr/>
+        <p:nvPr/>
+      </p:nvGrpSpPr>
+      <p:grpSpPr>
+        <a:xfrm>
+          <a:off x="0" y="0"/>
+          <a:ext cx="0" cy="0"/>
+          <a:chOff x="0" y="0"/>
+          <a:chExt cx="0" cy="0"/>
+        </a:xfrm>
+      </p:grpSpPr>
+      <p:sp>
+        <p:nvSpPr>
+          <p:cNvPr id="4" name="가로 글상자 3"/>
+          <p:cNvSpPr txBox="1"/>
+          <p:nvPr/>
+        </p:nvSpPr>
+        <p:spPr>
+          <a:xfrm>
+            <a:off x="372018" y="334386"/>
+            <a:ext cx="11138172" cy="498463"/>
+          </a:xfrm>
+          <a:prstGeom prst="rect">
+            <a:avLst/>
+          </a:prstGeom>
+        </p:spPr>
+        <p:txBody>
+          <a:bodyPr wrap="square">
+            <a:spAutoFit/>
+          </a:bodyPr>
+          <a:p>
+            <a:pPr lvl="0">
+              <a:defRPr/>
+            </a:pPr>
+            <a:r>
+              <a:rPr lang="ko-KR" altLang="en-US" sz="2700"/>
+              <a:t>문제 은행 화면</a:t>
+            </a:r>
+            <a:endParaRPr lang="ko-KR" altLang="en-US" sz="2700"/>
+          </a:p>
+        </p:txBody>
+      </p:sp>
+      <p:sp>
+        <p:nvSpPr>
+          <p:cNvPr id="8" name="직사각형 7"/>
+          <p:cNvSpPr/>
+          <p:nvPr/>
+        </p:nvSpPr>
+        <p:spPr>
+          <a:xfrm>
+            <a:off x="372018" y="1584798"/>
+            <a:ext cx="5936774" cy="5015824"/>
+          </a:xfrm>
+          <a:prstGeom prst="rect">
+            <a:avLst/>
+          </a:prstGeom>
+          <a:solidFill>
+            <a:schemeClr val="lt1"/>
+          </a:solidFill>
+          <a:ln>
+            <a:solidFill>
+              <a:srgbClr val="000000"/>
+            </a:solidFill>
+          </a:ln>
+        </p:spPr>
+        <p:style>
+          <a:lnRef idx="2">
+            <a:schemeClr val="accent1">
+              <a:shade val="20000"/>
+            </a:schemeClr>
+          </a:lnRef>
+          <a:fillRef idx="1">
+            <a:schemeClr val="accent1"/>
+          </a:fillRef>
+          <a:effectRef idx="0">
+            <a:schemeClr val="accent1"/>
+          </a:effectRef>
+          <a:fontRef idx="minor">
+            <a:schemeClr val="lt1"/>
+          </a:fontRef>
+        </p:style>
+        <p:txBody>
+          <a:bodyPr anchor="ctr"/>
+          <a:p>
+            <a:pPr lvl="0" algn="ctr">
+              <a:defRPr/>
+            </a:pPr>
+            <a:endParaRPr lang="ko-KR" altLang="en-US"/>
+          </a:p>
+        </p:txBody>
+      </p:sp>
+      <p:sp>
+        <p:nvSpPr>
+          <p:cNvPr id="17" name="가로 글상자 16"/>
+          <p:cNvSpPr txBox="1"/>
+          <p:nvPr/>
+        </p:nvSpPr>
+        <p:spPr>
+          <a:xfrm>
+            <a:off x="6734378" y="1584798"/>
+            <a:ext cx="5228616" cy="2013747"/>
+          </a:xfrm>
+          <a:prstGeom prst="rect">
+            <a:avLst/>
+          </a:prstGeom>
+        </p:spPr>
+        <p:txBody>
+          <a:bodyPr wrap="square">
+            <a:spAutoFit/>
+          </a:bodyPr>
+          <a:p>
+            <a:pPr lvl="0">
+              <a:defRPr/>
+            </a:pPr>
+            <a:r>
+              <a:rPr lang="ko-KR" altLang="en-US"/>
+              <a:t>화면</a:t>
+            </a:r>
+            <a:r>
+              <a:rPr lang="en-US" altLang="ko-KR"/>
+              <a:t>ID :</a:t>
+            </a:r>
+            <a:r>
+              <a:rPr lang="ko-KR" altLang="en-US"/>
+              <a:t> </a:t>
+            </a:r>
+            <a:r>
+              <a:rPr lang="en-US" altLang="ko-KR"/>
+              <a:t>SCR-010</a:t>
+            </a:r>
+            <a:endParaRPr lang="en-US" altLang="ko-KR"/>
+          </a:p>
+          <a:p>
+            <a:pPr lvl="0">
+              <a:defRPr/>
+            </a:pPr>
+            <a:endParaRPr lang="ko-KR" altLang="en-US"/>
+          </a:p>
+          <a:p>
+            <a:pPr lvl="0">
+              <a:defRPr/>
+            </a:pPr>
+            <a:r>
+              <a:rPr lang="ko-KR" altLang="en-US"/>
+              <a:t>기능</a:t>
+            </a:r>
+            <a:endParaRPr lang="ko-KR" altLang="en-US"/>
+          </a:p>
+          <a:p>
+            <a:pPr lvl="0">
+              <a:defRPr/>
+            </a:pPr>
+            <a:r>
+              <a:rPr lang="en-US" altLang="ko-KR"/>
+              <a:t>-</a:t>
+            </a:r>
+            <a:r>
+              <a:rPr lang="ko-KR" altLang="en-US"/>
+              <a:t> 문제 카테고리</a:t>
+            </a:r>
+            <a:r>
+              <a:rPr lang="en-US" altLang="ko-KR"/>
+              <a:t>,</a:t>
+            </a:r>
+            <a:r>
+              <a:rPr lang="ko-KR" altLang="en-US"/>
+              <a:t> 난이도</a:t>
+            </a:r>
+            <a:r>
+              <a:rPr lang="en-US" altLang="ko-KR"/>
+              <a:t>,</a:t>
+            </a:r>
+            <a:r>
+              <a:rPr lang="ko-KR" altLang="en-US"/>
+              <a:t> 유형 필터 기능</a:t>
+            </a:r>
+            <a:endParaRPr lang="ko-KR" altLang="en-US"/>
+          </a:p>
+          <a:p>
+            <a:pPr lvl="0">
+              <a:defRPr/>
+            </a:pPr>
+            <a:r>
+              <a:rPr lang="en-US" altLang="ko-KR"/>
+              <a:t>-</a:t>
+            </a:r>
+            <a:r>
+              <a:rPr lang="ko-KR" altLang="en-US"/>
+              <a:t> 검색 버튼</a:t>
+            </a:r>
+            <a:endParaRPr lang="ko-KR" altLang="en-US"/>
+          </a:p>
+          <a:p>
+            <a:pPr lvl="0">
+              <a:defRPr/>
+            </a:pPr>
+            <a:r>
+              <a:rPr lang="en-US" altLang="ko-KR"/>
+              <a:t>-</a:t>
+            </a:r>
+            <a:r>
+              <a:rPr lang="ko-KR" altLang="en-US"/>
+              <a:t> 페이징 버튼</a:t>
+            </a:r>
+            <a:endParaRPr lang="ko-KR" altLang="en-US"/>
+          </a:p>
+          <a:p>
+            <a:pPr lvl="0">
+              <a:defRPr/>
+            </a:pPr>
+            <a:endParaRPr lang="ko-KR" altLang="en-US"/>
+          </a:p>
+        </p:txBody>
+      </p:sp>
+      <p:sp>
+        <p:nvSpPr>
+          <p:cNvPr id="39" name="가로 글상자 38"/>
+          <p:cNvSpPr txBox="1"/>
+          <p:nvPr/>
+        </p:nvSpPr>
+        <p:spPr>
+          <a:xfrm>
+            <a:off x="372018" y="1584798"/>
+            <a:ext cx="5936774" cy="365922"/>
+          </a:xfrm>
+          <a:prstGeom prst="rect">
+            <a:avLst/>
+          </a:prstGeom>
+          <a:ln>
+            <a:solidFill>
+              <a:schemeClr val="dk1"/>
+            </a:solidFill>
+          </a:ln>
+        </p:spPr>
+        <p:txBody>
+          <a:bodyPr wrap="square">
+            <a:spAutoFit/>
+          </a:bodyPr>
+          <a:lstStyle/>
+          <a:p>
+            <a:pPr lvl="0">
+              <a:defRPr/>
+            </a:pPr>
+            <a:r>
+              <a:rPr lang="en-US" altLang="ko-KR"/>
+              <a:t> </a:t>
+            </a:r>
+            <a:r>
+              <a:rPr lang="ko-KR" altLang="en-US"/>
+              <a:t>위드유      </a:t>
+            </a:r>
+            <a:r>
+              <a:rPr lang="ko-KR" altLang="en-US" sz="1400"/>
+              <a:t>소개 </a:t>
+            </a:r>
+            <a:r>
+              <a:rPr lang="en-US" altLang="ko-KR" sz="1400"/>
+              <a:t>|</a:t>
+            </a:r>
+            <a:r>
+              <a:rPr lang="ko-KR" altLang="en-US" sz="1400"/>
+              <a:t> 수업 </a:t>
+            </a:r>
+            <a:r>
+              <a:rPr lang="en-US" altLang="ko-KR" sz="1400"/>
+              <a:t>|</a:t>
+            </a:r>
+            <a:r>
+              <a:rPr lang="ko-KR" altLang="en-US" sz="1400"/>
+              <a:t> 시험 </a:t>
+            </a:r>
+            <a:r>
+              <a:rPr lang="en-US" altLang="ko-KR" sz="1400"/>
+              <a:t>|</a:t>
+            </a:r>
+            <a:r>
+              <a:rPr lang="ko-KR" altLang="en-US" sz="1400"/>
+              <a:t> 공지사항</a:t>
+            </a:r>
+            <a:r>
+              <a:rPr lang="en-US" altLang="ko-KR" sz="1400"/>
+              <a:t> </a:t>
+            </a:r>
+            <a:r>
+              <a:rPr lang="ko-KR" altLang="en-US" sz="1400"/>
+              <a:t>        아이디</a:t>
+            </a:r>
+            <a:r>
+              <a:rPr lang="en-US" altLang="ko-KR" sz="1400"/>
+              <a:t>|</a:t>
+            </a:r>
+            <a:r>
+              <a:rPr lang="ko-KR" altLang="en-US" sz="1400"/>
+              <a:t>로그인</a:t>
+            </a:r>
+            <a:endParaRPr lang="ko-KR" altLang="en-US" sz="1400"/>
+          </a:p>
+        </p:txBody>
+      </p:sp>
+      <p:sp>
+        <p:nvSpPr>
+          <p:cNvPr id="52" name="직사각형 51"/>
+          <p:cNvSpPr/>
+          <p:nvPr/>
+        </p:nvSpPr>
+        <p:spPr>
+          <a:xfrm>
+            <a:off x="1506912" y="2324505"/>
+            <a:ext cx="3666986" cy="3698537"/>
+          </a:xfrm>
+          <a:prstGeom prst="rect">
+            <a:avLst/>
+          </a:prstGeom>
+          <a:solidFill>
+            <a:schemeClr val="lt1"/>
+          </a:solidFill>
+          <a:ln>
+            <a:solidFill>
+              <a:schemeClr val="dk1"/>
+            </a:solidFill>
+          </a:ln>
+        </p:spPr>
+        <p:style>
+          <a:lnRef idx="2">
+            <a:schemeClr val="accent1">
+              <a:shade val="20000"/>
+            </a:schemeClr>
+          </a:lnRef>
+          <a:fillRef idx="1">
+            <a:schemeClr val="accent1"/>
+          </a:fillRef>
+          <a:effectRef idx="0">
+            <a:schemeClr val="accent1"/>
+          </a:effectRef>
+          <a:fontRef idx="minor">
+            <a:schemeClr val="lt1"/>
+          </a:fontRef>
+        </p:style>
+        <p:txBody>
+          <a:bodyPr anchor="ctr"/>
+          <a:p>
+            <a:pPr lvl="0" algn="ctr">
+              <a:defRPr/>
+            </a:pPr>
+            <a:endParaRPr lang="ko-KR" altLang="en-US">
+              <a:ln w="9525">
+                <a:solidFill>
+                  <a:schemeClr val="dk1"/>
+                </a:solidFill>
+              </a:ln>
+              <a:solidFill>
+                <a:schemeClr val="dk1"/>
+              </a:solidFill>
+            </a:endParaRPr>
+          </a:p>
+        </p:txBody>
+      </p:sp>
+      <p:sp>
+        <p:nvSpPr>
+          <p:cNvPr id="53" name="가로 글상자 52"/>
+          <p:cNvSpPr txBox="1"/>
+          <p:nvPr/>
+        </p:nvSpPr>
+        <p:spPr>
+          <a:xfrm>
+            <a:off x="1506912" y="2324505"/>
+            <a:ext cx="3666986" cy="3102840"/>
+          </a:xfrm>
+          <a:prstGeom prst="rect">
+            <a:avLst/>
+          </a:prstGeom>
+        </p:spPr>
+        <p:txBody>
+          <a:bodyPr wrap="square">
+            <a:spAutoFit/>
+          </a:bodyPr>
+          <a:p>
+            <a:pPr lvl="0" algn="ctr">
+              <a:defRPr/>
+            </a:pPr>
+            <a:r>
+              <a:rPr lang="ko-KR" altLang="en-US"/>
+              <a:t>문제 은행</a:t>
+            </a:r>
+            <a:endParaRPr lang="ko-KR" altLang="en-US"/>
+          </a:p>
+          <a:p>
+            <a:pPr lvl="0">
+              <a:defRPr/>
+            </a:pPr>
+            <a:endParaRPr lang="ko-KR" altLang="en-US"/>
+          </a:p>
+          <a:p>
+            <a:pPr lvl="0">
+              <a:defRPr/>
+            </a:pPr>
+            <a:r>
+              <a:rPr lang="ko-KR" altLang="en-US"/>
+              <a:t>                        검색 입력           검색</a:t>
+            </a:r>
+            <a:endParaRPr lang="ko-KR" altLang="en-US"/>
+          </a:p>
+          <a:p>
+            <a:pPr lvl="0">
+              <a:defRPr/>
+            </a:pPr>
+            <a:r>
+              <a:rPr lang="ko-KR" altLang="en-US"/>
+              <a:t>     문제카테고리    난이도    유형</a:t>
+            </a:r>
+            <a:endParaRPr lang="ko-KR" altLang="en-US"/>
+          </a:p>
+          <a:p>
+            <a:pPr lvl="0">
+              <a:defRPr/>
+            </a:pPr>
+            <a:endParaRPr lang="ko-KR" altLang="en-US"/>
+          </a:p>
+          <a:p>
+            <a:pPr lvl="0">
+              <a:defRPr/>
+            </a:pPr>
+            <a:r>
+              <a:rPr lang="en-US" altLang="ko-KR"/>
+              <a:t>1.</a:t>
+            </a:r>
+            <a:r>
+              <a:rPr lang="ko-KR" altLang="en-US"/>
+              <a:t> 문제 </a:t>
+            </a:r>
+            <a:r>
+              <a:rPr lang="en-US" altLang="ko-KR"/>
+              <a:t>1</a:t>
+            </a:r>
+            <a:endParaRPr lang="en-US" altLang="ko-KR"/>
+          </a:p>
+          <a:p>
+            <a:pPr lvl="0">
+              <a:defRPr/>
+            </a:pPr>
+            <a:r>
+              <a:rPr lang="en-US" altLang="ko-KR"/>
+              <a:t>2.</a:t>
+            </a:r>
+            <a:r>
+              <a:rPr lang="ko-KR" altLang="en-US"/>
+              <a:t> 문제 </a:t>
+            </a:r>
+            <a:r>
+              <a:rPr lang="en-US" altLang="ko-KR"/>
+              <a:t>2</a:t>
+            </a:r>
+            <a:endParaRPr lang="en-US" altLang="ko-KR"/>
+          </a:p>
+          <a:p>
+            <a:pPr lvl="0">
+              <a:defRPr/>
+            </a:pPr>
+            <a:r>
+              <a:rPr lang="en-US" altLang="ko-KR"/>
+              <a:t>3.</a:t>
+            </a:r>
+            <a:r>
+              <a:rPr lang="ko-KR" altLang="en-US"/>
+              <a:t> 문제 </a:t>
+            </a:r>
+            <a:r>
+              <a:rPr lang="en-US" altLang="ko-KR"/>
+              <a:t>3</a:t>
+            </a:r>
+            <a:endParaRPr lang="en-US" altLang="ko-KR"/>
+          </a:p>
+          <a:p>
+            <a:pPr lvl="0">
+              <a:defRPr/>
+            </a:pPr>
+            <a:endParaRPr lang="ko-KR" altLang="en-US"/>
+          </a:p>
+          <a:p>
+            <a:pPr lvl="0">
+              <a:defRPr/>
+            </a:pPr>
+            <a:endParaRPr lang="ko-KR" altLang="en-US"/>
+          </a:p>
+          <a:p>
+            <a:pPr lvl="0">
+              <a:defRPr/>
+            </a:pPr>
+            <a:endParaRPr lang="ko-KR" altLang="en-US"/>
+          </a:p>
+        </p:txBody>
+      </p:sp>
+      <p:sp>
+        <p:nvSpPr>
+          <p:cNvPr id="54" name="가로 글상자 53"/>
+          <p:cNvSpPr txBox="1"/>
+          <p:nvPr/>
+        </p:nvSpPr>
+        <p:spPr>
+          <a:xfrm>
+            <a:off x="1506912" y="5657445"/>
+            <a:ext cx="3666986" cy="360450"/>
+          </a:xfrm>
+          <a:prstGeom prst="rect">
+            <a:avLst/>
+          </a:prstGeom>
+        </p:spPr>
+        <p:txBody>
+          <a:bodyPr wrap="square">
+            <a:spAutoFit/>
+          </a:bodyPr>
+          <a:p>
+            <a:pPr lvl="0" algn="ctr">
+              <a:defRPr/>
+            </a:pPr>
+            <a:r>
+              <a:rPr lang="en-US" altLang="ko-KR"/>
+              <a:t>1</a:t>
+            </a:r>
+            <a:r>
+              <a:rPr lang="ko-KR" altLang="en-US"/>
+              <a:t>  </a:t>
+            </a:r>
+            <a:r>
+              <a:rPr lang="en-US" altLang="ko-KR"/>
+              <a:t>2</a:t>
+            </a:r>
+            <a:r>
+              <a:rPr lang="ko-KR" altLang="en-US"/>
+              <a:t>  </a:t>
+            </a:r>
+            <a:r>
+              <a:rPr lang="en-US" altLang="ko-KR"/>
+              <a:t>3</a:t>
+            </a:r>
+            <a:r>
+              <a:rPr lang="ko-KR" altLang="en-US"/>
+              <a:t>  </a:t>
+            </a:r>
+            <a:r>
+              <a:rPr lang="en-US" altLang="ko-KR"/>
+              <a:t>4</a:t>
+            </a:r>
+            <a:r>
+              <a:rPr lang="ko-KR" altLang="en-US"/>
+              <a:t>  </a:t>
+            </a:r>
+            <a:r>
+              <a:rPr lang="en-US" altLang="ko-KR"/>
+              <a:t>5</a:t>
+            </a:r>
+            <a:r>
+              <a:rPr lang="ko-KR" altLang="en-US"/>
+              <a:t>  </a:t>
+            </a:r>
+            <a:r>
+              <a:rPr lang="en-US" altLang="ko-KR"/>
+              <a:t>6</a:t>
+            </a:r>
+            <a:r>
+              <a:rPr lang="ko-KR" altLang="en-US"/>
+              <a:t>  </a:t>
+            </a:r>
+            <a:r>
+              <a:rPr lang="en-US" altLang="ko-KR"/>
+              <a:t>7</a:t>
+            </a:r>
+            <a:r>
+              <a:rPr lang="ko-KR" altLang="en-US"/>
+              <a:t>  </a:t>
+            </a:r>
+            <a:r>
+              <a:rPr lang="en-US" altLang="ko-KR"/>
+              <a:t>8</a:t>
+            </a:r>
+            <a:r>
+              <a:rPr lang="ko-KR" altLang="en-US"/>
+              <a:t>  </a:t>
+            </a:r>
+            <a:r>
+              <a:rPr lang="en-US" altLang="ko-KR"/>
+              <a:t>9</a:t>
+            </a:r>
+            <a:r>
+              <a:rPr lang="ko-KR" altLang="en-US"/>
+              <a:t>  </a:t>
+            </a:r>
+            <a:r>
+              <a:rPr lang="en-US" altLang="ko-KR"/>
+              <a:t>10</a:t>
+            </a:r>
+            <a:endParaRPr lang="en-US" altLang="ko-KR"/>
+          </a:p>
+        </p:txBody>
+      </p:sp>
+    </p:spTree>
+    <p:extLst>
+      <p:ext uri="{BB962C8B-B14F-4D97-AF65-F5344CB8AC3E}">
+        <p14:creationId xmlns:p14="http://schemas.microsoft.com/office/powerpoint/2010/main" val="717971648"/>
+      </p:ext>
+    </p:extLst>
+  </p:cSld>
+  <p:clrMapOvr>
+    <a:masterClrMapping/>
+  </p:clrMapOvr>
+</p:sld>
+</file>
+
 <file path=ppt/slides/slide2.xml><?xml version="1.0" encoding="utf-8"?>
 <p:sld xmlns:r="http://schemas.openxmlformats.org/officeDocument/2006/relationships" xmlns:c="http://schemas.openxmlformats.org/drawingml/2006/chart" xmlns:a="http://schemas.openxmlformats.org/drawingml/2006/main" xmlns:dgm="http://schemas.openxmlformats.org/drawingml/2006/diagram" xmlns:dsp="http://schemas.microsoft.com/office/drawing/2008/diagram" xmlns:p="http://schemas.openxmlformats.org/presentationml/2006/main">
   <p:cSld>
@@ -7298,7 +8544,7 @@
             </a:pPr>
             <a:r>
               <a:rPr lang="ko-KR" altLang="en-US" sz="2700"/>
-              <a:t>수업 화면</a:t>
+              <a:t>수업 소개 화면</a:t>
             </a:r>
             <a:endParaRPr lang="ko-KR" altLang="en-US" sz="2700"/>
           </a:p>
@@ -7600,58 +8846,471 @@
       </p:grpSpPr>
       <p:sp>
         <p:nvSpPr>
-          <p:cNvPr id="2" name="제목 1"/>
-          <p:cNvSpPr>
-            <a:spLocks noGrp="1"/>
-          </p:cNvSpPr>
-          <p:nvPr>
-            <p:ph type="title" idx="0"/>
-          </p:nvPr>
-        </p:nvSpPr>
-        <p:spPr/>
-        <p:txBody>
-          <a:bodyPr/>
-          <a:p>
-            <a:pPr lvl="0">
-              <a:defRPr/>
-            </a:pPr>
-            <a:r>
-              <a:rPr lang="ko-KR" altLang="en-US"/>
-              <a:t/>
-            </a:r>
-            <a:endParaRPr lang="ko-KR" altLang="en-US"/>
-          </a:p>
-        </p:txBody>
-      </p:sp>
-      <p:sp>
-        <p:nvSpPr>
-          <p:cNvPr id="3" name="내용 개체 틀 2"/>
-          <p:cNvSpPr>
-            <a:spLocks noGrp="1"/>
-          </p:cNvSpPr>
-          <p:nvPr>
-            <p:ph idx="1"/>
-          </p:nvPr>
-        </p:nvSpPr>
-        <p:spPr/>
-        <p:txBody>
-          <a:bodyPr/>
-          <a:p>
-            <a:pPr lvl="0">
-              <a:defRPr/>
-            </a:pPr>
-            <a:r>
-              <a:rPr lang="ko-KR" altLang="en-US"/>
-              <a:t/>
-            </a:r>
-            <a:endParaRPr lang="ko-KR" altLang="en-US"/>
+          <p:cNvPr id="4" name="가로 글상자 3"/>
+          <p:cNvSpPr txBox="1"/>
+          <p:nvPr/>
+        </p:nvSpPr>
+        <p:spPr>
+          <a:xfrm>
+            <a:off x="372018" y="334386"/>
+            <a:ext cx="11138172" cy="498463"/>
+          </a:xfrm>
+          <a:prstGeom prst="rect">
+            <a:avLst/>
+          </a:prstGeom>
+        </p:spPr>
+        <p:txBody>
+          <a:bodyPr wrap="square">
+            <a:spAutoFit/>
+          </a:bodyPr>
+          <a:p>
+            <a:pPr lvl="0">
+              <a:defRPr/>
+            </a:pPr>
+            <a:r>
+              <a:rPr lang="ko-KR" altLang="en-US" sz="2700"/>
+              <a:t>시험 화면</a:t>
+            </a:r>
+            <a:endParaRPr lang="ko-KR" altLang="en-US" sz="2700"/>
+          </a:p>
+        </p:txBody>
+      </p:sp>
+      <p:sp>
+        <p:nvSpPr>
+          <p:cNvPr id="8" name="직사각형 7"/>
+          <p:cNvSpPr/>
+          <p:nvPr/>
+        </p:nvSpPr>
+        <p:spPr>
+          <a:xfrm>
+            <a:off x="372018" y="1584798"/>
+            <a:ext cx="5936774" cy="5015824"/>
+          </a:xfrm>
+          <a:prstGeom prst="rect">
+            <a:avLst/>
+          </a:prstGeom>
+          <a:solidFill>
+            <a:schemeClr val="lt1"/>
+          </a:solidFill>
+          <a:ln>
+            <a:solidFill>
+              <a:srgbClr val="000000"/>
+            </a:solidFill>
+          </a:ln>
+        </p:spPr>
+        <p:style>
+          <a:lnRef idx="2">
+            <a:schemeClr val="accent1">
+              <a:shade val="20000"/>
+            </a:schemeClr>
+          </a:lnRef>
+          <a:fillRef idx="1">
+            <a:schemeClr val="accent1"/>
+          </a:fillRef>
+          <a:effectRef idx="0">
+            <a:schemeClr val="accent1"/>
+          </a:effectRef>
+          <a:fontRef idx="minor">
+            <a:schemeClr val="lt1"/>
+          </a:fontRef>
+        </p:style>
+        <p:txBody>
+          <a:bodyPr anchor="ctr"/>
+          <a:p>
+            <a:pPr lvl="0" algn="ctr">
+              <a:defRPr/>
+            </a:pPr>
+            <a:endParaRPr lang="ko-KR" altLang="en-US"/>
+          </a:p>
+        </p:txBody>
+      </p:sp>
+      <p:sp>
+        <p:nvSpPr>
+          <p:cNvPr id="17" name="가로 글상자 16"/>
+          <p:cNvSpPr txBox="1"/>
+          <p:nvPr/>
+        </p:nvSpPr>
+        <p:spPr>
+          <a:xfrm>
+            <a:off x="6734378" y="1584798"/>
+            <a:ext cx="5228616" cy="2013747"/>
+          </a:xfrm>
+          <a:prstGeom prst="rect">
+            <a:avLst/>
+          </a:prstGeom>
+        </p:spPr>
+        <p:txBody>
+          <a:bodyPr wrap="square">
+            <a:spAutoFit/>
+          </a:bodyPr>
+          <a:p>
+            <a:pPr lvl="0">
+              <a:defRPr/>
+            </a:pPr>
+            <a:r>
+              <a:rPr lang="ko-KR" altLang="en-US"/>
+              <a:t>화면</a:t>
+            </a:r>
+            <a:r>
+              <a:rPr lang="en-US" altLang="ko-KR"/>
+              <a:t>ID :</a:t>
+            </a:r>
+            <a:r>
+              <a:rPr lang="ko-KR" altLang="en-US"/>
+              <a:t> </a:t>
+            </a:r>
+            <a:r>
+              <a:rPr lang="en-US" altLang="ko-KR"/>
+              <a:t>SCR-008</a:t>
+            </a:r>
+            <a:endParaRPr lang="en-US" altLang="ko-KR"/>
+          </a:p>
+          <a:p>
+            <a:pPr lvl="0">
+              <a:defRPr/>
+            </a:pPr>
+            <a:endParaRPr lang="ko-KR" altLang="en-US"/>
+          </a:p>
+          <a:p>
+            <a:pPr lvl="0">
+              <a:defRPr/>
+            </a:pPr>
+            <a:r>
+              <a:rPr lang="ko-KR" altLang="en-US"/>
+              <a:t>기능</a:t>
+            </a:r>
+            <a:endParaRPr lang="ko-KR" altLang="en-US"/>
+          </a:p>
+          <a:p>
+            <a:pPr lvl="0">
+              <a:defRPr/>
+            </a:pPr>
+            <a:r>
+              <a:rPr lang="en-US" altLang="ko-KR"/>
+              <a:t>-</a:t>
+            </a:r>
+            <a:r>
+              <a:rPr lang="ko-KR" altLang="en-US"/>
+              <a:t> 선생님이 설정한 시간 카운트</a:t>
+            </a:r>
+            <a:endParaRPr lang="ko-KR" altLang="en-US"/>
+          </a:p>
+          <a:p>
+            <a:pPr lvl="0">
+              <a:defRPr/>
+            </a:pPr>
+            <a:r>
+              <a:rPr lang="en-US" altLang="ko-KR"/>
+              <a:t>-</a:t>
+            </a:r>
+            <a:r>
+              <a:rPr lang="ko-KR" altLang="en-US"/>
+              <a:t> 답안 제출 버튼</a:t>
+            </a:r>
+            <a:endParaRPr lang="ko-KR" altLang="en-US"/>
+          </a:p>
+          <a:p>
+            <a:pPr lvl="0">
+              <a:defRPr/>
+            </a:pPr>
+            <a:endParaRPr lang="ko-KR" altLang="en-US"/>
+          </a:p>
+          <a:p>
+            <a:pPr lvl="0">
+              <a:defRPr/>
+            </a:pPr>
+            <a:endParaRPr lang="ko-KR" altLang="en-US"/>
+          </a:p>
+        </p:txBody>
+      </p:sp>
+      <p:sp>
+        <p:nvSpPr>
+          <p:cNvPr id="52" name="직사각형 51"/>
+          <p:cNvSpPr/>
+          <p:nvPr/>
+        </p:nvSpPr>
+        <p:spPr>
+          <a:xfrm>
+            <a:off x="372018" y="1584798"/>
+            <a:ext cx="5936774" cy="606844"/>
+          </a:xfrm>
+          <a:prstGeom prst="rect">
+            <a:avLst/>
+          </a:prstGeom>
+          <a:solidFill>
+            <a:schemeClr val="lt1"/>
+          </a:solidFill>
+          <a:ln>
+            <a:solidFill>
+              <a:schemeClr val="dk1"/>
+            </a:solidFill>
+          </a:ln>
+        </p:spPr>
+        <p:style>
+          <a:lnRef idx="2">
+            <a:schemeClr val="accent1">
+              <a:shade val="20000"/>
+            </a:schemeClr>
+          </a:lnRef>
+          <a:fillRef idx="1">
+            <a:schemeClr val="accent1"/>
+          </a:fillRef>
+          <a:effectRef idx="0">
+            <a:schemeClr val="accent1"/>
+          </a:effectRef>
+          <a:fontRef idx="minor">
+            <a:schemeClr val="lt1"/>
+          </a:fontRef>
+        </p:style>
+        <p:txBody>
+          <a:bodyPr anchor="ctr"/>
+          <a:p>
+            <a:pPr lvl="0" algn="ctr">
+              <a:defRPr/>
+            </a:pPr>
+            <a:r>
+              <a:rPr lang="ko-KR" altLang="en-US">
+                <a:ln w="9525">
+                  <a:solidFill>
+                    <a:schemeClr val="dk1"/>
+                  </a:solidFill>
+                </a:ln>
+                <a:solidFill>
+                  <a:schemeClr val="dk1"/>
+                </a:solidFill>
+              </a:rPr>
+              <a:t>남은 시간</a:t>
+            </a:r>
+            <a:endParaRPr lang="ko-KR" altLang="en-US">
+              <a:ln w="9525">
+                <a:solidFill>
+                  <a:schemeClr val="dk1"/>
+                </a:solidFill>
+              </a:ln>
+              <a:solidFill>
+                <a:schemeClr val="dk1"/>
+              </a:solidFill>
+            </a:endParaRPr>
+          </a:p>
+        </p:txBody>
+      </p:sp>
+      <p:sp>
+        <p:nvSpPr>
+          <p:cNvPr id="54" name="직사각형 53"/>
+          <p:cNvSpPr/>
+          <p:nvPr/>
+        </p:nvSpPr>
+        <p:spPr>
+          <a:xfrm>
+            <a:off x="372018" y="5840649"/>
+            <a:ext cx="5936774" cy="759972"/>
+          </a:xfrm>
+          <a:prstGeom prst="rect">
+            <a:avLst/>
+          </a:prstGeom>
+          <a:solidFill>
+            <a:schemeClr val="lt1"/>
+          </a:solidFill>
+          <a:ln>
+            <a:solidFill>
+              <a:schemeClr val="dk1"/>
+            </a:solidFill>
+          </a:ln>
+        </p:spPr>
+        <p:style>
+          <a:lnRef idx="2">
+            <a:schemeClr val="accent1">
+              <a:shade val="20000"/>
+            </a:schemeClr>
+          </a:lnRef>
+          <a:fillRef idx="1">
+            <a:schemeClr val="accent1"/>
+          </a:fillRef>
+          <a:effectRef idx="0">
+            <a:schemeClr val="accent1"/>
+          </a:effectRef>
+          <a:fontRef idx="minor">
+            <a:schemeClr val="lt1"/>
+          </a:fontRef>
+        </p:style>
+        <p:txBody>
+          <a:bodyPr anchor="ctr"/>
+          <a:p>
+            <a:pPr lvl="0" algn="ctr">
+              <a:defRPr/>
+            </a:pPr>
+            <a:r>
+              <a:rPr lang="ko-KR" altLang="en-US">
+                <a:ln w="9525">
+                  <a:solidFill>
+                    <a:schemeClr val="dk1"/>
+                  </a:solidFill>
+                </a:ln>
+                <a:solidFill>
+                  <a:schemeClr val="dk1"/>
+                </a:solidFill>
+              </a:rPr>
+              <a:t> 답안 작성칸</a:t>
+            </a:r>
+            <a:endParaRPr lang="ko-KR" altLang="en-US">
+              <a:ln w="9525">
+                <a:solidFill>
+                  <a:schemeClr val="dk1"/>
+                </a:solidFill>
+              </a:ln>
+              <a:solidFill>
+                <a:schemeClr val="dk1"/>
+              </a:solidFill>
+            </a:endParaRPr>
+          </a:p>
+        </p:txBody>
+      </p:sp>
+      <p:sp>
+        <p:nvSpPr>
+          <p:cNvPr id="55" name="직사각형 54"/>
+          <p:cNvSpPr/>
+          <p:nvPr/>
+        </p:nvSpPr>
+        <p:spPr>
+          <a:xfrm>
+            <a:off x="372018" y="2191642"/>
+            <a:ext cx="5936774" cy="3649007"/>
+          </a:xfrm>
+          <a:prstGeom prst="rect">
+            <a:avLst/>
+          </a:prstGeom>
+          <a:solidFill>
+            <a:schemeClr val="lt1"/>
+          </a:solidFill>
+          <a:ln>
+            <a:solidFill>
+              <a:schemeClr val="dk1"/>
+            </a:solidFill>
+          </a:ln>
+        </p:spPr>
+        <p:style>
+          <a:lnRef idx="2">
+            <a:schemeClr val="accent1">
+              <a:shade val="20000"/>
+            </a:schemeClr>
+          </a:lnRef>
+          <a:fillRef idx="1">
+            <a:schemeClr val="accent1"/>
+          </a:fillRef>
+          <a:effectRef idx="0">
+            <a:schemeClr val="accent1"/>
+          </a:effectRef>
+          <a:fontRef idx="minor">
+            <a:schemeClr val="lt1"/>
+          </a:fontRef>
+        </p:style>
+        <p:txBody>
+          <a:bodyPr anchor="ctr"/>
+          <a:p>
+            <a:pPr lvl="0" algn="ctr">
+              <a:defRPr/>
+            </a:pPr>
+            <a:r>
+              <a:rPr lang="ko-KR" altLang="en-US">
+                <a:ln w="9525">
+                  <a:solidFill>
+                    <a:schemeClr val="dk1"/>
+                  </a:solidFill>
+                </a:ln>
+                <a:solidFill>
+                  <a:schemeClr val="dk1"/>
+                </a:solidFill>
+              </a:rPr>
+              <a:t>문제</a:t>
+            </a:r>
+            <a:endParaRPr lang="ko-KR" altLang="en-US">
+              <a:ln w="9525">
+                <a:solidFill>
+                  <a:schemeClr val="dk1"/>
+                </a:solidFill>
+              </a:ln>
+              <a:solidFill>
+                <a:schemeClr val="dk1"/>
+              </a:solidFill>
+            </a:endParaRPr>
+          </a:p>
+        </p:txBody>
+      </p:sp>
+      <p:sp>
+        <p:nvSpPr>
+          <p:cNvPr id="56" name="직사각형 55"/>
+          <p:cNvSpPr/>
+          <p:nvPr/>
+        </p:nvSpPr>
+        <p:spPr>
+          <a:xfrm>
+            <a:off x="5477887" y="5840649"/>
+            <a:ext cx="830904" cy="759972"/>
+          </a:xfrm>
+          <a:prstGeom prst="rect">
+            <a:avLst/>
+          </a:prstGeom>
+          <a:solidFill>
+            <a:schemeClr val="lt1"/>
+          </a:solidFill>
+          <a:ln>
+            <a:solidFill>
+              <a:schemeClr val="dk1"/>
+            </a:solidFill>
+          </a:ln>
+        </p:spPr>
+        <p:style>
+          <a:lnRef idx="2">
+            <a:schemeClr val="accent1">
+              <a:shade val="20000"/>
+            </a:schemeClr>
+          </a:lnRef>
+          <a:fillRef idx="1">
+            <a:schemeClr val="accent1"/>
+          </a:fillRef>
+          <a:effectRef idx="0">
+            <a:schemeClr val="accent1"/>
+          </a:effectRef>
+          <a:fontRef idx="minor">
+            <a:schemeClr val="lt1"/>
+          </a:fontRef>
+        </p:style>
+        <p:txBody>
+          <a:bodyPr anchor="ctr"/>
+          <a:p>
+            <a:pPr lvl="0" algn="ctr">
+              <a:defRPr/>
+            </a:pPr>
+            <a:r>
+              <a:rPr lang="ko-KR" altLang="en-US">
+                <a:ln w="9525">
+                  <a:solidFill>
+                    <a:schemeClr val="dk1"/>
+                  </a:solidFill>
+                </a:ln>
+                <a:solidFill>
+                  <a:schemeClr val="dk1"/>
+                </a:solidFill>
+              </a:rPr>
+              <a:t>제출</a:t>
+            </a:r>
+            <a:endParaRPr lang="ko-KR" altLang="en-US">
+              <a:ln w="9525">
+                <a:solidFill>
+                  <a:schemeClr val="dk1"/>
+                </a:solidFill>
+              </a:ln>
+              <a:solidFill>
+                <a:schemeClr val="dk1"/>
+              </a:solidFill>
+            </a:endParaRPr>
           </a:p>
         </p:txBody>
       </p:sp>
     </p:spTree>
     <p:extLst>
       <p:ext uri="{BB962C8B-B14F-4D97-AF65-F5344CB8AC3E}">
-        <p14:creationId xmlns:p14="http://schemas.microsoft.com/office/powerpoint/2010/main" val="172617095"/>
+        <p14:creationId xmlns:p14="http://schemas.microsoft.com/office/powerpoint/2010/main" val="1400937276"/>
       </p:ext>
     </p:extLst>
   </p:cSld>

--- a/docs/4_화면정의서/화면정의서.pptx
+++ b/docs/4_화면정의서/화면정의서.pptx
@@ -6045,6 +6045,22 @@
             </a:pPr>
             <a:r>
               <a:rPr lang="ko-KR" altLang="en-US" u="sng"/>
+              <a:t>아이디 입력</a:t>
+            </a:r>
+            <a:endParaRPr lang="ko-KR" altLang="en-US" u="sng"/>
+          </a:p>
+          <a:p>
+            <a:pPr lvl="0">
+              <a:defRPr/>
+            </a:pPr>
+            <a:endParaRPr lang="ko-KR" altLang="en-US" u="sng"/>
+          </a:p>
+          <a:p>
+            <a:pPr lvl="0">
+              <a:defRPr/>
+            </a:pPr>
+            <a:r>
+              <a:rPr lang="ko-KR" altLang="en-US" u="sng"/>
               <a:t>비밀번호 입력</a:t>
             </a:r>
             <a:endParaRPr lang="ko-KR" altLang="en-US" u="sng"/>
@@ -6078,22 +6094,6 @@
             <a:r>
               <a:rPr lang="ko-KR" altLang="en-US" u="sng"/>
               <a:t>전화번호 입력</a:t>
-            </a:r>
-            <a:endParaRPr lang="ko-KR" altLang="en-US" u="sng"/>
-          </a:p>
-          <a:p>
-            <a:pPr lvl="0">
-              <a:defRPr/>
-            </a:pPr>
-            <a:endParaRPr lang="ko-KR" altLang="en-US" u="sng"/>
-          </a:p>
-          <a:p>
-            <a:pPr lvl="0">
-              <a:defRPr/>
-            </a:pPr>
-            <a:r>
-              <a:rPr lang="ko-KR" altLang="en-US" u="sng"/>
-              <a:t>학년 선택</a:t>
             </a:r>
             <a:endParaRPr lang="ko-KR" altLang="en-US" u="sng"/>
           </a:p>
